--- a/bloque2_ia/csbc26_b2_ia.pptx
+++ b/bloque2_ia/csbc26_b2_ia.pptx
@@ -6,22 +6,22 @@
   </p:sldMasterIdLst>
   <p:sldIdLst>
     <p:sldId id="256" r:id="rId7"/>
-    <p:sldId id="257" r:id="rId8"/>
-    <p:sldId id="258" r:id="rId9"/>
-    <p:sldId id="259" r:id="rId10"/>
-    <p:sldId id="260" r:id="rId11"/>
-    <p:sldId id="261" r:id="rId12"/>
-    <p:sldId id="262" r:id="rId13"/>
-    <p:sldId id="263" r:id="rId14"/>
-    <p:sldId id="264" r:id="rId15"/>
-    <p:sldId id="265" r:id="rId16"/>
-    <p:sldId id="266" r:id="rId17"/>
-    <p:sldId id="267" r:id="rId18"/>
-    <p:sldId id="268" r:id="rId19"/>
-    <p:sldId id="269" r:id="rId20"/>
-    <p:sldId id="270" r:id="rId21"/>
-    <p:sldId id="271" r:id="rId22"/>
-    <p:sldId id="272" r:id="rId23"/>
+    <p:sldId id="257" r:id="rId9"/>
+    <p:sldId id="258" r:id="rId10"/>
+    <p:sldId id="259" r:id="rId11"/>
+    <p:sldId id="260" r:id="rId12"/>
+    <p:sldId id="261" r:id="rId13"/>
+    <p:sldId id="262" r:id="rId14"/>
+    <p:sldId id="263" r:id="rId15"/>
+    <p:sldId id="264" r:id="rId16"/>
+    <p:sldId id="265" r:id="rId17"/>
+    <p:sldId id="266" r:id="rId18"/>
+    <p:sldId id="267" r:id="rId19"/>
+    <p:sldId id="268" r:id="rId20"/>
+    <p:sldId id="269" r:id="rId21"/>
+    <p:sldId id="270" r:id="rId22"/>
+    <p:sldId id="271" r:id="rId23"/>
+    <p:sldId id="272" r:id="rId24"/>
   </p:sldIdLst>
   <p:sldSz cx="12188952" cy="6858000" type="screen4x3"/>
   <p:notesSz cx="6858000" cy="9144000"/>
@@ -121,6 +121,1546 @@
     </a:lvl9pPr>
   </p:defaultTextStyle>
 </p:presentation>
+</file>
+
+<file path=ppt/notesMasters/notesMaster1.xml><?xml version="1.0" encoding="utf-8"?>
+<p:notesMaster xmlns:a="http://schemas.openxmlformats.org/drawingml/2006/main" xmlns:p="http://schemas.openxmlformats.org/presentationml/2006/main" xmlns:r="http://schemas.openxmlformats.org/officeDocument/2006/relationships">
+  <p:cSld>
+    <p:bg>
+      <p:bgRef idx="1001">
+        <a:schemeClr val="bg1"/>
+      </p:bgRef>
+    </p:bg>
+    <p:spTree>
+      <p:nvGrpSpPr>
+        <p:cNvPr id="1" name=""/>
+        <p:cNvGrpSpPr/>
+        <p:nvPr/>
+      </p:nvGrpSpPr>
+      <p:grpSpPr>
+        <a:xfrm>
+          <a:off x="0" y="0"/>
+          <a:ext cx="0" cy="0"/>
+          <a:chOff x="0" y="0"/>
+          <a:chExt cx="0" cy="0"/>
+        </a:xfrm>
+      </p:grpSpPr>
+      <p:sp>
+        <p:nvSpPr>
+          <p:cNvPr id="2" name="Header Placeholder 1"/>
+          <p:cNvSpPr>
+            <a:spLocks noGrp="1"/>
+          </p:cNvSpPr>
+          <p:nvPr>
+            <p:ph type="hdr" sz="quarter"/>
+          </p:nvPr>
+        </p:nvSpPr>
+        <p:spPr>
+          <a:xfrm>
+            <a:off x="0" y="0"/>
+            <a:ext cx="2971800" cy="457200"/>
+          </a:xfrm>
+          <a:prstGeom prst="rect">
+            <a:avLst/>
+          </a:prstGeom>
+        </p:spPr>
+        <p:txBody>
+          <a:bodyPr vert="horz" lIns="91440" tIns="45720" rIns="91440" bIns="45720" rtlCol="0"/>
+          <a:lstStyle>
+            <a:lvl1pPr algn="l">
+              <a:defRPr sz="1200"/>
+            </a:lvl1pPr>
+          </a:lstStyle>
+          <a:p>
+            <a:endParaRPr lang="en-US"/>
+          </a:p>
+        </p:txBody>
+      </p:sp>
+      <p:sp>
+        <p:nvSpPr>
+          <p:cNvPr id="3" name="Date Placeholder 2"/>
+          <p:cNvSpPr>
+            <a:spLocks noGrp="1"/>
+          </p:cNvSpPr>
+          <p:nvPr>
+            <p:ph type="dt" idx="1"/>
+          </p:nvPr>
+        </p:nvSpPr>
+        <p:spPr>
+          <a:xfrm>
+            <a:off x="3884613" y="0"/>
+            <a:ext cx="2971800" cy="457200"/>
+          </a:xfrm>
+          <a:prstGeom prst="rect">
+            <a:avLst/>
+          </a:prstGeom>
+        </p:spPr>
+        <p:txBody>
+          <a:bodyPr vert="horz" lIns="91440" tIns="45720" rIns="91440" bIns="45720" rtlCol="0"/>
+          <a:lstStyle>
+            <a:lvl1pPr algn="r">
+              <a:defRPr sz="1200"/>
+            </a:lvl1pPr>
+          </a:lstStyle>
+          <a:p>
+            <a:fld id="{0F89C1C7-3DCD-1040-A9CF-14679D8B5DDD}" type="datetimeFigureOut">
+              <a:rPr lang="en-US" smtClean="0"/>
+              <a:t>10/17/16</a:t>
+            </a:fld>
+            <a:endParaRPr lang="en-US"/>
+          </a:p>
+        </p:txBody>
+      </p:sp>
+      <p:sp>
+        <p:nvSpPr>
+          <p:cNvPr id="4" name="Slide Image Placeholder 3"/>
+          <p:cNvSpPr>
+            <a:spLocks noGrp="1" noRot="1" noChangeAspect="1"/>
+          </p:cNvSpPr>
+          <p:nvPr>
+            <p:ph type="sldImg" idx="2"/>
+          </p:nvPr>
+        </p:nvSpPr>
+        <p:spPr>
+          <a:xfrm>
+            <a:off x="1143000" y="685800"/>
+            <a:ext cx="4572000" cy="3429000"/>
+          </a:xfrm>
+          <a:prstGeom prst="rect">
+            <a:avLst/>
+          </a:prstGeom>
+          <a:noFill/>
+          <a:ln w="12700">
+            <a:solidFill>
+              <a:prstClr val="black"/>
+            </a:solidFill>
+          </a:ln>
+        </p:spPr>
+        <p:txBody>
+          <a:bodyPr vert="horz" lIns="91440" tIns="45720" rIns="91440" bIns="45720" rtlCol="0" anchor="ctr"/>
+          <a:lstStyle/>
+          <a:p>
+            <a:endParaRPr lang="en-US"/>
+          </a:p>
+        </p:txBody>
+      </p:sp>
+      <p:sp>
+        <p:nvSpPr>
+          <p:cNvPr id="5" name="Notes Placeholder 4"/>
+          <p:cNvSpPr>
+            <a:spLocks noGrp="1"/>
+          </p:cNvSpPr>
+          <p:nvPr>
+            <p:ph type="body" sz="quarter" idx="3"/>
+          </p:nvPr>
+        </p:nvSpPr>
+        <p:spPr>
+          <a:xfrm>
+            <a:off x="685800" y="4343400"/>
+            <a:ext cx="5486400" cy="4114800"/>
+          </a:xfrm>
+          <a:prstGeom prst="rect">
+            <a:avLst/>
+          </a:prstGeom>
+        </p:spPr>
+        <p:txBody>
+          <a:bodyPr vert="horz" lIns="91440" tIns="45720" rIns="91440" bIns="45720" rtlCol="0"/>
+          <a:lstStyle/>
+          <a:p>
+            <a:pPr lvl="0"/>
+            <a:r>
+              <a:rPr lang="en-US" smtClean="0"/>
+              <a:t>Click to edit Master text styles</a:t>
+            </a:r>
+          </a:p>
+          <a:p>
+            <a:pPr lvl="1"/>
+            <a:r>
+              <a:rPr lang="en-US" smtClean="0"/>
+              <a:t>Second level</a:t>
+            </a:r>
+          </a:p>
+          <a:p>
+            <a:pPr lvl="2"/>
+            <a:r>
+              <a:rPr lang="en-US" smtClean="0"/>
+              <a:t>Third level</a:t>
+            </a:r>
+          </a:p>
+          <a:p>
+            <a:pPr lvl="3"/>
+            <a:r>
+              <a:rPr lang="en-US" smtClean="0"/>
+              <a:t>Fourth level</a:t>
+            </a:r>
+          </a:p>
+          <a:p>
+            <a:pPr lvl="4"/>
+            <a:r>
+              <a:rPr lang="en-US" smtClean="0"/>
+              <a:t>Fifth level</a:t>
+            </a:r>
+            <a:endParaRPr lang="en-US"/>
+          </a:p>
+        </p:txBody>
+      </p:sp>
+      <p:sp>
+        <p:nvSpPr>
+          <p:cNvPr id="6" name="Footer Placeholder 5"/>
+          <p:cNvSpPr>
+            <a:spLocks noGrp="1"/>
+          </p:cNvSpPr>
+          <p:nvPr>
+            <p:ph type="ftr" sz="quarter" idx="4"/>
+          </p:nvPr>
+        </p:nvSpPr>
+        <p:spPr>
+          <a:xfrm>
+            <a:off x="0" y="8685213"/>
+            <a:ext cx="2971800" cy="457200"/>
+          </a:xfrm>
+          <a:prstGeom prst="rect">
+            <a:avLst/>
+          </a:prstGeom>
+        </p:spPr>
+        <p:txBody>
+          <a:bodyPr vert="horz" lIns="91440" tIns="45720" rIns="91440" bIns="45720" rtlCol="0" anchor="b"/>
+          <a:lstStyle>
+            <a:lvl1pPr algn="l">
+              <a:defRPr sz="1200"/>
+            </a:lvl1pPr>
+          </a:lstStyle>
+          <a:p>
+            <a:endParaRPr lang="en-US"/>
+          </a:p>
+        </p:txBody>
+      </p:sp>
+      <p:sp>
+        <p:nvSpPr>
+          <p:cNvPr id="7" name="Slide Number Placeholder 6"/>
+          <p:cNvSpPr>
+            <a:spLocks noGrp="1"/>
+          </p:cNvSpPr>
+          <p:nvPr>
+            <p:ph type="sldNum" sz="quarter" idx="5"/>
+          </p:nvPr>
+        </p:nvSpPr>
+        <p:spPr>
+          <a:xfrm>
+            <a:off x="3884613" y="8685213"/>
+            <a:ext cx="2971800" cy="457200"/>
+          </a:xfrm>
+          <a:prstGeom prst="rect">
+            <a:avLst/>
+          </a:prstGeom>
+        </p:spPr>
+        <p:txBody>
+          <a:bodyPr vert="horz" lIns="91440" tIns="45720" rIns="91440" bIns="45720" rtlCol="0" anchor="b"/>
+          <a:lstStyle>
+            <a:lvl1pPr algn="r">
+              <a:defRPr sz="1200"/>
+            </a:lvl1pPr>
+          </a:lstStyle>
+          <a:p>
+            <a:fld id="{BB5E49A5-4136-284D-997B-48E1D791AD67}" type="slidenum">
+              <a:rPr lang="en-US" smtClean="0"/>
+              <a:t>‹#›</a:t>
+            </a:fld>
+            <a:endParaRPr lang="en-US"/>
+          </a:p>
+        </p:txBody>
+      </p:sp>
+    </p:spTree>
+    <p:extLst>
+      <p:ext uri="{BB962C8B-B14F-4D97-AF65-F5344CB8AC3E}">
+        <p14:creationId xmlns:p14="http://schemas.microsoft.com/office/powerpoint/2010/main" val="2623252185"/>
+      </p:ext>
+    </p:extLst>
+  </p:cSld>
+  <p:clrMap bg1="lt1" tx1="dk1" bg2="lt2" tx2="dk2" accent1="accent1" accent2="accent2" accent3="accent3" accent4="accent4" accent5="accent5" accent6="accent6" hlink="hlink" folHlink="folHlink"/>
+  <p:notesStyle>
+    <a:lvl1pPr marL="0" algn="l" defTabSz="457200" rtl="0" eaLnBrk="1" latinLnBrk="0" hangingPunct="1">
+      <a:defRPr sz="1200" kern="1200">
+        <a:solidFill>
+          <a:schemeClr val="tx1"/>
+        </a:solidFill>
+        <a:latin typeface="+mn-lt"/>
+        <a:ea typeface="+mn-ea"/>
+        <a:cs typeface="+mn-cs"/>
+      </a:defRPr>
+    </a:lvl1pPr>
+    <a:lvl2pPr marL="457200" algn="l" defTabSz="457200" rtl="0" eaLnBrk="1" latinLnBrk="0" hangingPunct="1">
+      <a:defRPr sz="1200" kern="1200">
+        <a:solidFill>
+          <a:schemeClr val="tx1"/>
+        </a:solidFill>
+        <a:latin typeface="+mn-lt"/>
+        <a:ea typeface="+mn-ea"/>
+        <a:cs typeface="+mn-cs"/>
+      </a:defRPr>
+    </a:lvl2pPr>
+    <a:lvl3pPr marL="914400" algn="l" defTabSz="457200" rtl="0" eaLnBrk="1" latinLnBrk="0" hangingPunct="1">
+      <a:defRPr sz="1200" kern="1200">
+        <a:solidFill>
+          <a:schemeClr val="tx1"/>
+        </a:solidFill>
+        <a:latin typeface="+mn-lt"/>
+        <a:ea typeface="+mn-ea"/>
+        <a:cs typeface="+mn-cs"/>
+      </a:defRPr>
+    </a:lvl3pPr>
+    <a:lvl4pPr marL="1371600" algn="l" defTabSz="457200" rtl="0" eaLnBrk="1" latinLnBrk="0" hangingPunct="1">
+      <a:defRPr sz="1200" kern="1200">
+        <a:solidFill>
+          <a:schemeClr val="tx1"/>
+        </a:solidFill>
+        <a:latin typeface="+mn-lt"/>
+        <a:ea typeface="+mn-ea"/>
+        <a:cs typeface="+mn-cs"/>
+      </a:defRPr>
+    </a:lvl4pPr>
+    <a:lvl5pPr marL="1828800" algn="l" defTabSz="457200" rtl="0" eaLnBrk="1" latinLnBrk="0" hangingPunct="1">
+      <a:defRPr sz="1200" kern="1200">
+        <a:solidFill>
+          <a:schemeClr val="tx1"/>
+        </a:solidFill>
+        <a:latin typeface="+mn-lt"/>
+        <a:ea typeface="+mn-ea"/>
+        <a:cs typeface="+mn-cs"/>
+      </a:defRPr>
+    </a:lvl5pPr>
+    <a:lvl6pPr marL="2286000" algn="l" defTabSz="457200" rtl="0" eaLnBrk="1" latinLnBrk="0" hangingPunct="1">
+      <a:defRPr sz="1200" kern="1200">
+        <a:solidFill>
+          <a:schemeClr val="tx1"/>
+        </a:solidFill>
+        <a:latin typeface="+mn-lt"/>
+        <a:ea typeface="+mn-ea"/>
+        <a:cs typeface="+mn-cs"/>
+      </a:defRPr>
+    </a:lvl6pPr>
+    <a:lvl7pPr marL="2743200" algn="l" defTabSz="457200" rtl="0" eaLnBrk="1" latinLnBrk="0" hangingPunct="1">
+      <a:defRPr sz="1200" kern="1200">
+        <a:solidFill>
+          <a:schemeClr val="tx1"/>
+        </a:solidFill>
+        <a:latin typeface="+mn-lt"/>
+        <a:ea typeface="+mn-ea"/>
+        <a:cs typeface="+mn-cs"/>
+      </a:defRPr>
+    </a:lvl7pPr>
+    <a:lvl8pPr marL="3200400" algn="l" defTabSz="457200" rtl="0" eaLnBrk="1" latinLnBrk="0" hangingPunct="1">
+      <a:defRPr sz="1200" kern="1200">
+        <a:solidFill>
+          <a:schemeClr val="tx1"/>
+        </a:solidFill>
+        <a:latin typeface="+mn-lt"/>
+        <a:ea typeface="+mn-ea"/>
+        <a:cs typeface="+mn-cs"/>
+      </a:defRPr>
+    </a:lvl8pPr>
+    <a:lvl9pPr marL="3657600" algn="l" defTabSz="457200" rtl="0" eaLnBrk="1" latinLnBrk="0" hangingPunct="1">
+      <a:defRPr sz="1200" kern="1200">
+        <a:solidFill>
+          <a:schemeClr val="tx1"/>
+        </a:solidFill>
+        <a:latin typeface="+mn-lt"/>
+        <a:ea typeface="+mn-ea"/>
+        <a:cs typeface="+mn-cs"/>
+      </a:defRPr>
+    </a:lvl9pPr>
+  </p:notesStyle>
+</p:notesMaster>
+</file>
+
+<file path=ppt/notesSlides/notesSlide1.xml><?xml version="1.0" encoding="utf-8"?>
+<p:notes xmlns:a="http://schemas.openxmlformats.org/drawingml/2006/main" xmlns:p="http://schemas.openxmlformats.org/presentationml/2006/main" xmlns:r="http://schemas.openxmlformats.org/officeDocument/2006/relationships">
+  <p:cSld>
+    <p:spTree>
+      <p:nvGrpSpPr>
+        <p:cNvPr id="1" name=""/>
+        <p:cNvGrpSpPr/>
+        <p:nvPr/>
+      </p:nvGrpSpPr>
+      <p:grpSpPr>
+        <a:xfrm>
+          <a:off x="0" y="0"/>
+          <a:ext cx="0" cy="0"/>
+          <a:chOff x="0" y="0"/>
+          <a:chExt cx="0" cy="0"/>
+        </a:xfrm>
+      </p:grpSpPr>
+      <p:sp>
+        <p:nvSpPr>
+          <p:cNvPr id="2" name="Slide Image Placeholder 1"/>
+          <p:cNvSpPr>
+            <a:spLocks noGrp="1"/>
+          </p:cNvSpPr>
+          <p:nvPr>
+            <p:ph type="sldImg" idx="2"/>
+          </p:nvPr>
+        </p:nvSpPr>
+        <p:spPr/>
+      </p:sp>
+      <p:sp>
+        <p:nvSpPr>
+          <p:cNvPr id="3" name="Notes Placeholder 2"/>
+          <p:cNvSpPr>
+            <a:spLocks noGrp="1"/>
+          </p:cNvSpPr>
+          <p:nvPr>
+            <p:ph type="body" idx="3" sz="quarter"/>
+          </p:nvPr>
+        </p:nvSpPr>
+        <p:spPr/>
+        <p:txBody>
+          <a:bodyPr/>
+          <a:lstStyle/>
+          <a:p>
+            <a:r>
+              <a:t>Bienvenida al bloque de IA aplicada al análisis forense de leaks underground. En la próxima hora vamos a ver tres herramientas concretas: embeddings semánticos, LLMs locales para extracción de entidades y estilometría computacional para atribución de autoría. El hilo conductor es uno solo: cuando el vocabulario cambia cada semana y el actor cambia de handle, ¿cómo seguimos identificando a la misma persona? Todo lo que veamos hoy corre en local, sin mandar un solo byte de datos sensibles a una API externa.</a:t>
+            </a:r>
+          </a:p>
+        </p:txBody>
+      </p:sp>
+      <p:sp>
+        <p:nvSpPr>
+          <p:cNvPr id="4" name="Slide Number Placeholder 3"/>
+          <p:cNvSpPr>
+            <a:spLocks noGrp="1"/>
+          </p:cNvSpPr>
+          <p:nvPr>
+            <p:ph type="sldNum" idx="5" sz="quarter"/>
+          </p:nvPr>
+        </p:nvSpPr>
+        <p:spPr/>
+      </p:sp>
+    </p:spTree>
+  </p:cSld>
+  <p:clrMapOvr>
+    <a:masterClrMapping/>
+  </p:clrMapOvr>
+</p:notes>
+</file>
+
+<file path=ppt/notesSlides/notesSlide10.xml><?xml version="1.0" encoding="utf-8"?>
+<p:notes xmlns:a="http://schemas.openxmlformats.org/drawingml/2006/main" xmlns:p="http://schemas.openxmlformats.org/presentationml/2006/main" xmlns:r="http://schemas.openxmlformats.org/officeDocument/2006/relationships">
+  <p:cSld>
+    <p:spTree>
+      <p:nvGrpSpPr>
+        <p:cNvPr id="1" name=""/>
+        <p:cNvGrpSpPr/>
+        <p:nvPr/>
+      </p:nvGrpSpPr>
+      <p:grpSpPr>
+        <a:xfrm>
+          <a:off x="0" y="0"/>
+          <a:ext cx="0" cy="0"/>
+          <a:chOff x="0" y="0"/>
+          <a:chExt cx="0" cy="0"/>
+        </a:xfrm>
+      </p:grpSpPr>
+      <p:sp>
+        <p:nvSpPr>
+          <p:cNvPr id="2" name="Slide Image Placeholder 1"/>
+          <p:cNvSpPr>
+            <a:spLocks noGrp="1"/>
+          </p:cNvSpPr>
+          <p:nvPr>
+            <p:ph type="sldImg" idx="2"/>
+          </p:nvPr>
+        </p:nvSpPr>
+        <p:spPr/>
+      </p:sp>
+      <p:sp>
+        <p:nvSpPr>
+          <p:cNvPr id="3" name="Notes Placeholder 2"/>
+          <p:cNvSpPr>
+            <a:spLocks noGrp="1"/>
+          </p:cNvSpPr>
+          <p:nvPr>
+            <p:ph type="body" idx="3" sz="quarter"/>
+          </p:nvPr>
+        </p:nvSpPr>
+        <p:spPr/>
+        <p:txBody>
+          <a:bodyPr/>
+          <a:lstStyle/>
+          <a:p>
+            <a:r>
+              <a:t>Cambiamos de tema: de embeddings a LLMs locales. Aquí la palabra clave es 'local' — con leaks que contienen datos de personas reales, mandar texto a una API externa no es una opción sobre la mesa, es una línea roja. Vamos a ver cómo hacer NER de dominio específico sin salir de nuestra propia infraestructura.</a:t>
+            </a:r>
+          </a:p>
+        </p:txBody>
+      </p:sp>
+      <p:sp>
+        <p:nvSpPr>
+          <p:cNvPr id="4" name="Slide Number Placeholder 3"/>
+          <p:cNvSpPr>
+            <a:spLocks noGrp="1"/>
+          </p:cNvSpPr>
+          <p:nvPr>
+            <p:ph type="sldNum" idx="5" sz="quarter"/>
+          </p:nvPr>
+        </p:nvSpPr>
+        <p:spPr/>
+      </p:sp>
+    </p:spTree>
+  </p:cSld>
+  <p:clrMapOvr>
+    <a:masterClrMapping/>
+  </p:clrMapOvr>
+</p:notes>
+</file>
+
+<file path=ppt/notesSlides/notesSlide11.xml><?xml version="1.0" encoding="utf-8"?>
+<p:notes xmlns:a="http://schemas.openxmlformats.org/drawingml/2006/main" xmlns:p="http://schemas.openxmlformats.org/presentationml/2006/main" xmlns:r="http://schemas.openxmlformats.org/officeDocument/2006/relationships">
+  <p:cSld>
+    <p:spTree>
+      <p:nvGrpSpPr>
+        <p:cNvPr id="1" name=""/>
+        <p:cNvGrpSpPr/>
+        <p:nvPr/>
+      </p:nvGrpSpPr>
+      <p:grpSpPr>
+        <a:xfrm>
+          <a:off x="0" y="0"/>
+          <a:ext cx="0" cy="0"/>
+          <a:chOff x="0" y="0"/>
+          <a:chExt cx="0" cy="0"/>
+        </a:xfrm>
+      </p:grpSpPr>
+      <p:sp>
+        <p:nvSpPr>
+          <p:cNvPr id="2" name="Slide Image Placeholder 1"/>
+          <p:cNvSpPr>
+            <a:spLocks noGrp="1"/>
+          </p:cNvSpPr>
+          <p:nvPr>
+            <p:ph type="sldImg" idx="2"/>
+          </p:nvPr>
+        </p:nvSpPr>
+        <p:spPr/>
+      </p:sp>
+      <p:sp>
+        <p:nvSpPr>
+          <p:cNvPr id="3" name="Notes Placeholder 2"/>
+          <p:cNvSpPr>
+            <a:spLocks noGrp="1"/>
+          </p:cNvSpPr>
+          <p:nvPr>
+            <p:ph type="body" idx="3" sz="quarter"/>
+          </p:nvPr>
+        </p:nvSpPr>
+        <p:spPr/>
+        <p:txBody>
+          <a:bodyPr/>
+          <a:lstStyle/>
+          <a:p>
+            <a:r>
+              <a:t>Aquí vale ser honestos con el tradeoff: sí, un modelo local cuantizado es más lento que llamar a una API de última generación. Pero la pregunta no es velocidad, es riesgo — si un dato de una víctima real termina en los logs de entrenamiento de un tercero, no hay marcha atrás. 16GB de RAM y unos segundos de espera es un precio bajo comparado con eso. Con la regla clara, pasamos a ver cómo se usa ese modelo local para extraer entidades.</a:t>
+            </a:r>
+          </a:p>
+        </p:txBody>
+      </p:sp>
+      <p:sp>
+        <p:nvSpPr>
+          <p:cNvPr id="4" name="Slide Number Placeholder 3"/>
+          <p:cNvSpPr>
+            <a:spLocks noGrp="1"/>
+          </p:cNvSpPr>
+          <p:nvPr>
+            <p:ph type="sldNum" idx="5" sz="quarter"/>
+          </p:nvPr>
+        </p:nvSpPr>
+        <p:spPr/>
+      </p:sp>
+    </p:spTree>
+  </p:cSld>
+  <p:clrMapOvr>
+    <a:masterClrMapping/>
+  </p:clrMapOvr>
+</p:notes>
+</file>
+
+<file path=ppt/notesSlides/notesSlide12.xml><?xml version="1.0" encoding="utf-8"?>
+<p:notes xmlns:a="http://schemas.openxmlformats.org/drawingml/2006/main" xmlns:p="http://schemas.openxmlformats.org/presentationml/2006/main" xmlns:r="http://schemas.openxmlformats.org/officeDocument/2006/relationships">
+  <p:cSld>
+    <p:spTree>
+      <p:nvGrpSpPr>
+        <p:cNvPr id="1" name=""/>
+        <p:cNvGrpSpPr/>
+        <p:nvPr/>
+      </p:nvGrpSpPr>
+      <p:grpSpPr>
+        <a:xfrm>
+          <a:off x="0" y="0"/>
+          <a:ext cx="0" cy="0"/>
+          <a:chOff x="0" y="0"/>
+          <a:chExt cx="0" cy="0"/>
+        </a:xfrm>
+      </p:grpSpPr>
+      <p:sp>
+        <p:nvSpPr>
+          <p:cNvPr id="2" name="Slide Image Placeholder 1"/>
+          <p:cNvSpPr>
+            <a:spLocks noGrp="1"/>
+          </p:cNvSpPr>
+          <p:nvPr>
+            <p:ph type="sldImg" idx="2"/>
+          </p:nvPr>
+        </p:nvSpPr>
+        <p:spPr/>
+      </p:sp>
+      <p:sp>
+        <p:nvSpPr>
+          <p:cNvPr id="3" name="Notes Placeholder 2"/>
+          <p:cNvSpPr>
+            <a:spLocks noGrp="1"/>
+          </p:cNvSpPr>
+          <p:nvPr>
+            <p:ph type="body" idx="3" sz="quarter"/>
+          </p:nvPr>
+        </p:nvSpPr>
+        <p:spPr/>
+        <p:txBody>
+          <a:bodyPr/>
+          <a:lstStyle/>
+          <a:p>
+            <a:r>
+              <a:t>Aquí es donde conviene contrastar explícitamente con la regla de embeddings que vimos antes: para NER SÍ es aceptable traducir primero, porque lo que buscamos es la entidad (un CVE, una wallet, un alias), no el estilo del autor. No es que nos hayamos olvidado de la regla anterior, es que cada técnica mide una señal distinta y hay que tratarlas distinto. El checkpoint automático no es un detalle menor: con miles de posts, un corte a mitad de proceso sin guardar es tiempo de GPU perdido.</a:t>
+            </a:r>
+          </a:p>
+        </p:txBody>
+      </p:sp>
+      <p:sp>
+        <p:nvSpPr>
+          <p:cNvPr id="4" name="Slide Number Placeholder 3"/>
+          <p:cNvSpPr>
+            <a:spLocks noGrp="1"/>
+          </p:cNvSpPr>
+          <p:nvPr>
+            <p:ph type="sldNum" idx="5" sz="quarter"/>
+          </p:nvPr>
+        </p:nvSpPr>
+        <p:spPr/>
+      </p:sp>
+    </p:spTree>
+  </p:cSld>
+  <p:clrMapOvr>
+    <a:masterClrMapping/>
+  </p:clrMapOvr>
+</p:notes>
+</file>
+
+<file path=ppt/notesSlides/notesSlide13.xml><?xml version="1.0" encoding="utf-8"?>
+<p:notes xmlns:a="http://schemas.openxmlformats.org/drawingml/2006/main" xmlns:p="http://schemas.openxmlformats.org/presentationml/2006/main" xmlns:r="http://schemas.openxmlformats.org/officeDocument/2006/relationships">
+  <p:cSld>
+    <p:spTree>
+      <p:nvGrpSpPr>
+        <p:cNvPr id="1" name=""/>
+        <p:cNvGrpSpPr/>
+        <p:nvPr/>
+      </p:nvGrpSpPr>
+      <p:grpSpPr>
+        <a:xfrm>
+          <a:off x="0" y="0"/>
+          <a:ext cx="0" cy="0"/>
+          <a:chOff x="0" y="0"/>
+          <a:chExt cx="0" cy="0"/>
+        </a:xfrm>
+      </p:grpSpPr>
+      <p:sp>
+        <p:nvSpPr>
+          <p:cNvPr id="2" name="Slide Image Placeholder 1"/>
+          <p:cNvSpPr>
+            <a:spLocks noGrp="1"/>
+          </p:cNvSpPr>
+          <p:nvPr>
+            <p:ph type="sldImg" idx="2"/>
+          </p:nvPr>
+        </p:nvSpPr>
+        <p:spPr/>
+      </p:sp>
+      <p:sp>
+        <p:nvSpPr>
+          <p:cNvPr id="3" name="Notes Placeholder 2"/>
+          <p:cNvSpPr>
+            <a:spLocks noGrp="1"/>
+          </p:cNvSpPr>
+          <p:nvPr>
+            <p:ph type="body" idx="3" sz="quarter"/>
+          </p:nvPr>
+        </p:nvSpPr>
+        <p:spPr/>
+        <p:txBody>
+          <a:bodyPr/>
+          <a:lstStyle/>
+          <a:p>
+            <a:r>
+              <a:t>Esta tabla resume todo lo que llevamos visto y conviene dejarla un momento en pantalla para que se asiente. La pregunta que deberían hacerse siempre antes de traducir es: ¿la señal que busco vive en el estilo o en el contenido? Si vive en el estilo, jamás traducir. Si vive en el contenido, la traducción puede incluso ayudar. Con esto cerramos la sección de LLMs y pasamos a la pieza que conecta todo: estilometría computacional.</a:t>
+            </a:r>
+          </a:p>
+        </p:txBody>
+      </p:sp>
+      <p:sp>
+        <p:nvSpPr>
+          <p:cNvPr id="4" name="Slide Number Placeholder 3"/>
+          <p:cNvSpPr>
+            <a:spLocks noGrp="1"/>
+          </p:cNvSpPr>
+          <p:nvPr>
+            <p:ph type="sldNum" idx="5" sz="quarter"/>
+          </p:nvPr>
+        </p:nvSpPr>
+        <p:spPr/>
+      </p:sp>
+    </p:spTree>
+  </p:cSld>
+  <p:clrMapOvr>
+    <a:masterClrMapping/>
+  </p:clrMapOvr>
+</p:notes>
+</file>
+
+<file path=ppt/notesSlides/notesSlide14.xml><?xml version="1.0" encoding="utf-8"?>
+<p:notes xmlns:a="http://schemas.openxmlformats.org/drawingml/2006/main" xmlns:p="http://schemas.openxmlformats.org/presentationml/2006/main" xmlns:r="http://schemas.openxmlformats.org/officeDocument/2006/relationships">
+  <p:cSld>
+    <p:spTree>
+      <p:nvGrpSpPr>
+        <p:cNvPr id="1" name=""/>
+        <p:cNvGrpSpPr/>
+        <p:nvPr/>
+      </p:nvGrpSpPr>
+      <p:grpSpPr>
+        <a:xfrm>
+          <a:off x="0" y="0"/>
+          <a:ext cx="0" cy="0"/>
+          <a:chOff x="0" y="0"/>
+          <a:chExt cx="0" cy="0"/>
+        </a:xfrm>
+      </p:grpSpPr>
+      <p:sp>
+        <p:nvSpPr>
+          <p:cNvPr id="2" name="Slide Image Placeholder 1"/>
+          <p:cNvSpPr>
+            <a:spLocks noGrp="1"/>
+          </p:cNvSpPr>
+          <p:nvPr>
+            <p:ph type="sldImg" idx="2"/>
+          </p:nvPr>
+        </p:nvSpPr>
+        <p:spPr/>
+      </p:sp>
+      <p:sp>
+        <p:nvSpPr>
+          <p:cNvPr id="3" name="Notes Placeholder 2"/>
+          <p:cNvSpPr>
+            <a:spLocks noGrp="1"/>
+          </p:cNvSpPr>
+          <p:nvPr>
+            <p:ph type="body" idx="3" sz="quarter"/>
+          </p:nvPr>
+        </p:nvSpPr>
+        <p:spPr/>
+        <p:txBody>
+          <a:bodyPr/>
+          <a:lstStyle/>
+          <a:p>
+            <a:r>
+              <a:t>Última sección de contenido antes de la demo. Estilometría es donde todo lo anterior converge: usamos embeddings para similitud de estilo, y ahora vamos a sumar un método clásico y muy sólido, Burrows' Delta, para atribución de autoría. La pregunta de fondo que perseguimos toda la sesión: ¿es la misma persona detrás de dos handles distintos?</a:t>
+            </a:r>
+          </a:p>
+        </p:txBody>
+      </p:sp>
+      <p:sp>
+        <p:nvSpPr>
+          <p:cNvPr id="4" name="Slide Number Placeholder 3"/>
+          <p:cNvSpPr>
+            <a:spLocks noGrp="1"/>
+          </p:cNvSpPr>
+          <p:nvPr>
+            <p:ph type="sldNum" idx="5" sz="quarter"/>
+          </p:nvPr>
+        </p:nvSpPr>
+        <p:spPr/>
+      </p:sp>
+    </p:spTree>
+  </p:cSld>
+  <p:clrMapOvr>
+    <a:masterClrMapping/>
+  </p:clrMapOvr>
+</p:notes>
+</file>
+
+<file path=ppt/notesSlides/notesSlide15.xml><?xml version="1.0" encoding="utf-8"?>
+<p:notes xmlns:a="http://schemas.openxmlformats.org/drawingml/2006/main" xmlns:p="http://schemas.openxmlformats.org/presentationml/2006/main" xmlns:r="http://schemas.openxmlformats.org/officeDocument/2006/relationships">
+  <p:cSld>
+    <p:spTree>
+      <p:nvGrpSpPr>
+        <p:cNvPr id="1" name=""/>
+        <p:cNvGrpSpPr/>
+        <p:nvPr/>
+      </p:nvGrpSpPr>
+      <p:grpSpPr>
+        <a:xfrm>
+          <a:off x="0" y="0"/>
+          <a:ext cx="0" cy="0"/>
+          <a:chOff x="0" y="0"/>
+          <a:chExt cx="0" cy="0"/>
+        </a:xfrm>
+      </p:grpSpPr>
+      <p:sp>
+        <p:nvSpPr>
+          <p:cNvPr id="2" name="Slide Image Placeholder 1"/>
+          <p:cNvSpPr>
+            <a:spLocks noGrp="1"/>
+          </p:cNvSpPr>
+          <p:nvPr>
+            <p:ph type="sldImg" idx="2"/>
+          </p:nvPr>
+        </p:nvSpPr>
+        <p:spPr/>
+      </p:sp>
+      <p:sp>
+        <p:nvSpPr>
+          <p:cNvPr id="3" name="Notes Placeholder 2"/>
+          <p:cNvSpPr>
+            <a:spLocks noGrp="1"/>
+          </p:cNvSpPr>
+          <p:nvPr>
+            <p:ph type="body" idx="3" sz="quarter"/>
+          </p:nvPr>
+        </p:nvSpPr>
+        <p:spPr/>
+        <p:txBody>
+          <a:bodyPr/>
+          <a:lstStyle/>
+          <a:p>
+            <a:r>
+              <a:t>Lo elegante de Burrows' Delta es que mide justo lo que un autor no controla conscientemente: cómo usa 'de', 'que', 'para'. Nadie edita conscientemente sus preposiciones para disimular su estilo. Pero hay que ser honestos con la limitación: en un foro donde todos comparten la misma jerga ideológica, el poder discriminante cae porque el vocabulario funcional se homogeneiza también. Por eso nunca usamos Delta solo — siempre en conjunto con otras señales, que es justo el tema de la siguiente diapositiva.</a:t>
+            </a:r>
+          </a:p>
+        </p:txBody>
+      </p:sp>
+      <p:sp>
+        <p:nvSpPr>
+          <p:cNvPr id="4" name="Slide Number Placeholder 3"/>
+          <p:cNvSpPr>
+            <a:spLocks noGrp="1"/>
+          </p:cNvSpPr>
+          <p:nvPr>
+            <p:ph type="sldNum" idx="5" sz="quarter"/>
+          </p:nvPr>
+        </p:nvSpPr>
+        <p:spPr/>
+      </p:sp>
+    </p:spTree>
+  </p:cSld>
+  <p:clrMapOvr>
+    <a:masterClrMapping/>
+  </p:clrMapOvr>
+</p:notes>
+</file>
+
+<file path=ppt/notesSlides/notesSlide16.xml><?xml version="1.0" encoding="utf-8"?>
+<p:notes xmlns:a="http://schemas.openxmlformats.org/drawingml/2006/main" xmlns:p="http://schemas.openxmlformats.org/presentationml/2006/main" xmlns:r="http://schemas.openxmlformats.org/officeDocument/2006/relationships">
+  <p:cSld>
+    <p:spTree>
+      <p:nvGrpSpPr>
+        <p:cNvPr id="1" name=""/>
+        <p:cNvGrpSpPr/>
+        <p:nvPr/>
+      </p:nvGrpSpPr>
+      <p:grpSpPr>
+        <a:xfrm>
+          <a:off x="0" y="0"/>
+          <a:ext cx="0" cy="0"/>
+          <a:chOff x="0" y="0"/>
+          <a:chExt cx="0" cy="0"/>
+        </a:xfrm>
+      </p:grpSpPr>
+      <p:sp>
+        <p:nvSpPr>
+          <p:cNvPr id="2" name="Slide Image Placeholder 1"/>
+          <p:cNvSpPr>
+            <a:spLocks noGrp="1"/>
+          </p:cNvSpPr>
+          <p:nvPr>
+            <p:ph type="sldImg" idx="2"/>
+          </p:nvPr>
+        </p:nvSpPr>
+        <p:spPr/>
+      </p:sp>
+      <p:sp>
+        <p:nvSpPr>
+          <p:cNvPr id="3" name="Notes Placeholder 2"/>
+          <p:cNvSpPr>
+            <a:spLocks noGrp="1"/>
+          </p:cNvSpPr>
+          <p:nvPr>
+            <p:ph type="body" idx="3" sz="quarter"/>
+          </p:nvPr>
+        </p:nvSpPr>
+        <p:spPr/>
+        <p:txBody>
+          <a:bodyPr/>
+          <a:lstStyle/>
+          <a:p>
+            <a:r>
+              <a:t>Esta es la diapositiva de cierre conceptual del bloque, así que vale la pena marcarla bien: ninguna señal aislada constituye prueba de identidad, y hay que decirlo así de claro para evitar sobreinterpretación. Un handle parecido puede ser coincidencia; una similitud de embeddings puede ser tema compartido, no autor compartido. Lo que da fuerza al análisis es la convergencia de varias señales independientes apuntando al mismo candidato. Con esta idea cerramos la teoría y pasamos a verlo en vivo con datos reales.</a:t>
+            </a:r>
+          </a:p>
+        </p:txBody>
+      </p:sp>
+      <p:sp>
+        <p:nvSpPr>
+          <p:cNvPr id="4" name="Slide Number Placeholder 3"/>
+          <p:cNvSpPr>
+            <a:spLocks noGrp="1"/>
+          </p:cNvSpPr>
+          <p:nvPr>
+            <p:ph type="sldNum" idx="5" sz="quarter"/>
+          </p:nvPr>
+        </p:nvSpPr>
+        <p:spPr/>
+      </p:sp>
+    </p:spTree>
+  </p:cSld>
+  <p:clrMapOvr>
+    <a:masterClrMapping/>
+  </p:clrMapOvr>
+</p:notes>
+</file>
+
+<file path=ppt/notesSlides/notesSlide17.xml><?xml version="1.0" encoding="utf-8"?>
+<p:notes xmlns:a="http://schemas.openxmlformats.org/drawingml/2006/main" xmlns:p="http://schemas.openxmlformats.org/presentationml/2006/main" xmlns:r="http://schemas.openxmlformats.org/officeDocument/2006/relationships">
+  <p:cSld>
+    <p:spTree>
+      <p:nvGrpSpPr>
+        <p:cNvPr id="1" name=""/>
+        <p:cNvGrpSpPr/>
+        <p:nvPr/>
+      </p:nvGrpSpPr>
+      <p:grpSpPr>
+        <a:xfrm>
+          <a:off x="0" y="0"/>
+          <a:ext cx="0" cy="0"/>
+          <a:chOff x="0" y="0"/>
+          <a:chExt cx="0" cy="0"/>
+        </a:xfrm>
+      </p:grpSpPr>
+      <p:sp>
+        <p:nvSpPr>
+          <p:cNvPr id="2" name="Slide Image Placeholder 1"/>
+          <p:cNvSpPr>
+            <a:spLocks noGrp="1"/>
+          </p:cNvSpPr>
+          <p:nvPr>
+            <p:ph type="sldImg" idx="2"/>
+          </p:nvPr>
+        </p:nvSpPr>
+        <p:spPr/>
+      </p:sp>
+      <p:sp>
+        <p:nvSpPr>
+          <p:cNvPr id="3" name="Notes Placeholder 2"/>
+          <p:cNvSpPr>
+            <a:spLocks noGrp="1"/>
+          </p:cNvSpPr>
+          <p:nvPr>
+            <p:ph type="body" idx="3" sz="quarter"/>
+          </p:nvPr>
+        </p:nvSpPr>
+        <p:spPr/>
+        <p:txBody>
+          <a:bodyPr/>
+          <a:lstStyle/>
+          <a:p>
+            <a:r>
+              <a:t>Ahora a la práctica. Vamos a abrir el notebook en vivo y correr el pipeline completo sobre datos reales de CardingForums: generar embeddings, reducir dimensionalidad con UMAP, agrupar con HDBSCAN sin fijar de antemano cuántos clusters esperamos, y finalmente calcular similitud coseno entre pares de usuarios. La idea es que vean con sus propios ojos que los clusters emergen solos, sin que nosotros les digamos cuántos grupos buscar. Cualquier duda, la paramos aquí y la resolvemos antes de seguir.</a:t>
+            </a:r>
+          </a:p>
+        </p:txBody>
+      </p:sp>
+      <p:sp>
+        <p:nvSpPr>
+          <p:cNvPr id="4" name="Slide Number Placeholder 3"/>
+          <p:cNvSpPr>
+            <a:spLocks noGrp="1"/>
+          </p:cNvSpPr>
+          <p:nvPr>
+            <p:ph type="sldNum" idx="5" sz="quarter"/>
+          </p:nvPr>
+        </p:nvSpPr>
+        <p:spPr/>
+      </p:sp>
+    </p:spTree>
+  </p:cSld>
+  <p:clrMapOvr>
+    <a:masterClrMapping/>
+  </p:clrMapOvr>
+</p:notes>
+</file>
+
+<file path=ppt/notesSlides/notesSlide2.xml><?xml version="1.0" encoding="utf-8"?>
+<p:notes xmlns:a="http://schemas.openxmlformats.org/drawingml/2006/main" xmlns:p="http://schemas.openxmlformats.org/presentationml/2006/main" xmlns:r="http://schemas.openxmlformats.org/officeDocument/2006/relationships">
+  <p:cSld>
+    <p:spTree>
+      <p:nvGrpSpPr>
+        <p:cNvPr id="1" name=""/>
+        <p:cNvGrpSpPr/>
+        <p:nvPr/>
+      </p:nvGrpSpPr>
+      <p:grpSpPr>
+        <a:xfrm>
+          <a:off x="0" y="0"/>
+          <a:ext cx="0" cy="0"/>
+          <a:chOff x="0" y="0"/>
+          <a:chExt cx="0" cy="0"/>
+        </a:xfrm>
+      </p:grpSpPr>
+      <p:sp>
+        <p:nvSpPr>
+          <p:cNvPr id="2" name="Slide Image Placeholder 1"/>
+          <p:cNvSpPr>
+            <a:spLocks noGrp="1"/>
+          </p:cNvSpPr>
+          <p:nvPr>
+            <p:ph type="sldImg" idx="2"/>
+          </p:nvPr>
+        </p:nvSpPr>
+        <p:spPr/>
+      </p:sp>
+      <p:sp>
+        <p:nvSpPr>
+          <p:cNvPr id="3" name="Notes Placeholder 2"/>
+          <p:cNvSpPr>
+            <a:spLocks noGrp="1"/>
+          </p:cNvSpPr>
+          <p:nvPr>
+            <p:ph type="body" idx="3" sz="quarter"/>
+          </p:nvPr>
+        </p:nvSpPr>
+        <p:spPr/>
+        <p:txBody>
+          <a:bodyPr/>
+          <a:lstStyle/>
+          <a:p>
+            <a:r>
+              <a:t>Arrancamos con el problema, no con la solución. Antes de hablar de embeddings o LLMs, hay que entender por qué el text mining de toda la vida se queda corto en este dominio. Vamos a ver por qué TF-IDF y LDA fallan cuando el vocabulario cambia deliberadamente.</a:t>
+            </a:r>
+          </a:p>
+        </p:txBody>
+      </p:sp>
+      <p:sp>
+        <p:nvSpPr>
+          <p:cNvPr id="4" name="Slide Number Placeholder 3"/>
+          <p:cNvSpPr>
+            <a:spLocks noGrp="1"/>
+          </p:cNvSpPr>
+          <p:nvPr>
+            <p:ph type="sldNum" idx="5" sz="quarter"/>
+          </p:nvPr>
+        </p:nvSpPr>
+        <p:spPr/>
+      </p:sp>
+    </p:spTree>
+  </p:cSld>
+  <p:clrMapOvr>
+    <a:masterClrMapping/>
+  </p:clrMapOvr>
+</p:notes>
+</file>
+
+<file path=ppt/notesSlides/notesSlide3.xml><?xml version="1.0" encoding="utf-8"?>
+<p:notes xmlns:a="http://schemas.openxmlformats.org/drawingml/2006/main" xmlns:p="http://schemas.openxmlformats.org/presentationml/2006/main" xmlns:r="http://schemas.openxmlformats.org/officeDocument/2006/relationships">
+  <p:cSld>
+    <p:spTree>
+      <p:nvGrpSpPr>
+        <p:cNvPr id="1" name=""/>
+        <p:cNvGrpSpPr/>
+        <p:nvPr/>
+      </p:nvGrpSpPr>
+      <p:grpSpPr>
+        <a:xfrm>
+          <a:off x="0" y="0"/>
+          <a:ext cx="0" cy="0"/>
+          <a:chOff x="0" y="0"/>
+          <a:chExt cx="0" cy="0"/>
+        </a:xfrm>
+      </p:grpSpPr>
+      <p:sp>
+        <p:nvSpPr>
+          <p:cNvPr id="2" name="Slide Image Placeholder 1"/>
+          <p:cNvSpPr>
+            <a:spLocks noGrp="1"/>
+          </p:cNvSpPr>
+          <p:nvPr>
+            <p:ph type="sldImg" idx="2"/>
+          </p:nvPr>
+        </p:nvSpPr>
+        <p:spPr/>
+      </p:sp>
+      <p:sp>
+        <p:nvSpPr>
+          <p:cNvPr id="3" name="Notes Placeholder 2"/>
+          <p:cNvSpPr>
+            <a:spLocks noGrp="1"/>
+          </p:cNvSpPr>
+          <p:nvPr>
+            <p:ph type="body" idx="3" sz="quarter"/>
+          </p:nvPr>
+        </p:nvSpPr>
+        <p:spPr/>
+        <p:txBody>
+          <a:bodyPr/>
+          <a:lstStyle/>
+          <a:p>
+            <a:r>
+              <a:t>Pregunta retórica para abrir: si dos posts hablan exactamente de lo mismo pero no comparten ni una palabra, ¿qué hace TF-IDF con eso? Nada — los ve como completamente distintos. Ese es el problema central. El leetspeak y los eufemismos no son ruido accidental, son diseño deliberado para evadir precisamente este tipo de detección por palabras clave. Esto nos lleva directo a embeddings: necesitamos significado, no símbolos.</a:t>
+            </a:r>
+          </a:p>
+        </p:txBody>
+      </p:sp>
+      <p:sp>
+        <p:nvSpPr>
+          <p:cNvPr id="4" name="Slide Number Placeholder 3"/>
+          <p:cNvSpPr>
+            <a:spLocks noGrp="1"/>
+          </p:cNvSpPr>
+          <p:nvPr>
+            <p:ph type="sldNum" idx="5" sz="quarter"/>
+          </p:nvPr>
+        </p:nvSpPr>
+        <p:spPr/>
+      </p:sp>
+    </p:spTree>
+  </p:cSld>
+  <p:clrMapOvr>
+    <a:masterClrMapping/>
+  </p:clrMapOvr>
+</p:notes>
+</file>
+
+<file path=ppt/notesSlides/notesSlide4.xml><?xml version="1.0" encoding="utf-8"?>
+<p:notes xmlns:a="http://schemas.openxmlformats.org/drawingml/2006/main" xmlns:p="http://schemas.openxmlformats.org/presentationml/2006/main" xmlns:r="http://schemas.openxmlformats.org/officeDocument/2006/relationships">
+  <p:cSld>
+    <p:spTree>
+      <p:nvGrpSpPr>
+        <p:cNvPr id="1" name=""/>
+        <p:cNvGrpSpPr/>
+        <p:nvPr/>
+      </p:nvGrpSpPr>
+      <p:grpSpPr>
+        <a:xfrm>
+          <a:off x="0" y="0"/>
+          <a:ext cx="0" cy="0"/>
+          <a:chOff x="0" y="0"/>
+          <a:chExt cx="0" cy="0"/>
+        </a:xfrm>
+      </p:grpSpPr>
+      <p:sp>
+        <p:nvSpPr>
+          <p:cNvPr id="2" name="Slide Image Placeholder 1"/>
+          <p:cNvSpPr>
+            <a:spLocks noGrp="1"/>
+          </p:cNvSpPr>
+          <p:nvPr>
+            <p:ph type="sldImg" idx="2"/>
+          </p:nvPr>
+        </p:nvSpPr>
+        <p:spPr/>
+      </p:sp>
+      <p:sp>
+        <p:nvSpPr>
+          <p:cNvPr id="3" name="Notes Placeholder 2"/>
+          <p:cNvSpPr>
+            <a:spLocks noGrp="1"/>
+          </p:cNvSpPr>
+          <p:nvPr>
+            <p:ph type="body" idx="3" sz="quarter"/>
+          </p:nvPr>
+        </p:nvSpPr>
+        <p:spPr/>
+        <p:txBody>
+          <a:bodyPr/>
+          <a:lstStyle/>
+          <a:p>
+            <a:r>
+              <a:t>Segunda sección: embeddings. La idea que quiero que se lleven es simple — significado como posición en un espacio vectorial. Con eso resuelto, todo lo demás (clustering, similitud, atribución de estilo) se convierte en geometría, algo que las máquinas hacen muy bien.</a:t>
+            </a:r>
+          </a:p>
+        </p:txBody>
+      </p:sp>
+      <p:sp>
+        <p:nvSpPr>
+          <p:cNvPr id="4" name="Slide Number Placeholder 3"/>
+          <p:cNvSpPr>
+            <a:spLocks noGrp="1"/>
+          </p:cNvSpPr>
+          <p:nvPr>
+            <p:ph type="sldNum" idx="5" sz="quarter"/>
+          </p:nvPr>
+        </p:nvSpPr>
+        <p:spPr/>
+      </p:sp>
+    </p:spTree>
+  </p:cSld>
+  <p:clrMapOvr>
+    <a:masterClrMapping/>
+  </p:clrMapOvr>
+</p:notes>
+</file>
+
+<file path=ppt/notesSlides/notesSlide5.xml><?xml version="1.0" encoding="utf-8"?>
+<p:notes xmlns:a="http://schemas.openxmlformats.org/drawingml/2006/main" xmlns:p="http://schemas.openxmlformats.org/presentationml/2006/main" xmlns:r="http://schemas.openxmlformats.org/officeDocument/2006/relationships">
+  <p:cSld>
+    <p:spTree>
+      <p:nvGrpSpPr>
+        <p:cNvPr id="1" name=""/>
+        <p:cNvGrpSpPr/>
+        <p:nvPr/>
+      </p:nvGrpSpPr>
+      <p:grpSpPr>
+        <a:xfrm>
+          <a:off x="0" y="0"/>
+          <a:ext cx="0" cy="0"/>
+          <a:chOff x="0" y="0"/>
+          <a:chExt cx="0" cy="0"/>
+        </a:xfrm>
+      </p:grpSpPr>
+      <p:sp>
+        <p:nvSpPr>
+          <p:cNvPr id="2" name="Slide Image Placeholder 1"/>
+          <p:cNvSpPr>
+            <a:spLocks noGrp="1"/>
+          </p:cNvSpPr>
+          <p:nvPr>
+            <p:ph type="sldImg" idx="2"/>
+          </p:nvPr>
+        </p:nvSpPr>
+        <p:spPr/>
+      </p:sp>
+      <p:sp>
+        <p:nvSpPr>
+          <p:cNvPr id="3" name="Notes Placeholder 2"/>
+          <p:cNvSpPr>
+            <a:spLocks noGrp="1"/>
+          </p:cNvSpPr>
+          <p:nvPr>
+            <p:ph type="body" idx="3" sz="quarter"/>
+          </p:nvPr>
+        </p:nvSpPr>
+        <p:spPr/>
+        <p:txBody>
+          <a:bodyPr/>
+          <a:lstStyle/>
+          <a:p>
+            <a:r>
+              <a:t>El ejemplo de 'rat' y 'trojan' es clave: sin compartir ni una letra, un embedding los ubica cerca porque el contexto de uso es casi idéntico. Eso es exactamente lo que necesitábamos tras la diapositiva anterior. Y el ejemplo bilingüe muestra algo que vamos a explotar mucho: con el modelo correcto, el idioma deja de ser una barrera para comparar contenido. Esto es la puerta de entrada a todo lo que viene: clustering y estilometría.</a:t>
+            </a:r>
+          </a:p>
+        </p:txBody>
+      </p:sp>
+      <p:sp>
+        <p:nvSpPr>
+          <p:cNvPr id="4" name="Slide Number Placeholder 3"/>
+          <p:cNvSpPr>
+            <a:spLocks noGrp="1"/>
+          </p:cNvSpPr>
+          <p:nvPr>
+            <p:ph type="sldNum" idx="5" sz="quarter"/>
+          </p:nvPr>
+        </p:nvSpPr>
+        <p:spPr/>
+      </p:sp>
+    </p:spTree>
+  </p:cSld>
+  <p:clrMapOvr>
+    <a:masterClrMapping/>
+  </p:clrMapOvr>
+</p:notes>
+</file>
+
+<file path=ppt/notesSlides/notesSlide6.xml><?xml version="1.0" encoding="utf-8"?>
+<p:notes xmlns:a="http://schemas.openxmlformats.org/drawingml/2006/main" xmlns:p="http://schemas.openxmlformats.org/presentationml/2006/main" xmlns:r="http://schemas.openxmlformats.org/officeDocument/2006/relationships">
+  <p:cSld>
+    <p:spTree>
+      <p:nvGrpSpPr>
+        <p:cNvPr id="1" name=""/>
+        <p:cNvGrpSpPr/>
+        <p:nvPr/>
+      </p:nvGrpSpPr>
+      <p:grpSpPr>
+        <a:xfrm>
+          <a:off x="0" y="0"/>
+          <a:ext cx="0" cy="0"/>
+          <a:chOff x="0" y="0"/>
+          <a:chExt cx="0" cy="0"/>
+        </a:xfrm>
+      </p:grpSpPr>
+      <p:sp>
+        <p:nvSpPr>
+          <p:cNvPr id="2" name="Slide Image Placeholder 1"/>
+          <p:cNvSpPr>
+            <a:spLocks noGrp="1"/>
+          </p:cNvSpPr>
+          <p:nvPr>
+            <p:ph type="sldImg" idx="2"/>
+          </p:nvPr>
+        </p:nvSpPr>
+        <p:spPr/>
+      </p:sp>
+      <p:sp>
+        <p:nvSpPr>
+          <p:cNvPr id="3" name="Notes Placeholder 2"/>
+          <p:cNvSpPr>
+            <a:spLocks noGrp="1"/>
+          </p:cNvSpPr>
+          <p:nvPr>
+            <p:ph type="body" idx="3" sz="quarter"/>
+          </p:nvPr>
+        </p:nvSpPr>
+        <p:spPr/>
+        <p:txBody>
+          <a:bodyPr/>
+          <a:lstStyle/>
+          <a:p>
+            <a:r>
+              <a:t>Esta elección no es un detalle técnico menor, es una decisión de diseño que condiciona todo el análisis posterior. En foros underground reales casi siempre hay mezcla de idiomas — ruso, inglés, español, a veces en el mismo post. Si usan un modelo monolingüe ahí, están tirando información a la basura sin darse cuenta. La regla de la derecha es la que aplicamos por defecto en este curso.</a:t>
+            </a:r>
+          </a:p>
+        </p:txBody>
+      </p:sp>
+      <p:sp>
+        <p:nvSpPr>
+          <p:cNvPr id="4" name="Slide Number Placeholder 3"/>
+          <p:cNvSpPr>
+            <a:spLocks noGrp="1"/>
+          </p:cNvSpPr>
+          <p:nvPr>
+            <p:ph type="sldNum" idx="5" sz="quarter"/>
+          </p:nvPr>
+        </p:nvSpPr>
+        <p:spPr/>
+      </p:sp>
+    </p:spTree>
+  </p:cSld>
+  <p:clrMapOvr>
+    <a:masterClrMapping/>
+  </p:clrMapOvr>
+</p:notes>
+</file>
+
+<file path=ppt/notesSlides/notesSlide7.xml><?xml version="1.0" encoding="utf-8"?>
+<p:notes xmlns:a="http://schemas.openxmlformats.org/drawingml/2006/main" xmlns:p="http://schemas.openxmlformats.org/presentationml/2006/main" xmlns:r="http://schemas.openxmlformats.org/officeDocument/2006/relationships">
+  <p:cSld>
+    <p:spTree>
+      <p:nvGrpSpPr>
+        <p:cNvPr id="1" name=""/>
+        <p:cNvGrpSpPr/>
+        <p:nvPr/>
+      </p:nvGrpSpPr>
+      <p:grpSpPr>
+        <a:xfrm>
+          <a:off x="0" y="0"/>
+          <a:ext cx="0" cy="0"/>
+          <a:chOff x="0" y="0"/>
+          <a:chExt cx="0" cy="0"/>
+        </a:xfrm>
+      </p:grpSpPr>
+      <p:sp>
+        <p:nvSpPr>
+          <p:cNvPr id="2" name="Slide Image Placeholder 1"/>
+          <p:cNvSpPr>
+            <a:spLocks noGrp="1"/>
+          </p:cNvSpPr>
+          <p:nvPr>
+            <p:ph type="sldImg" idx="2"/>
+          </p:nvPr>
+        </p:nvSpPr>
+        <p:spPr/>
+      </p:sp>
+      <p:sp>
+        <p:nvSpPr>
+          <p:cNvPr id="3" name="Notes Placeholder 2"/>
+          <p:cNvSpPr>
+            <a:spLocks noGrp="1"/>
+          </p:cNvSpPr>
+          <p:nvPr>
+            <p:ph type="body" idx="3" sz="quarter"/>
+          </p:nvPr>
+        </p:nvSpPr>
+        <p:spPr/>
+        <p:txBody>
+          <a:bodyPr/>
+          <a:lstStyle/>
+          <a:p>
+            <a:r>
+              <a:t>Esta es probablemente la regla más importante de toda la sesión, así que conviene remarcarla: para embeddings y estilometría, NUNCA traducir antes de vectorizar. La traducción automática homogeneiza la sintaxis, y esa sintaxis es justamente la huella que buscamos preservar. Ojo con la trampa: en la siguiente sección vamos a ver que para NER la regla se invierte. No es contradicción, es que cada técnica busca una señal distinta.</a:t>
+            </a:r>
+          </a:p>
+        </p:txBody>
+      </p:sp>
+      <p:sp>
+        <p:nvSpPr>
+          <p:cNvPr id="4" name="Slide Number Placeholder 3"/>
+          <p:cNvSpPr>
+            <a:spLocks noGrp="1"/>
+          </p:cNvSpPr>
+          <p:nvPr>
+            <p:ph type="sldNum" idx="5" sz="quarter"/>
+          </p:nvPr>
+        </p:nvSpPr>
+        <p:spPr/>
+      </p:sp>
+    </p:spTree>
+  </p:cSld>
+  <p:clrMapOvr>
+    <a:masterClrMapping/>
+  </p:clrMapOvr>
+</p:notes>
+</file>
+
+<file path=ppt/notesSlides/notesSlide8.xml><?xml version="1.0" encoding="utf-8"?>
+<p:notes xmlns:a="http://schemas.openxmlformats.org/drawingml/2006/main" xmlns:p="http://schemas.openxmlformats.org/presentationml/2006/main" xmlns:r="http://schemas.openxmlformats.org/officeDocument/2006/relationships">
+  <p:cSld>
+    <p:spTree>
+      <p:nvGrpSpPr>
+        <p:cNvPr id="1" name=""/>
+        <p:cNvGrpSpPr/>
+        <p:nvPr/>
+      </p:nvGrpSpPr>
+      <p:grpSpPr>
+        <a:xfrm>
+          <a:off x="0" y="0"/>
+          <a:ext cx="0" cy="0"/>
+          <a:chOff x="0" y="0"/>
+          <a:chExt cx="0" cy="0"/>
+        </a:xfrm>
+      </p:grpSpPr>
+      <p:sp>
+        <p:nvSpPr>
+          <p:cNvPr id="2" name="Slide Image Placeholder 1"/>
+          <p:cNvSpPr>
+            <a:spLocks noGrp="1"/>
+          </p:cNvSpPr>
+          <p:nvPr>
+            <p:ph type="sldImg" idx="2"/>
+          </p:nvPr>
+        </p:nvSpPr>
+        <p:spPr/>
+      </p:sp>
+      <p:sp>
+        <p:nvSpPr>
+          <p:cNvPr id="3" name="Notes Placeholder 2"/>
+          <p:cNvSpPr>
+            <a:spLocks noGrp="1"/>
+          </p:cNvSpPr>
+          <p:nvPr>
+            <p:ph type="body" idx="3" sz="quarter"/>
+          </p:nvPr>
+        </p:nvSpPr>
+        <p:spPr/>
+        <p:txBody>
+          <a:bodyPr/>
+          <a:lstStyle/>
+          <a:p>
+            <a:r>
+              <a:t>Esta tabla sale de medir directamente sobre IronMarch, no son números de un paper. Lo interesante es que full centroid (E, 9 horas) apenas gana 14 puntos de Spearman frente a top-100 (3h33), así que en la práctica casi nunca se justifica. La pregunta que hay que hacerse antes de elegir estrategia es cuántos posts tiene un usuario típico en el dataset — eso determina todo.</a:t>
+            </a:r>
+          </a:p>
+        </p:txBody>
+      </p:sp>
+      <p:sp>
+        <p:nvSpPr>
+          <p:cNvPr id="4" name="Slide Number Placeholder 3"/>
+          <p:cNvSpPr>
+            <a:spLocks noGrp="1"/>
+          </p:cNvSpPr>
+          <p:nvPr>
+            <p:ph type="sldNum" idx="5" sz="quarter"/>
+          </p:nvPr>
+        </p:nvSpPr>
+        <p:spPr/>
+      </p:sp>
+    </p:spTree>
+  </p:cSld>
+  <p:clrMapOvr>
+    <a:masterClrMapping/>
+  </p:clrMapOvr>
+</p:notes>
+</file>
+
+<file path=ppt/notesSlides/notesSlide9.xml><?xml version="1.0" encoding="utf-8"?>
+<p:notes xmlns:a="http://schemas.openxmlformats.org/drawingml/2006/main" xmlns:p="http://schemas.openxmlformats.org/presentationml/2006/main" xmlns:r="http://schemas.openxmlformats.org/officeDocument/2006/relationships">
+  <p:cSld>
+    <p:spTree>
+      <p:nvGrpSpPr>
+        <p:cNvPr id="1" name=""/>
+        <p:cNvGrpSpPr/>
+        <p:nvPr/>
+      </p:nvGrpSpPr>
+      <p:grpSpPr>
+        <a:xfrm>
+          <a:off x="0" y="0"/>
+          <a:ext cx="0" cy="0"/>
+          <a:chOff x="0" y="0"/>
+          <a:chExt cx="0" cy="0"/>
+        </a:xfrm>
+      </p:grpSpPr>
+      <p:sp>
+        <p:nvSpPr>
+          <p:cNvPr id="2" name="Slide Image Placeholder 1"/>
+          <p:cNvSpPr>
+            <a:spLocks noGrp="1"/>
+          </p:cNvSpPr>
+          <p:nvPr>
+            <p:ph type="sldImg" idx="2"/>
+          </p:nvPr>
+        </p:nvSpPr>
+        <p:spPr/>
+      </p:sp>
+      <p:sp>
+        <p:nvSpPr>
+          <p:cNvPr id="3" name="Notes Placeholder 2"/>
+          <p:cNvSpPr>
+            <a:spLocks noGrp="1"/>
+          </p:cNvSpPr>
+          <p:nvPr>
+            <p:ph type="body" idx="3" sz="quarter"/>
+          </p:nvPr>
+        </p:nvSpPr>
+        <p:spPr/>
+        <p:txBody>
+          <a:bodyPr/>
+          <a:lstStyle/>
+          <a:p>
+            <a:r>
+              <a:t>Esta diapositiva es el reverso de la anterior: D es la opción general, pero no es la única respuesta correcta. Si están en una fase de exploración rápida, no tiene sentido esperar horas de GPU — usen A e itere. La recomendación práctica, y esto vale para cualquier decisión de estrategia en este curso, es medir antes de decidir, no asumir.</a:t>
+            </a:r>
+          </a:p>
+        </p:txBody>
+      </p:sp>
+      <p:sp>
+        <p:nvSpPr>
+          <p:cNvPr id="4" name="Slide Number Placeholder 3"/>
+          <p:cNvSpPr>
+            <a:spLocks noGrp="1"/>
+          </p:cNvSpPr>
+          <p:nvPr>
+            <p:ph type="sldNum" idx="5" sz="quarter"/>
+          </p:nvPr>
+        </p:nvSpPr>
+        <p:spPr/>
+      </p:sp>
+    </p:spTree>
+  </p:cSld>
+  <p:clrMapOvr>
+    <a:masterClrMapping/>
+  </p:clrMapOvr>
+</p:notes>
 </file>
 
 <file path=ppt/slideLayouts/slideLayout1.xml><?xml version="1.0" encoding="utf-8"?>
@@ -9066,4 +10606,324 @@
   </a:objectDefaults>
   <a:extraClrSchemeLst/>
 </a:theme>
+</file>
+
+<file path=ppt/theme/theme2.xml><?xml version="1.0" encoding="utf-8"?>
+<a:theme xmlns:a="http://schemas.openxmlformats.org/drawingml/2006/main" name="Office Theme">
+  <a:themeElements>
+    <a:clrScheme name="Office">
+      <a:dk1>
+        <a:sysClr val="windowText" lastClr="000000"/>
+      </a:dk1>
+      <a:lt1>
+        <a:sysClr val="window" lastClr="FFFFFF"/>
+      </a:lt1>
+      <a:dk2>
+        <a:srgbClr val="1F497D"/>
+      </a:dk2>
+      <a:lt2>
+        <a:srgbClr val="EEECE1"/>
+      </a:lt2>
+      <a:accent1>
+        <a:srgbClr val="4F81BD"/>
+      </a:accent1>
+      <a:accent2>
+        <a:srgbClr val="C0504D"/>
+      </a:accent2>
+      <a:accent3>
+        <a:srgbClr val="9BBB59"/>
+      </a:accent3>
+      <a:accent4>
+        <a:srgbClr val="8064A2"/>
+      </a:accent4>
+      <a:accent5>
+        <a:srgbClr val="4BACC6"/>
+      </a:accent5>
+      <a:accent6>
+        <a:srgbClr val="F79646"/>
+      </a:accent6>
+      <a:hlink>
+        <a:srgbClr val="0000FF"/>
+      </a:hlink>
+      <a:folHlink>
+        <a:srgbClr val="800080"/>
+      </a:folHlink>
+    </a:clrScheme>
+    <a:fontScheme name="Office">
+      <a:majorFont>
+        <a:latin typeface="Calibri"/>
+        <a:ea typeface=""/>
+        <a:cs typeface=""/>
+        <a:font script="Jpan" typeface="ＭＳ Ｐゴシック"/>
+        <a:font script="Hang" typeface="맑은 고딕"/>
+        <a:font script="Hans" typeface="宋体"/>
+        <a:font script="Hant" typeface="新細明體"/>
+        <a:font script="Arab" typeface="Times New Roman"/>
+        <a:font script="Hebr" typeface="Times New Roman"/>
+        <a:font script="Thai" typeface="Angsana New"/>
+        <a:font script="Ethi" typeface="Nyala"/>
+        <a:font script="Beng" typeface="Vrinda"/>
+        <a:font script="Gujr" typeface="Shruti"/>
+        <a:font script="Khmr" typeface="MoolBoran"/>
+        <a:font script="Knda" typeface="Tunga"/>
+        <a:font script="Guru" typeface="Raavi"/>
+        <a:font script="Cans" typeface="Euphemia"/>
+        <a:font script="Cher" typeface="Plantagenet Cherokee"/>
+        <a:font script="Yiii" typeface="Microsoft Yi Baiti"/>
+        <a:font script="Tibt" typeface="Microsoft Himalaya"/>
+        <a:font script="Thaa" typeface="MV Boli"/>
+        <a:font script="Deva" typeface="Mangal"/>
+        <a:font script="Telu" typeface="Gautami"/>
+        <a:font script="Taml" typeface="Latha"/>
+        <a:font script="Syrc" typeface="Estrangelo Edessa"/>
+        <a:font script="Orya" typeface="Kalinga"/>
+        <a:font script="Mlym" typeface="Kartika"/>
+        <a:font script="Laoo" typeface="DokChampa"/>
+        <a:font script="Sinh" typeface="Iskoola Pota"/>
+        <a:font script="Mong" typeface="Mongolian Baiti"/>
+        <a:font script="Viet" typeface="Times New Roman"/>
+        <a:font script="Uigh" typeface="Microsoft Uighur"/>
+        <a:font script="Geor" typeface="Sylfaen"/>
+      </a:majorFont>
+      <a:minorFont>
+        <a:latin typeface="Calibri"/>
+        <a:ea typeface=""/>
+        <a:cs typeface=""/>
+        <a:font script="Jpan" typeface="ＭＳ Ｐゴシック"/>
+        <a:font script="Hang" typeface="맑은 고딕"/>
+        <a:font script="Hans" typeface="宋体"/>
+        <a:font script="Hant" typeface="新細明體"/>
+        <a:font script="Arab" typeface="Arial"/>
+        <a:font script="Hebr" typeface="Arial"/>
+        <a:font script="Thai" typeface="Cordia New"/>
+        <a:font script="Ethi" typeface="Nyala"/>
+        <a:font script="Beng" typeface="Vrinda"/>
+        <a:font script="Gujr" typeface="Shruti"/>
+        <a:font script="Khmr" typeface="DaunPenh"/>
+        <a:font script="Knda" typeface="Tunga"/>
+        <a:font script="Guru" typeface="Raavi"/>
+        <a:font script="Cans" typeface="Euphemia"/>
+        <a:font script="Cher" typeface="Plantagenet Cherokee"/>
+        <a:font script="Yiii" typeface="Microsoft Yi Baiti"/>
+        <a:font script="Tibt" typeface="Microsoft Himalaya"/>
+        <a:font script="Thaa" typeface="MV Boli"/>
+        <a:font script="Deva" typeface="Mangal"/>
+        <a:font script="Telu" typeface="Gautami"/>
+        <a:font script="Taml" typeface="Latha"/>
+        <a:font script="Syrc" typeface="Estrangelo Edessa"/>
+        <a:font script="Orya" typeface="Kalinga"/>
+        <a:font script="Mlym" typeface="Kartika"/>
+        <a:font script="Laoo" typeface="DokChampa"/>
+        <a:font script="Sinh" typeface="Iskoola Pota"/>
+        <a:font script="Mong" typeface="Mongolian Baiti"/>
+        <a:font script="Viet" typeface="Arial"/>
+        <a:font script="Uigh" typeface="Microsoft Uighur"/>
+        <a:font script="Geor" typeface="Sylfaen"/>
+      </a:minorFont>
+    </a:fontScheme>
+    <a:fmtScheme name="Office">
+      <a:fillStyleLst>
+        <a:solidFill>
+          <a:schemeClr val="phClr"/>
+        </a:solidFill>
+        <a:gradFill rotWithShape="1">
+          <a:gsLst>
+            <a:gs pos="0">
+              <a:schemeClr val="phClr">
+                <a:tint val="50000"/>
+                <a:satMod val="300000"/>
+              </a:schemeClr>
+            </a:gs>
+            <a:gs pos="35000">
+              <a:schemeClr val="phClr">
+                <a:tint val="37000"/>
+                <a:satMod val="300000"/>
+              </a:schemeClr>
+            </a:gs>
+            <a:gs pos="100000">
+              <a:schemeClr val="phClr">
+                <a:tint val="15000"/>
+                <a:satMod val="350000"/>
+              </a:schemeClr>
+            </a:gs>
+          </a:gsLst>
+          <a:lin ang="16200000" scaled="1"/>
+        </a:gradFill>
+        <a:gradFill rotWithShape="1">
+          <a:gsLst>
+            <a:gs pos="0">
+              <a:schemeClr val="phClr">
+                <a:tint val="100000"/>
+                <a:shade val="100000"/>
+                <a:satMod val="130000"/>
+              </a:schemeClr>
+            </a:gs>
+            <a:gs pos="100000">
+              <a:schemeClr val="phClr">
+                <a:tint val="50000"/>
+                <a:shade val="100000"/>
+                <a:satMod val="350000"/>
+              </a:schemeClr>
+            </a:gs>
+          </a:gsLst>
+          <a:lin ang="16200000" scaled="0"/>
+        </a:gradFill>
+      </a:fillStyleLst>
+      <a:lnStyleLst>
+        <a:ln w="9525" cap="flat" cmpd="sng" algn="ctr">
+          <a:solidFill>
+            <a:schemeClr val="phClr">
+              <a:shade val="95000"/>
+              <a:satMod val="105000"/>
+            </a:schemeClr>
+          </a:solidFill>
+          <a:prstDash val="solid"/>
+        </a:ln>
+        <a:ln w="25400" cap="flat" cmpd="sng" algn="ctr">
+          <a:solidFill>
+            <a:schemeClr val="phClr"/>
+          </a:solidFill>
+          <a:prstDash val="solid"/>
+        </a:ln>
+        <a:ln w="38100" cap="flat" cmpd="sng" algn="ctr">
+          <a:solidFill>
+            <a:schemeClr val="phClr"/>
+          </a:solidFill>
+          <a:prstDash val="solid"/>
+        </a:ln>
+      </a:lnStyleLst>
+      <a:effectStyleLst>
+        <a:effectStyle>
+          <a:effectLst>
+            <a:outerShdw blurRad="40000" dist="20000" dir="5400000" rotWithShape="0">
+              <a:srgbClr val="000000">
+                <a:alpha val="38000"/>
+              </a:srgbClr>
+            </a:outerShdw>
+          </a:effectLst>
+        </a:effectStyle>
+        <a:effectStyle>
+          <a:effectLst>
+            <a:outerShdw blurRad="40000" dist="23000" dir="5400000" rotWithShape="0">
+              <a:srgbClr val="000000">
+                <a:alpha val="35000"/>
+              </a:srgbClr>
+            </a:outerShdw>
+          </a:effectLst>
+        </a:effectStyle>
+        <a:effectStyle>
+          <a:effectLst>
+            <a:outerShdw blurRad="40000" dist="23000" dir="5400000" rotWithShape="0">
+              <a:srgbClr val="000000">
+                <a:alpha val="35000"/>
+              </a:srgbClr>
+            </a:outerShdw>
+          </a:effectLst>
+          <a:scene3d>
+            <a:camera prst="orthographicFront">
+              <a:rot lat="0" lon="0" rev="0"/>
+            </a:camera>
+            <a:lightRig rig="threePt" dir="t">
+              <a:rot lat="0" lon="0" rev="1200000"/>
+            </a:lightRig>
+          </a:scene3d>
+          <a:sp3d>
+            <a:bevelT w="63500" h="25400"/>
+          </a:sp3d>
+        </a:effectStyle>
+      </a:effectStyleLst>
+      <a:bgFillStyleLst>
+        <a:solidFill>
+          <a:schemeClr val="phClr"/>
+        </a:solidFill>
+        <a:gradFill rotWithShape="1">
+          <a:gsLst>
+            <a:gs pos="0">
+              <a:schemeClr val="phClr">
+                <a:tint val="40000"/>
+                <a:satMod val="350000"/>
+              </a:schemeClr>
+            </a:gs>
+            <a:gs pos="40000">
+              <a:schemeClr val="phClr">
+                <a:tint val="45000"/>
+                <a:shade val="99000"/>
+                <a:satMod val="350000"/>
+              </a:schemeClr>
+            </a:gs>
+            <a:gs pos="100000">
+              <a:schemeClr val="phClr">
+                <a:shade val="20000"/>
+                <a:satMod val="255000"/>
+              </a:schemeClr>
+            </a:gs>
+          </a:gsLst>
+          <a:path path="circle">
+            <a:fillToRect l="50000" t="-80000" r="50000" b="180000"/>
+          </a:path>
+        </a:gradFill>
+        <a:gradFill rotWithShape="1">
+          <a:gsLst>
+            <a:gs pos="0">
+              <a:schemeClr val="phClr">
+                <a:tint val="80000"/>
+                <a:satMod val="300000"/>
+              </a:schemeClr>
+            </a:gs>
+            <a:gs pos="100000">
+              <a:schemeClr val="phClr">
+                <a:shade val="30000"/>
+                <a:satMod val="200000"/>
+              </a:schemeClr>
+            </a:gs>
+          </a:gsLst>
+          <a:path path="circle">
+            <a:fillToRect l="50000" t="50000" r="50000" b="50000"/>
+          </a:path>
+        </a:gradFill>
+      </a:bgFillStyleLst>
+    </a:fmtScheme>
+  </a:themeElements>
+  <a:objectDefaults>
+    <a:spDef>
+      <a:spPr/>
+      <a:bodyPr/>
+      <a:lstStyle/>
+      <a:style>
+        <a:lnRef idx="1">
+          <a:schemeClr val="accent1"/>
+        </a:lnRef>
+        <a:fillRef idx="3">
+          <a:schemeClr val="accent1"/>
+        </a:fillRef>
+        <a:effectRef idx="2">
+          <a:schemeClr val="accent1"/>
+        </a:effectRef>
+        <a:fontRef idx="minor">
+          <a:schemeClr val="lt1"/>
+        </a:fontRef>
+      </a:style>
+    </a:spDef>
+    <a:lnDef>
+      <a:spPr/>
+      <a:bodyPr/>
+      <a:lstStyle/>
+      <a:style>
+        <a:lnRef idx="2">
+          <a:schemeClr val="accent1"/>
+        </a:lnRef>
+        <a:fillRef idx="0">
+          <a:schemeClr val="accent1"/>
+        </a:fillRef>
+        <a:effectRef idx="1">
+          <a:schemeClr val="accent1"/>
+        </a:effectRef>
+        <a:fontRef idx="minor">
+          <a:schemeClr val="tx1"/>
+        </a:fontRef>
+      </a:style>
+    </a:lnDef>
+  </a:objectDefaults>
+  <a:extraClrSchemeLst/>
+</a:theme>
 </file>
--- a/bloque2_ia/csbc26_b2_ia.pptx
+++ b/bloque2_ia/csbc26_b2_ia.pptx
@@ -5717,12 +5717,6 @@
           <a:lstStyle/>
           <a:p>
             <a:r>
-              <a:rPr sz="3400" b="1">
-                <a:solidFill>
-                  <a:srgbClr val="FFFFFF"/>
-                </a:solidFill>
-                <a:latin typeface="Calibri"/>
-              </a:rPr>
               <a:t>Técnicas de análisis: IA</a:t>
             </a:r>
           </a:p>
@@ -5732,7 +5726,7 @@
                 <a:solidFill>
                   <a:srgbClr val="D6DAE2"/>
                 </a:solidFill>
-                <a:latin typeface="Calibri"/>
+                <a:latin typeface="Arial"/>
               </a:rPr>
               <a:t>Embeddings, LLMs locales y estilometría computacional</a:t>
             </a:r>
@@ -5743,7 +5737,7 @@
                 <a:solidFill>
                   <a:srgbClr val="9AA3B5"/>
                 </a:solidFill>
-                <a:latin typeface="Calibri"/>
+                <a:latin typeface="Arial"/>
               </a:rPr>
               <a:t>CSBC26 · Bloque 2 · 1h</a:t>
             </a:r>
@@ -5783,34 +5777,31 @@
           <a:bodyPr wrap="square"/>
           <a:lstStyle/>
           <a:p>
+            <a:pPr algn="ctr"/>
             <a:r>
               <a:rPr sz="1300" b="1">
                 <a:solidFill>
-                  <a:srgbClr val="E32B3D"/>
-                </a:solidFill>
-                <a:latin typeface="Calibri"/>
+                  <a:srgbClr val="CD2D37"/>
+                </a:solidFill>
+                <a:latin typeface="Arial"/>
               </a:rPr>
               <a:t>SECCIÓN 3</a:t>
             </a:r>
           </a:p>
           <a:p>
-            <a:r>
-              <a:rPr sz="3000" b="1">
-                <a:solidFill>
-                  <a:srgbClr val="FFFFFF"/>
-                </a:solidFill>
-                <a:latin typeface="Calibri"/>
-              </a:rPr>
+            <a:pPr algn="ctr"/>
+            <a:r>
               <a:t>LLMs locales y NER en dominio específico</a:t>
             </a:r>
           </a:p>
           <a:p>
+            <a:pPr algn="ctr"/>
             <a:r>
               <a:rPr sz="1600">
                 <a:solidFill>
                   <a:srgbClr val="D6DAE2"/>
                 </a:solidFill>
-                <a:latin typeface="Calibri"/>
+                <a:latin typeface="Arial"/>
               </a:rPr>
               <a:t>Privacidad no negociable con datos sensibles</a:t>
             </a:r>
@@ -5851,12 +5842,6 @@
           <a:lstStyle/>
           <a:p>
             <a:r>
-              <a:rPr sz="2400" b="1">
-                <a:solidFill>
-                  <a:srgbClr val="1A1A2E"/>
-                </a:solidFill>
-                <a:latin typeface="Calibri"/>
-              </a:rPr>
               <a:t>La regla es simple: datos sensibles → modelo local</a:t>
             </a:r>
           </a:p>
@@ -5872,78 +5857,38 @@
             <p:ph type="body" idx="16" sz="quarter"/>
           </p:nvPr>
         </p:nvSpPr>
-        <p:spPr/>
+        <p:spPr>
+          <a:xfrm>
+            <a:off x="1073427" y="2077576"/>
+            <a:ext cx="10084904" cy="3507298"/>
+          </a:xfrm>
+        </p:spPr>
         <p:txBody>
           <a:bodyPr wrap="square"/>
           <a:lstStyle/>
           <a:p>
-            <a:pPr algn="l" marL="0" indent="-228600">
-              <a:buNone/>
-            </a:pPr>
-            <a:r>
-              <a:rPr sz="1900" b="0">
-                <a:solidFill>
-                  <a:srgbClr val="333844"/>
-                </a:solidFill>
-                <a:latin typeface="Calibri"/>
-              </a:rPr>
-              <a:t>▸  Nunca se mandan leaks a APIs externas — ni OpenAI, ni Anthropic, ni Google</a:t>
-            </a:r>
-          </a:p>
-          <a:p>
-            <a:pPr algn="l" marL="0" indent="-228600">
-              <a:buNone/>
-            </a:pPr>
-            <a:r>
-              <a:rPr sz="1900" b="0">
-                <a:solidFill>
-                  <a:srgbClr val="333844"/>
-                </a:solidFill>
-                <a:latin typeface="Calibri"/>
-              </a:rPr>
-              <a:t>▸  Ollama: corre modelos cuantizados (Q4/Q8) en hardware modesto sin salida de datos</a:t>
-            </a:r>
-          </a:p>
-          <a:p>
-            <a:pPr algn="l" marL="0" indent="-228600">
-              <a:buNone/>
-            </a:pPr>
-            <a:r>
-              <a:rPr sz="1900" b="0">
-                <a:solidFill>
-                  <a:srgbClr val="333844"/>
-                </a:solidFill>
-                <a:latin typeface="Calibri"/>
-              </a:rPr>
-              <a:t>▸  qwen2.5:14b con Q4 → 16GB RAM, respuestas en segundos, sin nube</a:t>
-            </a:r>
-          </a:p>
-          <a:p>
-            <a:pPr algn="l" marL="0" indent="-228600">
-              <a:buNone/>
-            </a:pPr>
-            <a:r>
-              <a:rPr sz="1900" b="0">
-                <a:solidFill>
-                  <a:srgbClr val="333844"/>
-                </a:solidFill>
-                <a:latin typeface="Calibri"/>
-              </a:rPr>
-              <a:t>▸  El tradeoff: latencia local vs. riesgo de fuga de datos de personas reales</a:t>
-            </a:r>
-          </a:p>
-          <a:p>
-            <a:pPr algn="l" marL="0" indent="-228600">
-              <a:buNone/>
-            </a:pPr>
-            <a:r>
-              <a:rPr sz="1900" b="0">
-                <a:solidFill>
-                  <a:srgbClr val="333844"/>
-                </a:solidFill>
-                <a:latin typeface="Calibri"/>
-              </a:rPr>
-              <a:t>▸  Con datos underground, el riesgo supera siempre al coste de latencia</a:t>
+            <a:r>
+              <a:t>Nunca se mandan leaks a APIs externas — ni OpenAI, ni Anthropic, ni Google</a:t>
+            </a:r>
+          </a:p>
+          <a:p>
+            <a:r>
+              <a:t>Ollama: corre modelos cuantizados (Q4/Q8) en hardware modesto sin salida de datos</a:t>
+            </a:r>
+          </a:p>
+          <a:p>
+            <a:r>
+              <a:t>qwen2.5:14b con Q4 → 16GB RAM, respuestas en segundos, sin nube</a:t>
+            </a:r>
+          </a:p>
+          <a:p>
+            <a:r>
+              <a:t>El tradeoff: latencia local vs. riesgo de fuga de datos de personas reales</a:t>
+            </a:r>
+          </a:p>
+          <a:p>
+            <a:r>
+              <a:t>Con datos underground, el riesgo supera siempre al coste de latencia</a:t>
             </a:r>
           </a:p>
         </p:txBody>
@@ -5982,12 +5927,6 @@
           <a:lstStyle/>
           <a:p>
             <a:r>
-              <a:rPr sz="2400" b="1">
-                <a:solidFill>
-                  <a:srgbClr val="1A1A2E"/>
-                </a:solidFill>
-                <a:latin typeface="Calibri"/>
-              </a:rPr>
               <a:t>NER zero-shot en dominio underground</a:t>
             </a:r>
           </a:p>
@@ -6003,92 +5942,43 @@
             <p:ph type="body" idx="16" sz="quarter"/>
           </p:nvPr>
         </p:nvSpPr>
-        <p:spPr/>
+        <p:spPr>
+          <a:xfrm>
+            <a:off x="1073427" y="2077576"/>
+            <a:ext cx="10084904" cy="3507298"/>
+          </a:xfrm>
+        </p:spPr>
         <p:txBody>
           <a:bodyPr wrap="square"/>
           <a:lstStyle/>
           <a:p>
-            <a:pPr algn="l" marL="0" indent="-228600">
-              <a:buNone/>
-            </a:pPr>
-            <a:r>
-              <a:rPr sz="1900" b="0">
-                <a:solidFill>
-                  <a:srgbClr val="333844"/>
-                </a:solidFill>
-                <a:latin typeface="Calibri"/>
-              </a:rPr>
-              <a:t>▸  NER estándar (spaCy, BERT) falla: no fue entrenado con texto underground</a:t>
-            </a:r>
-          </a:p>
-          <a:p>
-            <a:pPr algn="l" marL="0" indent="-228600">
-              <a:buNone/>
-            </a:pPr>
-            <a:r>
-              <a:rPr sz="1900" b="0">
-                <a:solidFill>
-                  <a:srgbClr val="333844"/>
-                </a:solidFill>
-                <a:latin typeface="Calibri"/>
-              </a:rPr>
-              <a:t>▸  Zero-shot con LLM local: describir el tipo de entidad en el prompt, extraer directamente</a:t>
-            </a:r>
-          </a:p>
-          <a:p>
-            <a:pPr algn="l" marL="0" indent="-228600">
-              <a:buNone/>
-            </a:pPr>
-            <a:r>
-              <a:rPr sz="1900" b="0">
-                <a:solidFill>
-                  <a:srgbClr val="333844"/>
-                </a:solidFill>
-                <a:latin typeface="Calibri"/>
-              </a:rPr>
-              <a:t>▸  Tipos de entidad útiles en este dominio: ALIAS, TOOL, MALWARE, CVE, MARKETPLACE, WALLET</a:t>
-            </a:r>
-          </a:p>
-          <a:p>
-            <a:pPr algn="l" marL="0" indent="-228600">
-              <a:buNone/>
-            </a:pPr>
-            <a:r>
-              <a:rPr sz="1900" b="0">
-                <a:solidFill>
-                  <a:srgbClr val="333844"/>
-                </a:solidFill>
-                <a:latin typeface="Calibri"/>
-              </a:rPr>
-              <a:t>▸  Estrategia: muestra de top-N usuarios × top-M posts más largos + checkpoint automático</a:t>
-            </a:r>
-          </a:p>
-          <a:p>
-            <a:pPr algn="l" marL="0" indent="-228600">
-              <a:buNone/>
-            </a:pPr>
-            <a:r>
-              <a:rPr sz="1900" b="0">
-                <a:solidFill>
-                  <a:srgbClr val="333844"/>
-                </a:solidFill>
-                <a:latin typeface="Calibri"/>
-              </a:rPr>
-              <a:t>▸  Para texto no inglés: el LLM rinde mejor en inglés → traducir el texto primero es aceptable</a:t>
-            </a:r>
-          </a:p>
-          <a:p>
-            <a:pPr algn="l" marL="0" indent="-228600">
-              <a:buNone/>
-            </a:pPr>
-            <a:r>
-              <a:rPr sz="1900" b="0">
-                <a:solidFill>
-                  <a:srgbClr val="333844"/>
-                </a:solidFill>
-                <a:latin typeface="Calibri"/>
-              </a:rPr>
-              <a:t>▸  ¿Por qué es aceptable aquí? Para NER no importa el estilo, solo las entidades</a:t>
+            <a:r>
+              <a:t>NER estándar (spaCy, BERT) falla: no fue entrenado con texto underground</a:t>
+            </a:r>
+          </a:p>
+          <a:p>
+            <a:r>
+              <a:t>Zero-shot con LLM local: describir el tipo de entidad en el prompt, extraer directamente</a:t>
+            </a:r>
+          </a:p>
+          <a:p>
+            <a:r>
+              <a:t>Tipos de entidad útiles en este dominio: ALIAS, TOOL, MALWARE, CVE, MARKETPLACE, WALLET</a:t>
+            </a:r>
+          </a:p>
+          <a:p>
+            <a:r>
+              <a:t>Estrategia: muestra de top-N usuarios × top-M posts más largos + checkpoint automático</a:t>
+            </a:r>
+          </a:p>
+          <a:p>
+            <a:r>
+              <a:t>Para texto no inglés: el LLM rinde mejor en inglés → traducir el texto primero es aceptable</a:t>
+            </a:r>
+          </a:p>
+          <a:p>
+            <a:r>
+              <a:t>¿Por qué es aceptable aquí? Para NER no importa el estilo, solo las entidades</a:t>
             </a:r>
           </a:p>
         </p:txBody>
@@ -6127,12 +6017,6 @@
           <a:lstStyle/>
           <a:p>
             <a:r>
-              <a:rPr sz="2400" b="1">
-                <a:solidFill>
-                  <a:srgbClr val="1A1A2E"/>
-                </a:solidFill>
-                <a:latin typeface="Calibri"/>
-              </a:rPr>
               <a:t>Idioma original vs. traducción — regla según técnica</a:t>
             </a:r>
           </a:p>
@@ -6163,14 +6047,14 @@
         </p:nvSpPr>
         <p:spPr>
           <a:xfrm>
-            <a:off x="1051560" y="1645920"/>
+            <a:off x="1051560" y="2651760"/>
             <a:ext cx="10058400" cy="365760"/>
           </a:xfrm>
           <a:prstGeom prst="rect">
             <a:avLst/>
           </a:prstGeom>
           <a:solidFill>
-            <a:srgbClr val="E32B3D"/>
+            <a:srgbClr val="CD2D37"/>
           </a:solidFill>
           <a:ln>
             <a:noFill/>
@@ -6206,7 +6090,7 @@
         </p:nvSpPr>
         <p:spPr>
           <a:xfrm>
-            <a:off x="1097280" y="1700920"/>
+            <a:off x="1097280" y="2706760"/>
             <a:ext cx="2423160" cy="365760"/>
           </a:xfrm>
           <a:prstGeom prst="rect">
@@ -6226,7 +6110,7 @@
                 <a:solidFill>
                   <a:srgbClr val="FFFFFF"/>
                 </a:solidFill>
-                <a:latin typeface="Calibri"/>
+                <a:latin typeface="Arial"/>
               </a:rPr>
               <a:t>Técnica</a:t>
             </a:r>
@@ -6241,7 +6125,7 @@
         </p:nvSpPr>
         <p:spPr>
           <a:xfrm>
-            <a:off x="3611880" y="1700920"/>
+            <a:off x="3611880" y="2706760"/>
             <a:ext cx="2423160" cy="365760"/>
           </a:xfrm>
           <a:prstGeom prst="rect">
@@ -6261,7 +6145,7 @@
                 <a:solidFill>
                   <a:srgbClr val="FFFFFF"/>
                 </a:solidFill>
-                <a:latin typeface="Calibri"/>
+                <a:latin typeface="Arial"/>
               </a:rPr>
               <a:t>Original</a:t>
             </a:r>
@@ -6276,7 +6160,7 @@
         </p:nvSpPr>
         <p:spPr>
           <a:xfrm>
-            <a:off x="6126480" y="1700920"/>
+            <a:off x="6126480" y="2706760"/>
             <a:ext cx="2423160" cy="365760"/>
           </a:xfrm>
           <a:prstGeom prst="rect">
@@ -6296,7 +6180,7 @@
                 <a:solidFill>
                   <a:srgbClr val="FFFFFF"/>
                 </a:solidFill>
-                <a:latin typeface="Calibri"/>
+                <a:latin typeface="Arial"/>
               </a:rPr>
               <a:t>Traducción</a:t>
             </a:r>
@@ -6311,7 +6195,7 @@
         </p:nvSpPr>
         <p:spPr>
           <a:xfrm>
-            <a:off x="8641080" y="1700920"/>
+            <a:off x="8641080" y="2706760"/>
             <a:ext cx="2423160" cy="365760"/>
           </a:xfrm>
           <a:prstGeom prst="rect">
@@ -6331,7 +6215,7 @@
                 <a:solidFill>
                   <a:srgbClr val="FFFFFF"/>
                 </a:solidFill>
-                <a:latin typeface="Calibri"/>
+                <a:latin typeface="Arial"/>
               </a:rPr>
               <a:t>Por qué</a:t>
             </a:r>
@@ -6346,7 +6230,7 @@
         </p:nvSpPr>
         <p:spPr>
           <a:xfrm>
-            <a:off x="1051560" y="2011680"/>
+            <a:off x="1051560" y="3017520"/>
             <a:ext cx="10058400" cy="615315"/>
           </a:xfrm>
           <a:prstGeom prst="rect">
@@ -6389,7 +6273,7 @@
         </p:nvSpPr>
         <p:spPr>
           <a:xfrm>
-            <a:off x="1097280" y="2051680"/>
+            <a:off x="1097280" y="3057520"/>
             <a:ext cx="2423160" cy="615315"/>
           </a:xfrm>
           <a:prstGeom prst="rect">
@@ -6407,9 +6291,9 @@
             <a:r>
               <a:rPr sz="1100" b="0">
                 <a:solidFill>
-                  <a:srgbClr val="333844"/>
-                </a:solidFill>
-                <a:latin typeface="Calibri"/>
+                  <a:srgbClr val="465461"/>
+                </a:solidFill>
+                <a:latin typeface="Arial"/>
               </a:rPr>
               <a:t>Embeddings</a:t>
             </a:r>
@@ -6424,7 +6308,7 @@
         </p:nvSpPr>
         <p:spPr>
           <a:xfrm>
-            <a:off x="3611880" y="2051680"/>
+            <a:off x="3611880" y="3057520"/>
             <a:ext cx="2423160" cy="615315"/>
           </a:xfrm>
           <a:prstGeom prst="rect">
@@ -6442,9 +6326,9 @@
             <a:r>
               <a:rPr sz="1100" b="0">
                 <a:solidFill>
-                  <a:srgbClr val="333844"/>
-                </a:solidFill>
-                <a:latin typeface="Calibri"/>
+                  <a:srgbClr val="465461"/>
+                </a:solidFill>
+                <a:latin typeface="Arial"/>
               </a:rPr>
               <a:t>✓ SIEMPRE</a:t>
             </a:r>
@@ -6459,7 +6343,7 @@
         </p:nvSpPr>
         <p:spPr>
           <a:xfrm>
-            <a:off x="6126480" y="2051680"/>
+            <a:off x="6126480" y="3057520"/>
             <a:ext cx="2423160" cy="615315"/>
           </a:xfrm>
           <a:prstGeom prst="rect">
@@ -6477,9 +6361,9 @@
             <a:r>
               <a:rPr sz="1100" b="0">
                 <a:solidFill>
-                  <a:srgbClr val="333844"/>
-                </a:solidFill>
-                <a:latin typeface="Calibri"/>
+                  <a:srgbClr val="465461"/>
+                </a:solidFill>
+                <a:latin typeface="Arial"/>
               </a:rPr>
               <a:t>✗ nunca</a:t>
             </a:r>
@@ -6494,7 +6378,7 @@
         </p:nvSpPr>
         <p:spPr>
           <a:xfrm>
-            <a:off x="8641080" y="2051680"/>
+            <a:off x="8641080" y="3057520"/>
             <a:ext cx="2423160" cy="615315"/>
           </a:xfrm>
           <a:prstGeom prst="rect">
@@ -6512,9 +6396,9 @@
             <a:r>
               <a:rPr sz="1100" b="0">
                 <a:solidFill>
-                  <a:srgbClr val="333844"/>
-                </a:solidFill>
-                <a:latin typeface="Calibri"/>
+                  <a:srgbClr val="465461"/>
+                </a:solidFill>
+                <a:latin typeface="Arial"/>
               </a:rPr>
               <a:t>Traducir destruye la huella estilométrica del autor</a:t>
             </a:r>
@@ -6529,7 +6413,7 @@
         </p:nvSpPr>
         <p:spPr>
           <a:xfrm>
-            <a:off x="1051560" y="2626995"/>
+            <a:off x="1051560" y="3632835"/>
             <a:ext cx="10058400" cy="440689"/>
           </a:xfrm>
           <a:prstGeom prst="rect">
@@ -6572,7 +6456,7 @@
         </p:nvSpPr>
         <p:spPr>
           <a:xfrm>
-            <a:off x="1097280" y="2666995"/>
+            <a:off x="1097280" y="3672835"/>
             <a:ext cx="2423160" cy="440689"/>
           </a:xfrm>
           <a:prstGeom prst="rect">
@@ -6590,9 +6474,9 @@
             <a:r>
               <a:rPr sz="1100" b="0">
                 <a:solidFill>
-                  <a:srgbClr val="333844"/>
-                </a:solidFill>
-                <a:latin typeface="Calibri"/>
+                  <a:srgbClr val="465461"/>
+                </a:solidFill>
+                <a:latin typeface="Arial"/>
               </a:rPr>
               <a:t>Estilometría</a:t>
             </a:r>
@@ -6607,7 +6491,7 @@
         </p:nvSpPr>
         <p:spPr>
           <a:xfrm>
-            <a:off x="3611880" y="2666995"/>
+            <a:off x="3611880" y="3672835"/>
             <a:ext cx="2423160" cy="440689"/>
           </a:xfrm>
           <a:prstGeom prst="rect">
@@ -6625,9 +6509,9 @@
             <a:r>
               <a:rPr sz="1100" b="0">
                 <a:solidFill>
-                  <a:srgbClr val="333844"/>
-                </a:solidFill>
-                <a:latin typeface="Calibri"/>
+                  <a:srgbClr val="465461"/>
+                </a:solidFill>
+                <a:latin typeface="Arial"/>
               </a:rPr>
               <a:t>✓ SIEMPRE</a:t>
             </a:r>
@@ -6642,7 +6526,7 @@
         </p:nvSpPr>
         <p:spPr>
           <a:xfrm>
-            <a:off x="6126480" y="2666995"/>
+            <a:off x="6126480" y="3672835"/>
             <a:ext cx="2423160" cy="440689"/>
           </a:xfrm>
           <a:prstGeom prst="rect">
@@ -6660,9 +6544,9 @@
             <a:r>
               <a:rPr sz="1100" b="0">
                 <a:solidFill>
-                  <a:srgbClr val="333844"/>
-                </a:solidFill>
-                <a:latin typeface="Calibri"/>
+                  <a:srgbClr val="465461"/>
+                </a:solidFill>
+                <a:latin typeface="Arial"/>
               </a:rPr>
               <a:t>✗ nunca</a:t>
             </a:r>
@@ -6677,7 +6561,7 @@
         </p:nvSpPr>
         <p:spPr>
           <a:xfrm>
-            <a:off x="8641080" y="2666995"/>
+            <a:off x="8641080" y="3672835"/>
             <a:ext cx="2423160" cy="440689"/>
           </a:xfrm>
           <a:prstGeom prst="rect">
@@ -6695,9 +6579,9 @@
             <a:r>
               <a:rPr sz="1100" b="0">
                 <a:solidFill>
-                  <a:srgbClr val="333844"/>
-                </a:solidFill>
-                <a:latin typeface="Calibri"/>
+                  <a:srgbClr val="465461"/>
+                </a:solidFill>
+                <a:latin typeface="Arial"/>
               </a:rPr>
               <a:t>La señal ES el estilo — no sobrevive la traducción</a:t>
             </a:r>
@@ -6712,7 +6596,7 @@
         </p:nvSpPr>
         <p:spPr>
           <a:xfrm>
-            <a:off x="1051560" y="3067685"/>
+            <a:off x="1051560" y="4073525"/>
             <a:ext cx="10058400" cy="440689"/>
           </a:xfrm>
           <a:prstGeom prst="rect">
@@ -6755,7 +6639,7 @@
         </p:nvSpPr>
         <p:spPr>
           <a:xfrm>
-            <a:off x="1097280" y="3107685"/>
+            <a:off x="1097280" y="4113525"/>
             <a:ext cx="2423160" cy="440689"/>
           </a:xfrm>
           <a:prstGeom prst="rect">
@@ -6773,9 +6657,9 @@
             <a:r>
               <a:rPr sz="1100" b="0">
                 <a:solidFill>
-                  <a:srgbClr val="333844"/>
-                </a:solidFill>
-                <a:latin typeface="Calibri"/>
+                  <a:srgbClr val="465461"/>
+                </a:solidFill>
+                <a:latin typeface="Arial"/>
               </a:rPr>
               <a:t>NER con LLM</a:t>
             </a:r>
@@ -6790,7 +6674,7 @@
         </p:nvSpPr>
         <p:spPr>
           <a:xfrm>
-            <a:off x="3611880" y="3107685"/>
+            <a:off x="3611880" y="4113525"/>
             <a:ext cx="2423160" cy="440689"/>
           </a:xfrm>
           <a:prstGeom prst="rect">
@@ -6808,9 +6692,9 @@
             <a:r>
               <a:rPr sz="1100" b="0">
                 <a:solidFill>
-                  <a:srgbClr val="333844"/>
-                </a:solidFill>
-                <a:latin typeface="Calibri"/>
+                  <a:srgbClr val="465461"/>
+                </a:solidFill>
+                <a:latin typeface="Arial"/>
               </a:rPr>
               <a:t>Si el modelo lo soporta bien</a:t>
             </a:r>
@@ -6825,7 +6709,7 @@
         </p:nvSpPr>
         <p:spPr>
           <a:xfrm>
-            <a:off x="6126480" y="3107685"/>
+            <a:off x="6126480" y="4113525"/>
             <a:ext cx="2423160" cy="440689"/>
           </a:xfrm>
           <a:prstGeom prst="rect">
@@ -6843,9 +6727,9 @@
             <a:r>
               <a:rPr sz="1100" b="0">
                 <a:solidFill>
-                  <a:srgbClr val="333844"/>
-                </a:solidFill>
-                <a:latin typeface="Calibri"/>
+                  <a:srgbClr val="465461"/>
+                </a:solidFill>
+                <a:latin typeface="Arial"/>
               </a:rPr>
               <a:t>✓ si el modelo base es inglés</a:t>
             </a:r>
@@ -6860,7 +6744,7 @@
         </p:nvSpPr>
         <p:spPr>
           <a:xfrm>
-            <a:off x="8641080" y="3107685"/>
+            <a:off x="8641080" y="4113525"/>
             <a:ext cx="2423160" cy="440689"/>
           </a:xfrm>
           <a:prstGeom prst="rect">
@@ -6878,9 +6762,9 @@
             <a:r>
               <a:rPr sz="1100" b="0">
                 <a:solidFill>
-                  <a:srgbClr val="333844"/>
-                </a:solidFill>
-                <a:latin typeface="Calibri"/>
+                  <a:srgbClr val="465461"/>
+                </a:solidFill>
+                <a:latin typeface="Arial"/>
               </a:rPr>
               <a:t>Para NER importa la entidad, no el estilo</a:t>
             </a:r>
@@ -6895,7 +6779,7 @@
         </p:nvSpPr>
         <p:spPr>
           <a:xfrm>
-            <a:off x="1051560" y="3508375"/>
+            <a:off x="1051560" y="4514215"/>
             <a:ext cx="10058400" cy="440689"/>
           </a:xfrm>
           <a:prstGeom prst="rect">
@@ -6938,7 +6822,7 @@
         </p:nvSpPr>
         <p:spPr>
           <a:xfrm>
-            <a:off x="1097280" y="3548375"/>
+            <a:off x="1097280" y="4554215"/>
             <a:ext cx="2423160" cy="440689"/>
           </a:xfrm>
           <a:prstGeom prst="rect">
@@ -6956,9 +6840,9 @@
             <a:r>
               <a:rPr sz="1100" b="0">
                 <a:solidFill>
-                  <a:srgbClr val="333844"/>
-                </a:solidFill>
-                <a:latin typeface="Calibri"/>
+                  <a:srgbClr val="465461"/>
+                </a:solidFill>
+                <a:latin typeface="Arial"/>
               </a:rPr>
               <a:t>Topic modeling</a:t>
             </a:r>
@@ -6973,7 +6857,7 @@
         </p:nvSpPr>
         <p:spPr>
           <a:xfrm>
-            <a:off x="3611880" y="3548375"/>
+            <a:off x="3611880" y="4554215"/>
             <a:ext cx="2423160" cy="440689"/>
           </a:xfrm>
           <a:prstGeom prst="rect">
@@ -6991,9 +6875,9 @@
             <a:r>
               <a:rPr sz="1100" b="0">
                 <a:solidFill>
-                  <a:srgbClr val="333844"/>
-                </a:solidFill>
-                <a:latin typeface="Calibri"/>
+                  <a:srgbClr val="465461"/>
+                </a:solidFill>
+                <a:latin typeface="Arial"/>
               </a:rPr>
               <a:t>Con modelo multilingüe</a:t>
             </a:r>
@@ -7008,7 +6892,7 @@
         </p:nvSpPr>
         <p:spPr>
           <a:xfrm>
-            <a:off x="6126480" y="3548375"/>
+            <a:off x="6126480" y="4554215"/>
             <a:ext cx="2423160" cy="440689"/>
           </a:xfrm>
           <a:prstGeom prst="rect">
@@ -7026,9 +6910,9 @@
             <a:r>
               <a:rPr sz="1100" b="0">
                 <a:solidFill>
-                  <a:srgbClr val="333844"/>
-                </a:solidFill>
-                <a:latin typeface="Calibri"/>
+                  <a:srgbClr val="465461"/>
+                </a:solidFill>
+                <a:latin typeface="Arial"/>
               </a:rPr>
               <a:t>✓ si no hay modelo del idioma</a:t>
             </a:r>
@@ -7043,7 +6927,7 @@
         </p:nvSpPr>
         <p:spPr>
           <a:xfrm>
-            <a:off x="8641080" y="3548375"/>
+            <a:off x="8641080" y="4554215"/>
             <a:ext cx="2423160" cy="440689"/>
           </a:xfrm>
           <a:prstGeom prst="rect">
@@ -7061,9 +6945,9 @@
             <a:r>
               <a:rPr sz="1100" b="0">
                 <a:solidFill>
-                  <a:srgbClr val="333844"/>
-                </a:solidFill>
-                <a:latin typeface="Calibri"/>
+                  <a:srgbClr val="465461"/>
+                </a:solidFill>
+                <a:latin typeface="Arial"/>
               </a:rPr>
               <a:t>Los topics son semánticos, no estilísticos</a:t>
             </a:r>
@@ -7103,34 +6987,31 @@
           <a:bodyPr wrap="square"/>
           <a:lstStyle/>
           <a:p>
+            <a:pPr algn="ctr"/>
             <a:r>
               <a:rPr sz="1300" b="1">
                 <a:solidFill>
-                  <a:srgbClr val="E32B3D"/>
-                </a:solidFill>
-                <a:latin typeface="Calibri"/>
+                  <a:srgbClr val="CD2D37"/>
+                </a:solidFill>
+                <a:latin typeface="Arial"/>
               </a:rPr>
               <a:t>SECCIÓN 4</a:t>
             </a:r>
           </a:p>
           <a:p>
-            <a:r>
-              <a:rPr sz="3000" b="1">
-                <a:solidFill>
-                  <a:srgbClr val="FFFFFF"/>
-                </a:solidFill>
-                <a:latin typeface="Calibri"/>
-              </a:rPr>
+            <a:pPr algn="ctr"/>
+            <a:r>
               <a:t>Estilometría computacional</a:t>
             </a:r>
           </a:p>
           <a:p>
+            <a:pPr algn="ctr"/>
             <a:r>
               <a:rPr sz="1600">
                 <a:solidFill>
                   <a:srgbClr val="D6DAE2"/>
                 </a:solidFill>
-                <a:latin typeface="Calibri"/>
+                <a:latin typeface="Arial"/>
               </a:rPr>
               <a:t>La huella digital del escritor</a:t>
             </a:r>
@@ -7171,12 +7052,6 @@
           <a:lstStyle/>
           <a:p>
             <a:r>
-              <a:rPr sz="2400" b="1">
-                <a:solidFill>
-                  <a:srgbClr val="1A1A2E"/>
-                </a:solidFill>
-                <a:latin typeface="Calibri"/>
-              </a:rPr>
               <a:t>Burrows' Delta — el estándar de atribución de autoría</a:t>
             </a:r>
           </a:p>
@@ -7192,92 +7067,43 @@
             <p:ph type="body" idx="16" sz="quarter"/>
           </p:nvPr>
         </p:nvSpPr>
-        <p:spPr/>
+        <p:spPr>
+          <a:xfrm>
+            <a:off x="1073427" y="2580496"/>
+            <a:ext cx="10084904" cy="3004378"/>
+          </a:xfrm>
+        </p:spPr>
         <p:txBody>
           <a:bodyPr wrap="square"/>
           <a:lstStyle/>
           <a:p>
-            <a:pPr algn="l" marL="0" indent="-228600">
-              <a:buNone/>
-            </a:pPr>
-            <a:r>
-              <a:rPr sz="1900" b="0">
-                <a:solidFill>
-                  <a:srgbClr val="333844"/>
-                </a:solidFill>
-                <a:latin typeface="Calibri"/>
-              </a:rPr>
-              <a:t>▸  Mide la distribución de frecuencias de las N palabras más comunes, normalizada por z-score</a:t>
-            </a:r>
-          </a:p>
-          <a:p>
-            <a:pPr algn="l" marL="0" indent="-228600">
-              <a:buNone/>
-            </a:pPr>
-            <a:r>
-              <a:rPr sz="1900" b="0">
-                <a:solidFill>
-                  <a:srgbClr val="333844"/>
-                </a:solidFill>
-                <a:latin typeface="Calibri"/>
-              </a:rPr>
-              <a:t>▸  Esas palabras son las 'funcionales': artículos, preposiciones, conjunciones — difíciles de suprimir</a:t>
-            </a:r>
-          </a:p>
-          <a:p>
-            <a:pPr algn="l" marL="0" indent="-228600">
-              <a:buNone/>
-            </a:pPr>
-            <a:r>
-              <a:rPr sz="1900" b="0">
-                <a:solidFill>
-                  <a:srgbClr val="333844"/>
-                </a:solidFill>
-                <a:latin typeface="Calibri"/>
-              </a:rPr>
-              <a:t>▸  Delta bajo entre dos textos → mismo perfil de frecuencias → mismo autor probable</a:t>
-            </a:r>
-          </a:p>
-          <a:p>
-            <a:pPr algn="l" marL="0" indent="-228600">
-              <a:buNone/>
-            </a:pPr>
-            <a:r>
-              <a:rPr sz="1900" b="0">
-                <a:solidFill>
-                  <a:srgbClr val="333844"/>
-                </a:solidFill>
-                <a:latin typeface="Calibri"/>
-              </a:rPr>
-              <a:t>▸  No depende del tema — solo del estilo de escritura</a:t>
-            </a:r>
-          </a:p>
-          <a:p>
-            <a:pPr algn="l" marL="0" indent="-228600">
-              <a:buNone/>
-            </a:pPr>
-            <a:r>
-              <a:rPr sz="1900" b="0">
-                <a:solidFill>
-                  <a:srgbClr val="333844"/>
-                </a:solidFill>
-                <a:latin typeface="Calibri"/>
-              </a:rPr>
-              <a:t>▸  Limitación: en corpus ideológicamente homogéneo el poder discriminante baja (vocabulario compartido)</a:t>
-            </a:r>
-          </a:p>
-          <a:p>
-            <a:pPr algn="l" marL="0" indent="-228600">
-              <a:buNone/>
-            </a:pPr>
-            <a:r>
-              <a:rPr sz="1900" b="0">
-                <a:solidFill>
-                  <a:srgbClr val="333844"/>
-                </a:solidFill>
-                <a:latin typeface="Calibri"/>
-              </a:rPr>
-              <a:t>▸  Complementar siempre con señales independientes: temporal, red, handle matching</a:t>
+            <a:r>
+              <a:t>Mide la distribución de frecuencias de las N palabras más comunes, normalizada por z-score</a:t>
+            </a:r>
+          </a:p>
+          <a:p>
+            <a:r>
+              <a:t>Esas palabras son las 'funcionales': artículos, preposiciones, conjunciones — difíciles de suprimir</a:t>
+            </a:r>
+          </a:p>
+          <a:p>
+            <a:r>
+              <a:t>Delta bajo entre dos textos → mismo perfil de frecuencias → mismo autor probable</a:t>
+            </a:r>
+          </a:p>
+          <a:p>
+            <a:r>
+              <a:t>No depende del tema — solo del estilo de escritura</a:t>
+            </a:r>
+          </a:p>
+          <a:p>
+            <a:r>
+              <a:t>Limitación: en corpus ideológicamente homogéneo el poder discriminante baja (vocabulario compartido)</a:t>
+            </a:r>
+          </a:p>
+          <a:p>
+            <a:r>
+              <a:t>Complementar siempre con señales independientes: temporal, red, handle matching</a:t>
             </a:r>
           </a:p>
         </p:txBody>
@@ -7316,12 +7142,6 @@
           <a:lstStyle/>
           <a:p>
             <a:r>
-              <a:rPr sz="2400" b="1">
-                <a:solidFill>
-                  <a:srgbClr val="1A1A2E"/>
-                </a:solidFill>
-                <a:latin typeface="Calibri"/>
-              </a:rPr>
               <a:t>Convergencia de señales — el principio de atribución</a:t>
             </a:r>
           </a:p>
@@ -7337,92 +7157,43 @@
             <p:ph type="body" idx="16" sz="quarter"/>
           </p:nvPr>
         </p:nvSpPr>
-        <p:spPr/>
+        <p:spPr>
+          <a:xfrm>
+            <a:off x="1073427" y="2077576"/>
+            <a:ext cx="10084904" cy="3507298"/>
+          </a:xfrm>
+        </p:spPr>
         <p:txBody>
           <a:bodyPr wrap="square"/>
           <a:lstStyle/>
           <a:p>
-            <a:pPr algn="l" marL="0" indent="-228600">
-              <a:buNone/>
-            </a:pPr>
-            <a:r>
-              <a:rPr sz="1900" b="0">
-                <a:solidFill>
-                  <a:srgbClr val="333844"/>
-                </a:solidFill>
-                <a:latin typeface="Calibri"/>
-              </a:rPr>
-              <a:t>▸  Ninguna señal sola es evidencia de identidad — la convergencia sí lo es</a:t>
-            </a:r>
-          </a:p>
-          <a:p>
-            <a:pPr algn="l" marL="0" indent="-228600">
-              <a:buNone/>
-            </a:pPr>
-            <a:r>
-              <a:rPr sz="1900" b="0">
-                <a:solidFill>
-                  <a:srgbClr val="333844"/>
-                </a:solidFill>
-                <a:latin typeface="Calibri"/>
-              </a:rPr>
-              <a:t>▸  Handle exacto o fuzzy: fácil de cambiar, pero mucha gente no lo hace</a:t>
-            </a:r>
-          </a:p>
-          <a:p>
-            <a:pPr algn="l" marL="0" indent="-228600">
-              <a:buNone/>
-            </a:pPr>
-            <a:r>
-              <a:rPr sz="1900" b="0">
-                <a:solidFill>
-                  <a:srgbClr val="333844"/>
-                </a:solidFill>
-                <a:latin typeface="Calibri"/>
-              </a:rPr>
-              <a:t>▸  Similitud coseno de embeddings: captura estilo aunque cambie el vocabulario deliberadamente</a:t>
-            </a:r>
-          </a:p>
-          <a:p>
-            <a:pPr algn="l" marL="0" indent="-228600">
-              <a:buNone/>
-            </a:pPr>
-            <a:r>
-              <a:rPr sz="1900" b="0">
-                <a:solidFill>
-                  <a:srgbClr val="333844"/>
-                </a:solidFill>
-                <a:latin typeface="Calibri"/>
-              </a:rPr>
-              <a:t>▸  Burrows' Delta: captura palabras función que el autor no controla conscientemente</a:t>
-            </a:r>
-          </a:p>
-          <a:p>
-            <a:pPr algn="l" marL="0" indent="-228600">
-              <a:buNone/>
-            </a:pPr>
-            <a:r>
-              <a:rPr sz="1900" b="0">
-                <a:solidFill>
-                  <a:srgbClr val="333844"/>
-                </a:solidFill>
-                <a:latin typeface="Calibri"/>
-              </a:rPr>
-              <a:t>▸  Análisis temporal: el timezone real es muy difícil de falsificar de forma consistente</a:t>
-            </a:r>
-          </a:p>
-          <a:p>
-            <a:pPr algn="l" marL="0" indent="-228600">
-              <a:buNone/>
-            </a:pPr>
-            <a:r>
-              <a:rPr sz="1900" b="0">
-                <a:solidFill>
-                  <a:srgbClr val="333844"/>
-                </a:solidFill>
-                <a:latin typeface="Calibri"/>
-              </a:rPr>
-              <a:t>▸  Regla práctica: ≥3 señales convergentes → candidato que merece investigación</a:t>
+            <a:r>
+              <a:t>Ninguna señal sola es evidencia de identidad — la convergencia sí lo es</a:t>
+            </a:r>
+          </a:p>
+          <a:p>
+            <a:r>
+              <a:t>Handle exacto o fuzzy: fácil de cambiar, pero mucha gente no lo hace</a:t>
+            </a:r>
+          </a:p>
+          <a:p>
+            <a:r>
+              <a:t>Similitud coseno de embeddings: captura estilo aunque cambie el vocabulario deliberadamente</a:t>
+            </a:r>
+          </a:p>
+          <a:p>
+            <a:r>
+              <a:t>Burrows' Delta: captura palabras función que el autor no controla conscientemente</a:t>
+            </a:r>
+          </a:p>
+          <a:p>
+            <a:r>
+              <a:t>Análisis temporal: el timezone real es muy difícil de falsificar de forma consistente</a:t>
+            </a:r>
+          </a:p>
+          <a:p>
+            <a:r>
+              <a:t>Regla práctica: ≥3 señales convergentes → candidato que merece investigación</a:t>
             </a:r>
           </a:p>
         </p:txBody>
@@ -7460,34 +7231,31 @@
           <a:bodyPr wrap="square"/>
           <a:lstStyle/>
           <a:p>
+            <a:pPr algn="ctr"/>
             <a:r>
               <a:rPr sz="1300" b="1">
                 <a:solidFill>
-                  <a:srgbClr val="E32B3D"/>
-                </a:solidFill>
-                <a:latin typeface="Calibri"/>
+                  <a:srgbClr val="CD2D37"/>
+                </a:solidFill>
+                <a:latin typeface="Arial"/>
               </a:rPr>
               <a:t>DEMO EN VIVO</a:t>
             </a:r>
           </a:p>
           <a:p>
-            <a:r>
-              <a:rPr sz="2600" b="1">
-                <a:solidFill>
-                  <a:srgbClr val="FFFFFF"/>
-                </a:solidFill>
-                <a:latin typeface="Calibri"/>
-              </a:rPr>
+            <a:pPr algn="ctr"/>
+            <a:r>
               <a:t>Demo — embeddings y clustering de usuarios</a:t>
             </a:r>
           </a:p>
           <a:p>
+            <a:pPr algn="ctr"/>
             <a:r>
               <a:rPr sz="1400">
                 <a:solidFill>
                   <a:srgbClr val="9AA3B5"/>
                 </a:solidFill>
-                <a:latin typeface="Calibri"/>
+                <a:latin typeface="Arial"/>
               </a:rPr>
               <a:t>CardingForums/01_carding_forums.ipynb</a:t>
             </a:r>
@@ -7521,7 +7289,7 @@
                 <a:solidFill>
                   <a:srgbClr val="D6DAE2"/>
                 </a:solidFill>
-                <a:latin typeface="Calibri"/>
+                <a:latin typeface="Arial"/>
               </a:rPr>
               <a:t>1.  Generar embeddings de usuarios (precomputado, mostrar código)</a:t>
             </a:r>
@@ -7532,7 +7300,7 @@
                 <a:solidFill>
                   <a:srgbClr val="D6DAE2"/>
                 </a:solidFill>
-                <a:latin typeface="Calibri"/>
+                <a:latin typeface="Arial"/>
               </a:rPr>
               <a:t>2.  UMAP: reducir 4096D → 2D preservando estructura de vecindad</a:t>
             </a:r>
@@ -7543,7 +7311,7 @@
                 <a:solidFill>
                   <a:srgbClr val="D6DAE2"/>
                 </a:solidFill>
-                <a:latin typeface="Calibri"/>
+                <a:latin typeface="Arial"/>
               </a:rPr>
               <a:t>3.  HDBSCAN: detectar clusters sin fijar K — ver grupos emergentes</a:t>
             </a:r>
@@ -7554,7 +7322,7 @@
                 <a:solidFill>
                   <a:srgbClr val="D6DAE2"/>
                 </a:solidFill>
-                <a:latin typeface="Calibri"/>
+                <a:latin typeface="Arial"/>
               </a:rPr>
               <a:t>4.  Hover en visualización Plotly: identificar patrones por cluster</a:t>
             </a:r>
@@ -7565,7 +7333,7 @@
                 <a:solidFill>
                   <a:srgbClr val="D6DAE2"/>
                 </a:solidFill>
-                <a:latin typeface="Calibri"/>
+                <a:latin typeface="Arial"/>
               </a:rPr>
               <a:t>5.  Calcular similitud coseno entre pares → candidatos a misma identidad</a:t>
             </a:r>
@@ -7605,34 +7373,31 @@
           <a:bodyPr wrap="square"/>
           <a:lstStyle/>
           <a:p>
+            <a:pPr algn="ctr"/>
             <a:r>
               <a:rPr sz="1300" b="1">
                 <a:solidFill>
-                  <a:srgbClr val="E32B3D"/>
-                </a:solidFill>
-                <a:latin typeface="Calibri"/>
+                  <a:srgbClr val="CD2D37"/>
+                </a:solidFill>
+                <a:latin typeface="Arial"/>
               </a:rPr>
               <a:t>SECCIÓN 1</a:t>
             </a:r>
           </a:p>
           <a:p>
-            <a:r>
-              <a:rPr sz="3000" b="1">
-                <a:solidFill>
-                  <a:srgbClr val="FFFFFF"/>
-                </a:solidFill>
-                <a:latin typeface="Calibri"/>
-              </a:rPr>
+            <a:pPr algn="ctr"/>
+            <a:r>
               <a:t>Por qué los métodos clásicos no son suficientes</a:t>
             </a:r>
           </a:p>
           <a:p>
+            <a:pPr algn="ctr"/>
             <a:r>
               <a:rPr sz="1600">
                 <a:solidFill>
                   <a:srgbClr val="D6DAE2"/>
                 </a:solidFill>
-                <a:latin typeface="Calibri"/>
+                <a:latin typeface="Arial"/>
               </a:rPr>
               <a:t>El vocabulario underground es opaco por diseño</a:t>
             </a:r>
@@ -7673,12 +7438,6 @@
           <a:lstStyle/>
           <a:p>
             <a:r>
-              <a:rPr sz="2400" b="1">
-                <a:solidFill>
-                  <a:srgbClr val="1A1A2E"/>
-                </a:solidFill>
-                <a:latin typeface="Calibri"/>
-              </a:rPr>
               <a:t>Las limitaciones del text mining clásico</a:t>
             </a:r>
           </a:p>
@@ -7694,78 +7453,38 @@
             <p:ph type="body" idx="16" sz="quarter"/>
           </p:nvPr>
         </p:nvSpPr>
-        <p:spPr/>
+        <p:spPr>
+          <a:xfrm>
+            <a:off x="1073427" y="2077576"/>
+            <a:ext cx="10084904" cy="3507298"/>
+          </a:xfrm>
+        </p:spPr>
         <p:txBody>
           <a:bodyPr wrap="square"/>
           <a:lstStyle/>
           <a:p>
-            <a:pPr algn="l" marL="0" indent="-228600">
-              <a:buNone/>
-            </a:pPr>
-            <a:r>
-              <a:rPr sz="1900" b="0">
-                <a:solidFill>
-                  <a:srgbClr val="333844"/>
-                </a:solidFill>
-                <a:latin typeface="Calibri"/>
-              </a:rPr>
-              <a:t>▸  TF-IDF y LDA tratan palabras como símbolos independientes</a:t>
-            </a:r>
-          </a:p>
-          <a:p>
-            <a:pPr algn="l" marL="0" indent="-228600">
-              <a:buNone/>
-            </a:pPr>
-            <a:r>
-              <a:rPr sz="1900" b="0">
-                <a:solidFill>
-                  <a:srgbClr val="333844"/>
-                </a:solidFill>
-                <a:latin typeface="Calibri"/>
-              </a:rPr>
-              <a:t>▸  En underground el lenguaje es opaco: abreviaciones, leetspeak, eufemismos que cambian semana a semana</a:t>
-            </a:r>
-          </a:p>
-          <a:p>
-            <a:pPr algn="l" marL="0" indent="-228600">
-              <a:buNone/>
-            </a:pPr>
-            <a:r>
-              <a:rPr sz="1900" b="0">
-                <a:solidFill>
-                  <a:srgbClr val="333844"/>
-                </a:solidFill>
-                <a:latin typeface="Calibri"/>
-              </a:rPr>
-              <a:t>▸  Dos posts sobre lo mismo pueden no compartir ni una sola palabra</a:t>
-            </a:r>
-          </a:p>
-          <a:p>
-            <a:pPr algn="l" marL="0" indent="-228600">
-              <a:buNone/>
-            </a:pPr>
-            <a:r>
-              <a:rPr sz="1900" b="0">
-                <a:solidFill>
-                  <a:srgbClr val="333844"/>
-                </a:solidFill>
-                <a:latin typeface="Calibri"/>
-              </a:rPr>
-              <a:t>▸  Un actor que cambia de handle también puede cambiar de vocabulario deliberadamente</a:t>
-            </a:r>
-          </a:p>
-          <a:p>
-            <a:pPr algn="l" marL="0" indent="-228600">
-              <a:buNone/>
-            </a:pPr>
-            <a:r>
-              <a:rPr sz="1900" b="0">
-                <a:solidFill>
-                  <a:srgbClr val="333844"/>
-                </a:solidFill>
-                <a:latin typeface="Calibri"/>
-              </a:rPr>
-              <a:t>▸  Necesitamos representaciones que capturen significado más allá de la frecuencia de tokens</a:t>
+            <a:r>
+              <a:t>TF-IDF y LDA tratan palabras como símbolos independientes</a:t>
+            </a:r>
+          </a:p>
+          <a:p>
+            <a:r>
+              <a:t>En underground el lenguaje es opaco: abreviaciones, leetspeak, eufemismos que cambian semana a semana</a:t>
+            </a:r>
+          </a:p>
+          <a:p>
+            <a:r>
+              <a:t>Dos posts sobre lo mismo pueden no compartir ni una sola palabra</a:t>
+            </a:r>
+          </a:p>
+          <a:p>
+            <a:r>
+              <a:t>Un actor que cambia de handle también puede cambiar de vocabulario deliberadamente</a:t>
+            </a:r>
+          </a:p>
+          <a:p>
+            <a:r>
+              <a:t>Necesitamos representaciones que capturen significado más allá de la frecuencia de tokens</a:t>
             </a:r>
           </a:p>
         </p:txBody>
@@ -7803,34 +7522,31 @@
           <a:bodyPr wrap="square"/>
           <a:lstStyle/>
           <a:p>
+            <a:pPr algn="ctr"/>
             <a:r>
               <a:rPr sz="1300" b="1">
                 <a:solidFill>
-                  <a:srgbClr val="E32B3D"/>
-                </a:solidFill>
-                <a:latin typeface="Calibri"/>
+                  <a:srgbClr val="CD2D37"/>
+                </a:solidFill>
+                <a:latin typeface="Arial"/>
               </a:rPr>
               <a:t>SECCIÓN 2</a:t>
             </a:r>
           </a:p>
           <a:p>
-            <a:r>
-              <a:rPr sz="3000" b="1">
-                <a:solidFill>
-                  <a:srgbClr val="FFFFFF"/>
-                </a:solidFill>
-                <a:latin typeface="Calibri"/>
-              </a:rPr>
+            <a:pPr algn="ctr"/>
+            <a:r>
               <a:t>Embeddings — representaciones densas de significado</a:t>
             </a:r>
           </a:p>
           <a:p>
+            <a:pPr algn="ctr"/>
             <a:r>
               <a:rPr sz="1600">
                 <a:solidFill>
                   <a:srgbClr val="D6DAE2"/>
                 </a:solidFill>
-                <a:latin typeface="Calibri"/>
+                <a:latin typeface="Arial"/>
               </a:rPr>
               <a:t>La geometría del texto</a:t>
             </a:r>
@@ -7871,12 +7587,6 @@
           <a:lstStyle/>
           <a:p>
             <a:r>
-              <a:rPr sz="2400" b="1">
-                <a:solidFill>
-                  <a:srgbClr val="1A1A2E"/>
-                </a:solidFill>
-                <a:latin typeface="Calibri"/>
-              </a:rPr>
               <a:t>¿Qué es un embedding?</a:t>
             </a:r>
           </a:p>
@@ -7897,73 +7607,28 @@
           <a:bodyPr wrap="square"/>
           <a:lstStyle/>
           <a:p>
-            <a:pPr algn="l" marL="0" indent="-228600">
-              <a:buNone/>
-            </a:pPr>
-            <a:r>
-              <a:rPr sz="1900" b="0">
-                <a:solidFill>
-                  <a:srgbClr val="333844"/>
-                </a:solidFill>
-                <a:latin typeface="Calibri"/>
-              </a:rPr>
-              <a:t>▸  Transforma texto en vector numérico donde distancia geométrica = similitud semántica</a:t>
-            </a:r>
-          </a:p>
-          <a:p>
-            <a:pPr algn="l" marL="0" indent="-228600">
-              <a:buNone/>
-            </a:pPr>
-            <a:r>
-              <a:rPr sz="1900" b="0">
-                <a:solidFill>
-                  <a:srgbClr val="333844"/>
-                </a:solidFill>
-                <a:latin typeface="Calibri"/>
-              </a:rPr>
-              <a:t>▸  'rat' y 'trojan' en contexto underground quedan cerca aunque no compartan letras</a:t>
-            </a:r>
-          </a:p>
-          <a:p>
-            <a:pPr algn="l" marL="0" indent="-228600">
-              <a:buNone/>
-            </a:pPr>
-            <a:r>
-              <a:rPr sz="1900" b="0">
-                <a:solidFill>
-                  <a:srgbClr val="333844"/>
-                </a:solidFill>
-                <a:latin typeface="Calibri"/>
-              </a:rPr>
-              <a:t>▸  'password' y 'contraseña' quedan cerca aunque sean idiomas distintos (modelos multilingües)</a:t>
-            </a:r>
-          </a:p>
-          <a:p>
-            <a:pPr algn="l" marL="0" indent="-228600">
-              <a:buNone/>
-            </a:pPr>
-            <a:r>
-              <a:rPr sz="1900" b="0">
-                <a:solidFill>
-                  <a:srgbClr val="333844"/>
-                </a:solidFill>
-                <a:latin typeface="Calibri"/>
-              </a:rPr>
-              <a:t>▸  Permite clustering de usuarios por comportamiento de escritura sin depender del vocabulario exacto</a:t>
-            </a:r>
-          </a:p>
-          <a:p>
-            <a:pPr algn="l" marL="0" indent="-228600">
-              <a:buNone/>
-            </a:pPr>
-            <a:r>
-              <a:rPr sz="1900" b="0">
-                <a:solidFill>
-                  <a:srgbClr val="333844"/>
-                </a:solidFill>
-                <a:latin typeface="Calibri"/>
-              </a:rPr>
-              <a:t>▸  Base de la estilometría computacional: la huella digital del escritor</a:t>
+            <a:r>
+              <a:t>Transforma texto en vector numérico donde distancia geométrica = similitud semántica</a:t>
+            </a:r>
+          </a:p>
+          <a:p>
+            <a:r>
+              <a:t>'rat' y 'trojan' en contexto underground quedan cerca aunque no compartan letras</a:t>
+            </a:r>
+          </a:p>
+          <a:p>
+            <a:r>
+              <a:t>'password' y 'contraseña' quedan cerca aunque sean idiomas distintos (modelos multilingües)</a:t>
+            </a:r>
+          </a:p>
+          <a:p>
+            <a:r>
+              <a:t>Permite clustering de usuarios por comportamiento de escritura sin depender del vocabulario exacto</a:t>
+            </a:r>
+          </a:p>
+          <a:p>
+            <a:r>
+              <a:t>Base de la estilometría computacional: la huella digital del escritor</a:t>
             </a:r>
           </a:p>
         </p:txBody>
@@ -8002,12 +7667,6 @@
           <a:lstStyle/>
           <a:p>
             <a:r>
-              <a:rPr sz="2400" b="1">
-                <a:solidFill>
-                  <a:srgbClr val="1A1A2E"/>
-                </a:solidFill>
-                <a:latin typeface="Calibri"/>
-              </a:rPr>
               <a:t>Modelos de embedding — elección crítica</a:t>
             </a:r>
           </a:p>
@@ -8038,7 +7697,7 @@
         </p:nvSpPr>
         <p:spPr>
           <a:xfrm>
-            <a:off x="1051560" y="1691640"/>
+            <a:off x="1051560" y="2194560"/>
             <a:ext cx="4846320" cy="411480"/>
           </a:xfrm>
           <a:prstGeom prst="rect">
@@ -8056,9 +7715,9 @@
             <a:r>
               <a:rPr sz="1600" b="1">
                 <a:solidFill>
-                  <a:srgbClr val="E32B3D"/>
-                </a:solidFill>
-                <a:latin typeface="Calibri"/>
+                  <a:srgbClr val="CD2D37"/>
+                </a:solidFill>
+                <a:latin typeface="Arial"/>
               </a:rPr>
               <a:t>Modelos monolingües (inglés)</a:t>
             </a:r>
@@ -8073,8 +7732,8 @@
         </p:nvSpPr>
         <p:spPr>
           <a:xfrm>
-            <a:off x="1051560" y="2148840"/>
-            <a:ext cx="4846320" cy="3840480"/>
+            <a:off x="1051560" y="2651760"/>
+            <a:ext cx="4846320" cy="3337560"/>
           </a:xfrm>
           <a:prstGeom prst="rect">
             <a:avLst/>
@@ -8090,9 +7749,9 @@
             <a:r>
               <a:rPr sz="1600">
                 <a:solidFill>
-                  <a:srgbClr val="333844"/>
-                </a:solidFill>
-                <a:latin typeface="Calibri"/>
+                  <a:srgbClr val="465461"/>
+                </a:solidFill>
+                <a:latin typeface="Arial"/>
               </a:rPr>
               <a:t>▸  Mejor rendimiento en inglés puro</a:t>
             </a:r>
@@ -8101,9 +7760,9 @@
             <a:r>
               <a:rPr sz="1600">
                 <a:solidFill>
-                  <a:srgbClr val="333844"/>
-                </a:solidFill>
-                <a:latin typeface="Calibri"/>
+                  <a:srgbClr val="465461"/>
+                </a:solidFill>
+                <a:latin typeface="Arial"/>
               </a:rPr>
               <a:t>▸  Fallan con texto mixto o multilingüe</a:t>
             </a:r>
@@ -8112,9 +7771,9 @@
             <a:r>
               <a:rPr sz="1600">
                 <a:solidFill>
-                  <a:srgbClr val="333844"/>
-                </a:solidFill>
-                <a:latin typeface="Calibri"/>
+                  <a:srgbClr val="465461"/>
+                </a:solidFill>
+                <a:latin typeface="Arial"/>
               </a:rPr>
               <a:t>▸  text-embedding-ada-002, nomic-embed-text</a:t>
             </a:r>
@@ -8123,9 +7782,9 @@
             <a:r>
               <a:rPr sz="1600">
                 <a:solidFill>
-                  <a:srgbClr val="333844"/>
-                </a:solidFill>
-                <a:latin typeface="Calibri"/>
+                  <a:srgbClr val="465461"/>
+                </a:solidFill>
+                <a:latin typeface="Arial"/>
               </a:rPr>
               <a:t>▸  Requieren traducción previa para otros idiomas</a:t>
             </a:r>
@@ -8140,7 +7799,7 @@
         </p:nvSpPr>
         <p:spPr>
           <a:xfrm>
-            <a:off x="6217920" y="1691640"/>
+            <a:off x="6217920" y="2194560"/>
             <a:ext cx="4846320" cy="411480"/>
           </a:xfrm>
           <a:prstGeom prst="rect">
@@ -8158,9 +7817,9 @@
             <a:r>
               <a:rPr sz="1600" b="1">
                 <a:solidFill>
-                  <a:srgbClr val="E32B3D"/>
-                </a:solidFill>
-                <a:latin typeface="Calibri"/>
+                  <a:srgbClr val="CD2D37"/>
+                </a:solidFill>
+                <a:latin typeface="Arial"/>
               </a:rPr>
               <a:t>Modelos multilingües</a:t>
             </a:r>
@@ -8175,8 +7834,8 @@
         </p:nvSpPr>
         <p:spPr>
           <a:xfrm>
-            <a:off x="6217920" y="2148840"/>
-            <a:ext cx="4846320" cy="3840480"/>
+            <a:off x="6217920" y="2651760"/>
+            <a:ext cx="4846320" cy="3337560"/>
           </a:xfrm>
           <a:prstGeom prst="rect">
             <a:avLst/>
@@ -8192,9 +7851,9 @@
             <a:r>
               <a:rPr sz="1600">
                 <a:solidFill>
-                  <a:srgbClr val="333844"/>
-                </a:solidFill>
-                <a:latin typeface="Calibri"/>
+                  <a:srgbClr val="465461"/>
+                </a:solidFill>
+                <a:latin typeface="Arial"/>
               </a:rPr>
               <a:t>▸  Espacio vectorial compartido entre idiomas</a:t>
             </a:r>
@@ -8203,9 +7862,9 @@
             <a:r>
               <a:rPr sz="1600">
                 <a:solidFill>
-                  <a:srgbClr val="333844"/>
-                </a:solidFill>
-                <a:latin typeface="Calibri"/>
+                  <a:srgbClr val="465461"/>
+                </a:solidFill>
+                <a:latin typeface="Arial"/>
               </a:rPr>
               <a:t>▸  Un post en ruso y uno en inglés sobre lo mismo → cercanos</a:t>
             </a:r>
@@ -8214,9 +7873,9 @@
             <a:r>
               <a:rPr sz="1600">
                 <a:solidFill>
-                  <a:srgbClr val="333844"/>
-                </a:solidFill>
-                <a:latin typeface="Calibri"/>
+                  <a:srgbClr val="465461"/>
+                </a:solidFill>
+                <a:latin typeface="Arial"/>
               </a:rPr>
               <a:t>▸  qwen3-embedding (4096D), multilingual-e5</a:t>
             </a:r>
@@ -8225,9 +7884,9 @@
             <a:r>
               <a:rPr sz="1600">
                 <a:solidFill>
-                  <a:srgbClr val="333844"/>
-                </a:solidFill>
-                <a:latin typeface="Calibri"/>
+                  <a:srgbClr val="465461"/>
+                </a:solidFill>
+                <a:latin typeface="Arial"/>
               </a:rPr>
               <a:t>▸  Regla: si hay mezcla de idiomas, siempre multilingüe</a:t>
             </a:r>
@@ -8268,12 +7927,6 @@
           <a:lstStyle/>
           <a:p>
             <a:r>
-              <a:rPr sz="2400" b="1">
-                <a:solidFill>
-                  <a:srgbClr val="1A1A2E"/>
-                </a:solidFill>
-                <a:latin typeface="Calibri"/>
-              </a:rPr>
               <a:t>La regla del idioma original en embeddings</a:t>
             </a:r>
           </a:p>
@@ -8289,78 +7942,38 @@
             <p:ph type="body" idx="16" sz="quarter"/>
           </p:nvPr>
         </p:nvSpPr>
-        <p:spPr/>
+        <p:spPr>
+          <a:xfrm>
+            <a:off x="1073427" y="2077576"/>
+            <a:ext cx="10084904" cy="3507298"/>
+          </a:xfrm>
+        </p:spPr>
         <p:txBody>
           <a:bodyPr wrap="square"/>
           <a:lstStyle/>
           <a:p>
-            <a:pPr algn="l" marL="0" indent="-228600">
-              <a:buNone/>
-            </a:pPr>
-            <a:r>
-              <a:rPr sz="1900" b="0">
-                <a:solidFill>
-                  <a:srgbClr val="333844"/>
-                </a:solidFill>
-                <a:latin typeface="Calibri"/>
-              </a:rPr>
-              <a:t>▸  Para embeddings y estilometría: SIEMPRE trabajar en el idioma original</a:t>
-            </a:r>
-          </a:p>
-          <a:p>
-            <a:pPr algn="l" marL="0" indent="-228600">
-              <a:buNone/>
-            </a:pPr>
-            <a:r>
-              <a:rPr sz="1900" b="0">
-                <a:solidFill>
-                  <a:srgbClr val="333844"/>
-                </a:solidFill>
-                <a:latin typeface="Calibri"/>
-              </a:rPr>
-              <a:t>▸  Traducir antes de embedear destruye la huella lingüística del autor</a:t>
-            </a:r>
-          </a:p>
-          <a:p>
-            <a:pPr algn="l" marL="0" indent="-228600">
-              <a:buNone/>
-            </a:pPr>
-            <a:r>
-              <a:rPr sz="1900" b="0">
-                <a:solidFill>
-                  <a:srgbClr val="333844"/>
-                </a:solidFill>
-                <a:latin typeface="Calibri"/>
-              </a:rPr>
-              <a:t>▸  La huella es precisamente lo que queremos preservar para atribución de autoría</a:t>
-            </a:r>
-          </a:p>
-          <a:p>
-            <a:pPr algn="l" marL="0" indent="-228600">
-              <a:buNone/>
-            </a:pPr>
-            <a:r>
-              <a:rPr sz="1900" b="0">
-                <a:solidFill>
-                  <a:srgbClr val="333844"/>
-                </a:solidFill>
-                <a:latin typeface="Calibri"/>
-              </a:rPr>
-              <a:t>▸  Un actor que escribe en ruso con ciertos tics sintácticos → esos tics desaparecen al traducir</a:t>
-            </a:r>
-          </a:p>
-          <a:p>
-            <a:pPr algn="l" marL="0" indent="-228600">
-              <a:buNone/>
-            </a:pPr>
-            <a:r>
-              <a:rPr sz="1900" b="0">
-                <a:solidFill>
-                  <a:srgbClr val="333844"/>
-                </a:solidFill>
-                <a:latin typeface="Calibri"/>
-              </a:rPr>
-              <a:t>▸  Contraste con NER/topic modeling: ahí la traducción puede mejorar resultados (ver siguiente sección)</a:t>
+            <a:r>
+              <a:t>Para embeddings y estilometría: SIEMPRE trabajar en el idioma original</a:t>
+            </a:r>
+          </a:p>
+          <a:p>
+            <a:r>
+              <a:t>Traducir antes de embedear destruye la huella lingüística del autor</a:t>
+            </a:r>
+          </a:p>
+          <a:p>
+            <a:r>
+              <a:t>La huella es precisamente lo que queremos preservar para atribución de autoría</a:t>
+            </a:r>
+          </a:p>
+          <a:p>
+            <a:r>
+              <a:t>Un actor que escribe en ruso con ciertos tics sintácticos → esos tics desaparecen al traducir</a:t>
+            </a:r>
+          </a:p>
+          <a:p>
+            <a:r>
+              <a:t>Contraste con NER/topic modeling: ahí la traducción puede mejorar resultados (ver siguiente sección)</a:t>
             </a:r>
           </a:p>
         </p:txBody>
@@ -8399,12 +8012,6 @@
           <a:lstStyle/>
           <a:p>
             <a:r>
-              <a:rPr sz="2400" b="1">
-                <a:solidFill>
-                  <a:srgbClr val="1A1A2E"/>
-                </a:solidFill>
-                <a:latin typeface="Calibri"/>
-              </a:rPr>
               <a:t>¿Cuántos posts embedear por usuario? — comparativa de estrategias</a:t>
             </a:r>
           </a:p>
@@ -8435,14 +8042,14 @@
         </p:nvSpPr>
         <p:spPr>
           <a:xfrm>
-            <a:off x="1051560" y="1645920"/>
+            <a:off x="1051560" y="2651760"/>
             <a:ext cx="10058400" cy="365760"/>
           </a:xfrm>
           <a:prstGeom prst="rect">
             <a:avLst/>
           </a:prstGeom>
           <a:solidFill>
-            <a:srgbClr val="E32B3D"/>
+            <a:srgbClr val="CD2D37"/>
           </a:solidFill>
           <a:ln>
             <a:noFill/>
@@ -8478,7 +8085,7 @@
         </p:nvSpPr>
         <p:spPr>
           <a:xfrm>
-            <a:off x="1097280" y="1700920"/>
+            <a:off x="1097280" y="2706760"/>
             <a:ext cx="1920240" cy="365760"/>
           </a:xfrm>
           <a:prstGeom prst="rect">
@@ -8498,7 +8105,7 @@
                 <a:solidFill>
                   <a:srgbClr val="FFFFFF"/>
                 </a:solidFill>
-                <a:latin typeface="Calibri"/>
+                <a:latin typeface="Arial"/>
               </a:rPr>
               <a:t>Estrategia</a:t>
             </a:r>
@@ -8513,7 +8120,7 @@
         </p:nvSpPr>
         <p:spPr>
           <a:xfrm>
-            <a:off x="3108960" y="1700920"/>
+            <a:off x="3108960" y="2706760"/>
             <a:ext cx="1920240" cy="365760"/>
           </a:xfrm>
           <a:prstGeom prst="rect">
@@ -8533,7 +8140,7 @@
                 <a:solidFill>
                   <a:srgbClr val="FFFFFF"/>
                 </a:solidFill>
-                <a:latin typeface="Calibri"/>
+                <a:latin typeface="Arial"/>
               </a:rPr>
               <a:t>Posts por usuario</a:t>
             </a:r>
@@ -8548,7 +8155,7 @@
         </p:nvSpPr>
         <p:spPr>
           <a:xfrm>
-            <a:off x="5120640" y="1700920"/>
+            <a:off x="5120640" y="2706760"/>
             <a:ext cx="1920240" cy="365760"/>
           </a:xfrm>
           <a:prstGeom prst="rect">
@@ -8568,7 +8175,7 @@
                 <a:solidFill>
                   <a:srgbClr val="FFFFFF"/>
                 </a:solidFill>
-                <a:latin typeface="Calibri"/>
+                <a:latin typeface="Arial"/>
               </a:rPr>
               <a:t>GPU (IronMarch)</a:t>
             </a:r>
@@ -8583,7 +8190,7 @@
         </p:nvSpPr>
         <p:spPr>
           <a:xfrm>
-            <a:off x="7132320" y="1700920"/>
+            <a:off x="7132320" y="2706760"/>
             <a:ext cx="1920240" cy="365760"/>
           </a:xfrm>
           <a:prstGeom prst="rect">
@@ -8603,7 +8210,7 @@
                 <a:solidFill>
                   <a:srgbClr val="FFFFFF"/>
                 </a:solidFill>
-                <a:latin typeface="Calibri"/>
+                <a:latin typeface="Arial"/>
               </a:rPr>
               <a:t>Spearman ρ vs. full</a:t>
             </a:r>
@@ -8618,7 +8225,7 @@
         </p:nvSpPr>
         <p:spPr>
           <a:xfrm>
-            <a:off x="9144000" y="1700920"/>
+            <a:off x="9144000" y="2706760"/>
             <a:ext cx="1920240" cy="365760"/>
           </a:xfrm>
           <a:prstGeom prst="rect">
@@ -8638,7 +8245,7 @@
                 <a:solidFill>
                   <a:srgbClr val="FFFFFF"/>
                 </a:solidFill>
-                <a:latin typeface="Calibri"/>
+                <a:latin typeface="Arial"/>
               </a:rPr>
               <a:t>Cuándo usarla</a:t>
             </a:r>
@@ -8653,7 +8260,7 @@
         </p:nvSpPr>
         <p:spPr>
           <a:xfrm>
-            <a:off x="1051560" y="2011680"/>
+            <a:off x="1051560" y="3017520"/>
             <a:ext cx="10058400" cy="615315"/>
           </a:xfrm>
           <a:prstGeom prst="rect">
@@ -8696,7 +8303,7 @@
         </p:nvSpPr>
         <p:spPr>
           <a:xfrm>
-            <a:off x="1097280" y="2051680"/>
+            <a:off x="1097280" y="3057520"/>
             <a:ext cx="1920240" cy="615315"/>
           </a:xfrm>
           <a:prstGeom prst="rect">
@@ -8714,9 +8321,9 @@
             <a:r>
               <a:rPr sz="1100" b="0">
                 <a:solidFill>
-                  <a:srgbClr val="333844"/>
-                </a:solidFill>
-                <a:latin typeface="Calibri"/>
+                  <a:srgbClr val="465461"/>
+                </a:solidFill>
+                <a:latin typeface="Arial"/>
               </a:rPr>
               <a:t>A — concat todo</a:t>
             </a:r>
@@ -8731,7 +8338,7 @@
         </p:nvSpPr>
         <p:spPr>
           <a:xfrm>
-            <a:off x="3108960" y="2051680"/>
+            <a:off x="3108960" y="3057520"/>
             <a:ext cx="1920240" cy="615315"/>
           </a:xfrm>
           <a:prstGeom prst="rect">
@@ -8749,9 +8356,9 @@
             <a:r>
               <a:rPr sz="1100" b="0">
                 <a:solidFill>
-                  <a:srgbClr val="333844"/>
-                </a:solidFill>
-                <a:latin typeface="Calibri"/>
+                  <a:srgbClr val="465461"/>
+                </a:solidFill>
+                <a:latin typeface="Arial"/>
               </a:rPr>
               <a:t>todos (máx. 50K chars)</a:t>
             </a:r>
@@ -8766,7 +8373,7 @@
         </p:nvSpPr>
         <p:spPr>
           <a:xfrm>
-            <a:off x="5120640" y="2051680"/>
+            <a:off x="5120640" y="3057520"/>
             <a:ext cx="1920240" cy="615315"/>
           </a:xfrm>
           <a:prstGeom prst="rect">
@@ -8784,9 +8391,9 @@
             <a:r>
               <a:rPr sz="1100" b="0">
                 <a:solidFill>
-                  <a:srgbClr val="333844"/>
-                </a:solidFill>
-                <a:latin typeface="Calibri"/>
+                  <a:srgbClr val="465461"/>
+                </a:solidFill>
+                <a:latin typeface="Arial"/>
               </a:rPr>
               <a:t>~12 min</a:t>
             </a:r>
@@ -8801,7 +8408,7 @@
         </p:nvSpPr>
         <p:spPr>
           <a:xfrm>
-            <a:off x="7132320" y="2051680"/>
+            <a:off x="7132320" y="3057520"/>
             <a:ext cx="1920240" cy="615315"/>
           </a:xfrm>
           <a:prstGeom prst="rect">
@@ -8819,9 +8426,9 @@
             <a:r>
               <a:rPr sz="1100" b="0">
                 <a:solidFill>
-                  <a:srgbClr val="333844"/>
-                </a:solidFill>
-                <a:latin typeface="Calibri"/>
+                  <a:srgbClr val="465461"/>
+                </a:solidFill>
+                <a:latin typeface="Arial"/>
               </a:rPr>
               <a:t>—</a:t>
             </a:r>
@@ -8836,7 +8443,7 @@
         </p:nvSpPr>
         <p:spPr>
           <a:xfrm>
-            <a:off x="9144000" y="2051680"/>
+            <a:off x="9144000" y="3057520"/>
             <a:ext cx="1920240" cy="615315"/>
           </a:xfrm>
           <a:prstGeom prst="rect">
@@ -8854,9 +8461,9 @@
             <a:r>
               <a:rPr sz="1100" b="0">
                 <a:solidFill>
-                  <a:srgbClr val="333844"/>
-                </a:solidFill>
-                <a:latin typeface="Calibri"/>
+                  <a:srgbClr val="465461"/>
+                </a:solidFill>
+                <a:latin typeface="Arial"/>
               </a:rPr>
               <a:t>Dataset pequeño o usuarios con pocos posts</a:t>
             </a:r>
@@ -8871,7 +8478,7 @@
         </p:nvSpPr>
         <p:spPr>
           <a:xfrm>
-            <a:off x="1051560" y="2626995"/>
+            <a:off x="1051560" y="3632835"/>
             <a:ext cx="10058400" cy="615315"/>
           </a:xfrm>
           <a:prstGeom prst="rect">
@@ -8914,7 +8521,7 @@
         </p:nvSpPr>
         <p:spPr>
           <a:xfrm>
-            <a:off x="1097280" y="2666995"/>
+            <a:off x="1097280" y="3672835"/>
             <a:ext cx="1920240" cy="615315"/>
           </a:xfrm>
           <a:prstGeom prst="rect">
@@ -8932,9 +8539,9 @@
             <a:r>
               <a:rPr sz="1100" b="0">
                 <a:solidFill>
-                  <a:srgbClr val="333844"/>
-                </a:solidFill>
-                <a:latin typeface="Calibri"/>
+                  <a:srgbClr val="465461"/>
+                </a:solidFill>
+                <a:latin typeface="Arial"/>
               </a:rPr>
               <a:t>B — full centroid</a:t>
             </a:r>
@@ -8949,7 +8556,7 @@
         </p:nvSpPr>
         <p:spPr>
           <a:xfrm>
-            <a:off x="3108960" y="2666995"/>
+            <a:off x="3108960" y="3672835"/>
             <a:ext cx="1920240" cy="615315"/>
           </a:xfrm>
           <a:prstGeom prst="rect">
@@ -8967,9 +8574,9 @@
             <a:r>
               <a:rPr sz="1100" b="0">
                 <a:solidFill>
-                  <a:srgbClr val="333844"/>
-                </a:solidFill>
-                <a:latin typeface="Calibri"/>
+                  <a:srgbClr val="465461"/>
+                </a:solidFill>
+                <a:latin typeface="Arial"/>
               </a:rPr>
               <a:t>todos</a:t>
             </a:r>
@@ -8984,7 +8591,7 @@
         </p:nvSpPr>
         <p:spPr>
           <a:xfrm>
-            <a:off x="5120640" y="2666995"/>
+            <a:off x="5120640" y="3672835"/>
             <a:ext cx="1920240" cy="615315"/>
           </a:xfrm>
           <a:prstGeom prst="rect">
@@ -9002,9 +8609,9 @@
             <a:r>
               <a:rPr sz="1100" b="0">
                 <a:solidFill>
-                  <a:srgbClr val="333844"/>
-                </a:solidFill>
-                <a:latin typeface="Calibri"/>
+                  <a:srgbClr val="465461"/>
+                </a:solidFill>
+                <a:latin typeface="Arial"/>
               </a:rPr>
               <a:t>~9 h</a:t>
             </a:r>
@@ -9019,7 +8626,7 @@
         </p:nvSpPr>
         <p:spPr>
           <a:xfrm>
-            <a:off x="7132320" y="2666995"/>
+            <a:off x="7132320" y="3672835"/>
             <a:ext cx="1920240" cy="615315"/>
           </a:xfrm>
           <a:prstGeom prst="rect">
@@ -9037,9 +8644,9 @@
             <a:r>
               <a:rPr sz="1100" b="0">
                 <a:solidFill>
-                  <a:srgbClr val="333844"/>
-                </a:solidFill>
-                <a:latin typeface="Calibri"/>
+                  <a:srgbClr val="465461"/>
+                </a:solidFill>
+                <a:latin typeface="Arial"/>
               </a:rPr>
               <a:t>1.000</a:t>
             </a:r>
@@ -9054,7 +8661,7 @@
         </p:nvSpPr>
         <p:spPr>
           <a:xfrm>
-            <a:off x="9144000" y="2666995"/>
+            <a:off x="9144000" y="3672835"/>
             <a:ext cx="1920240" cy="615315"/>
           </a:xfrm>
           <a:prstGeom prst="rect">
@@ -9072,9 +8679,9 @@
             <a:r>
               <a:rPr sz="1100" b="0">
                 <a:solidFill>
-                  <a:srgbClr val="333844"/>
-                </a:solidFill>
-                <a:latin typeface="Calibri"/>
+                  <a:srgbClr val="465461"/>
+                </a:solidFill>
+                <a:latin typeface="Arial"/>
               </a:rPr>
               <a:t>Solo como referencia — inviable en producción</a:t>
             </a:r>
@@ -9089,7 +8696,7 @@
         </p:nvSpPr>
         <p:spPr>
           <a:xfrm>
-            <a:off x="1051560" y="3242310"/>
+            <a:off x="1051560" y="4248150"/>
             <a:ext cx="10058400" cy="615315"/>
           </a:xfrm>
           <a:prstGeom prst="rect">
@@ -9132,7 +8739,7 @@
         </p:nvSpPr>
         <p:spPr>
           <a:xfrm>
-            <a:off x="1097280" y="3282310"/>
+            <a:off x="1097280" y="4288150"/>
             <a:ext cx="1920240" cy="615315"/>
           </a:xfrm>
           <a:prstGeom prst="rect">
@@ -9150,9 +8757,9 @@
             <a:r>
               <a:rPr sz="1100" b="0">
                 <a:solidFill>
-                  <a:srgbClr val="333844"/>
-                </a:solidFill>
-                <a:latin typeface="Calibri"/>
+                  <a:srgbClr val="465461"/>
+                </a:solidFill>
+                <a:latin typeface="Arial"/>
               </a:rPr>
               <a:t>C — top-50</a:t>
             </a:r>
@@ -9167,7 +8774,7 @@
         </p:nvSpPr>
         <p:spPr>
           <a:xfrm>
-            <a:off x="3108960" y="3282310"/>
+            <a:off x="3108960" y="4288150"/>
             <a:ext cx="1920240" cy="615315"/>
           </a:xfrm>
           <a:prstGeom prst="rect">
@@ -9185,9 +8792,9 @@
             <a:r>
               <a:rPr sz="1100" b="0">
                 <a:solidFill>
-                  <a:srgbClr val="333844"/>
-                </a:solidFill>
-                <a:latin typeface="Calibri"/>
+                  <a:srgbClr val="465461"/>
+                </a:solidFill>
+                <a:latin typeface="Arial"/>
               </a:rPr>
               <a:t>50 más largos</a:t>
             </a:r>
@@ -9202,7 +8809,7 @@
         </p:nvSpPr>
         <p:spPr>
           <a:xfrm>
-            <a:off x="5120640" y="3282310"/>
+            <a:off x="5120640" y="4288150"/>
             <a:ext cx="1920240" cy="615315"/>
           </a:xfrm>
           <a:prstGeom prst="rect">
@@ -9220,9 +8827,9 @@
             <a:r>
               <a:rPr sz="1100" b="0">
                 <a:solidFill>
-                  <a:srgbClr val="333844"/>
-                </a:solidFill>
-                <a:latin typeface="Calibri"/>
+                  <a:srgbClr val="465461"/>
+                </a:solidFill>
+                <a:latin typeface="Arial"/>
               </a:rPr>
               <a:t>2h 35min</a:t>
             </a:r>
@@ -9237,7 +8844,7 @@
         </p:nvSpPr>
         <p:spPr>
           <a:xfrm>
-            <a:off x="7132320" y="3282310"/>
+            <a:off x="7132320" y="4288150"/>
             <a:ext cx="1920240" cy="615315"/>
           </a:xfrm>
           <a:prstGeom prst="rect">
@@ -9255,9 +8862,9 @@
             <a:r>
               <a:rPr sz="1100" b="0">
                 <a:solidFill>
-                  <a:srgbClr val="333844"/>
-                </a:solidFill>
-                <a:latin typeface="Calibri"/>
+                  <a:srgbClr val="465461"/>
+                </a:solidFill>
+                <a:latin typeface="Arial"/>
               </a:rPr>
               <a:t>0.799</a:t>
             </a:r>
@@ -9272,7 +8879,7 @@
         </p:nvSpPr>
         <p:spPr>
           <a:xfrm>
-            <a:off x="9144000" y="3282310"/>
+            <a:off x="9144000" y="4288150"/>
             <a:ext cx="1920240" cy="615315"/>
           </a:xfrm>
           <a:prstGeom prst="rect">
@@ -9290,9 +8897,9 @@
             <a:r>
               <a:rPr sz="1100" b="0">
                 <a:solidFill>
-                  <a:srgbClr val="333844"/>
-                </a:solidFill>
-                <a:latin typeface="Calibri"/>
+                  <a:srgbClr val="465461"/>
+                </a:solidFill>
+                <a:latin typeface="Arial"/>
               </a:rPr>
               <a:t>GPU limitada o usuarios con &lt;100 posts típicos</a:t>
             </a:r>
@@ -9307,7 +8914,7 @@
         </p:nvSpPr>
         <p:spPr>
           <a:xfrm>
-            <a:off x="1051560" y="3857625"/>
+            <a:off x="1051560" y="4863465"/>
             <a:ext cx="10058400" cy="615315"/>
           </a:xfrm>
           <a:prstGeom prst="rect">
@@ -9350,7 +8957,7 @@
         </p:nvSpPr>
         <p:spPr>
           <a:xfrm>
-            <a:off x="1097280" y="3897625"/>
+            <a:off x="1097280" y="4903465"/>
             <a:ext cx="1920240" cy="615315"/>
           </a:xfrm>
           <a:prstGeom prst="rect">
@@ -9368,9 +8975,9 @@
             <a:r>
               <a:rPr sz="1100" b="0">
                 <a:solidFill>
-                  <a:srgbClr val="333844"/>
-                </a:solidFill>
-                <a:latin typeface="Calibri"/>
+                  <a:srgbClr val="465461"/>
+                </a:solidFill>
+                <a:latin typeface="Arial"/>
               </a:rPr>
               <a:t>D — top-100</a:t>
             </a:r>
@@ -9385,7 +8992,7 @@
         </p:nvSpPr>
         <p:spPr>
           <a:xfrm>
-            <a:off x="3108960" y="3897625"/>
+            <a:off x="3108960" y="4903465"/>
             <a:ext cx="1920240" cy="615315"/>
           </a:xfrm>
           <a:prstGeom prst="rect">
@@ -9403,9 +9010,9 @@
             <a:r>
               <a:rPr sz="1100" b="0">
                 <a:solidFill>
-                  <a:srgbClr val="333844"/>
-                </a:solidFill>
-                <a:latin typeface="Calibri"/>
+                  <a:srgbClr val="465461"/>
+                </a:solidFill>
+                <a:latin typeface="Arial"/>
               </a:rPr>
               <a:t>100 más largos</a:t>
             </a:r>
@@ -9420,7 +9027,7 @@
         </p:nvSpPr>
         <p:spPr>
           <a:xfrm>
-            <a:off x="5120640" y="3897625"/>
+            <a:off x="5120640" y="4903465"/>
             <a:ext cx="1920240" cy="615315"/>
           </a:xfrm>
           <a:prstGeom prst="rect">
@@ -9438,9 +9045,9 @@
             <a:r>
               <a:rPr sz="1100" b="0">
                 <a:solidFill>
-                  <a:srgbClr val="333844"/>
-                </a:solidFill>
-                <a:latin typeface="Calibri"/>
+                  <a:srgbClr val="465461"/>
+                </a:solidFill>
+                <a:latin typeface="Arial"/>
               </a:rPr>
               <a:t>3h 33min</a:t>
             </a:r>
@@ -9455,7 +9062,7 @@
         </p:nvSpPr>
         <p:spPr>
           <a:xfrm>
-            <a:off x="7132320" y="3897625"/>
+            <a:off x="7132320" y="4903465"/>
             <a:ext cx="1920240" cy="615315"/>
           </a:xfrm>
           <a:prstGeom prst="rect">
@@ -9473,9 +9080,9 @@
             <a:r>
               <a:rPr sz="1100" b="0">
                 <a:solidFill>
-                  <a:srgbClr val="333844"/>
-                </a:solidFill>
-                <a:latin typeface="Calibri"/>
+                  <a:srgbClr val="465461"/>
+                </a:solidFill>
+                <a:latin typeface="Arial"/>
               </a:rPr>
               <a:t>0.860</a:t>
             </a:r>
@@ -9490,7 +9097,7 @@
         </p:nvSpPr>
         <p:spPr>
           <a:xfrm>
-            <a:off x="9144000" y="3897625"/>
+            <a:off x="9144000" y="4903465"/>
             <a:ext cx="1920240" cy="615315"/>
           </a:xfrm>
           <a:prstGeom prst="rect">
@@ -9508,9 +9115,9 @@
             <a:r>
               <a:rPr sz="1100" b="0">
                 <a:solidFill>
-                  <a:srgbClr val="333844"/>
-                </a:solidFill>
-                <a:latin typeface="Calibri"/>
+                  <a:srgbClr val="465461"/>
+                </a:solidFill>
+                <a:latin typeface="Arial"/>
               </a:rPr>
               <a:t>Caso general — mejor ratio fidelidad/coste</a:t>
             </a:r>
@@ -9525,7 +9132,7 @@
         </p:nvSpPr>
         <p:spPr>
           <a:xfrm>
-            <a:off x="1051560" y="4472940"/>
+            <a:off x="1051560" y="5478780"/>
             <a:ext cx="10058400" cy="615315"/>
           </a:xfrm>
           <a:prstGeom prst="rect">
@@ -9568,7 +9175,7 @@
         </p:nvSpPr>
         <p:spPr>
           <a:xfrm>
-            <a:off x="1097280" y="4512940"/>
+            <a:off x="1097280" y="5518780"/>
             <a:ext cx="1920240" cy="615315"/>
           </a:xfrm>
           <a:prstGeom prst="rect">
@@ -9586,9 +9193,9 @@
             <a:r>
               <a:rPr sz="1100" b="0">
                 <a:solidFill>
-                  <a:srgbClr val="333844"/>
-                </a:solidFill>
-                <a:latin typeface="Calibri"/>
+                  <a:srgbClr val="465461"/>
+                </a:solidFill>
+                <a:latin typeface="Arial"/>
               </a:rPr>
               <a:t>E — top-150</a:t>
             </a:r>
@@ -9603,7 +9210,7 @@
         </p:nvSpPr>
         <p:spPr>
           <a:xfrm>
-            <a:off x="3108960" y="4512940"/>
+            <a:off x="3108960" y="5518780"/>
             <a:ext cx="1920240" cy="615315"/>
           </a:xfrm>
           <a:prstGeom prst="rect">
@@ -9621,9 +9228,9 @@
             <a:r>
               <a:rPr sz="1100" b="0">
                 <a:solidFill>
-                  <a:srgbClr val="333844"/>
-                </a:solidFill>
-                <a:latin typeface="Calibri"/>
+                  <a:srgbClr val="465461"/>
+                </a:solidFill>
+                <a:latin typeface="Arial"/>
               </a:rPr>
               <a:t>150 más largos</a:t>
             </a:r>
@@ -9638,7 +9245,7 @@
         </p:nvSpPr>
         <p:spPr>
           <a:xfrm>
-            <a:off x="5120640" y="4512940"/>
+            <a:off x="5120640" y="5518780"/>
             <a:ext cx="1920240" cy="615315"/>
           </a:xfrm>
           <a:prstGeom prst="rect">
@@ -9656,9 +9263,9 @@
             <a:r>
               <a:rPr sz="1100" b="0">
                 <a:solidFill>
-                  <a:srgbClr val="333844"/>
-                </a:solidFill>
-                <a:latin typeface="Calibri"/>
+                  <a:srgbClr val="465461"/>
+                </a:solidFill>
+                <a:latin typeface="Arial"/>
               </a:rPr>
               <a:t>4h 12min</a:t>
             </a:r>
@@ -9673,7 +9280,7 @@
         </p:nvSpPr>
         <p:spPr>
           <a:xfrm>
-            <a:off x="7132320" y="4512940"/>
+            <a:off x="7132320" y="5518780"/>
             <a:ext cx="1920240" cy="615315"/>
           </a:xfrm>
           <a:prstGeom prst="rect">
@@ -9691,9 +9298,9 @@
             <a:r>
               <a:rPr sz="1100" b="0">
                 <a:solidFill>
-                  <a:srgbClr val="333844"/>
-                </a:solidFill>
-                <a:latin typeface="Calibri"/>
+                  <a:srgbClr val="465461"/>
+                </a:solidFill>
+                <a:latin typeface="Arial"/>
               </a:rPr>
               <a:t>0.896</a:t>
             </a:r>
@@ -9708,7 +9315,7 @@
         </p:nvSpPr>
         <p:spPr>
           <a:xfrm>
-            <a:off x="9144000" y="4512940"/>
+            <a:off x="9144000" y="5518780"/>
             <a:ext cx="1920240" cy="615315"/>
           </a:xfrm>
           <a:prstGeom prst="rect">
@@ -9726,9 +9333,9 @@
             <a:r>
               <a:rPr sz="1100" b="0">
                 <a:solidFill>
-                  <a:srgbClr val="333844"/>
-                </a:solidFill>
-                <a:latin typeface="Calibri"/>
+                  <a:srgbClr val="465461"/>
+                </a:solidFill>
+                <a:latin typeface="Arial"/>
               </a:rPr>
               <a:t>Máxima fidelidad con presupuesto de tiempo</a:t>
             </a:r>
@@ -9743,7 +9350,7 @@
         </p:nvSpPr>
         <p:spPr>
           <a:xfrm>
-            <a:off x="1051560" y="5760720"/>
+            <a:off x="1051560" y="6231255"/>
             <a:ext cx="10058400" cy="320040"/>
           </a:xfrm>
           <a:prstGeom prst="rect">
@@ -9763,7 +9370,7 @@
                 <a:solidFill>
                   <a:srgbClr val="707888"/>
                 </a:solidFill>
-                <a:latin typeface="Calibri"/>
+                <a:latin typeface="Arial"/>
               </a:rPr>
               <a:t>ℹ  Regla práctica: mirar el percentil 90 de posts/usuario. Si P90 &lt; 50 → C=D=E (no hay suficientes posts). Si P90 &gt; 100 → D es el punto óptimo.</a:t>
             </a:r>
@@ -9804,12 +9411,6 @@
           <a:lstStyle/>
           <a:p>
             <a:r>
-              <a:rPr sz="2400" b="1">
-                <a:solidFill>
-                  <a:srgbClr val="1A1A2E"/>
-                </a:solidFill>
-                <a:latin typeface="Calibri"/>
-              </a:rPr>
               <a:t>¿Cuándo NO usar D?</a:t>
             </a:r>
           </a:p>
@@ -9830,73 +9431,28 @@
           <a:bodyPr wrap="square"/>
           <a:lstStyle/>
           <a:p>
-            <a:pPr algn="l" marL="0" indent="-228600">
-              <a:buNone/>
-            </a:pPr>
-            <a:r>
-              <a:rPr sz="1900" b="0">
-                <a:solidFill>
-                  <a:srgbClr val="333844"/>
-                </a:solidFill>
-                <a:latin typeface="Calibri"/>
-              </a:rPr>
-              <a:t>▸  Usuarios con pocos posts: si el 90% tiene menos de 50 posts → C, D y E dan el mismo resultado</a:t>
-            </a:r>
-          </a:p>
-          <a:p>
-            <a:pPr algn="l" marL="0" indent="-228600">
-              <a:buNone/>
-            </a:pPr>
-            <a:r>
-              <a:rPr sz="1900" b="0">
-                <a:solidFill>
-                  <a:srgbClr val="333844"/>
-                </a:solidFill>
-                <a:latin typeface="Calibri"/>
-              </a:rPr>
-              <a:t>▸  Dataset muy grande (&gt;50K usuarios): C puede ser suficiente para reducir coste de GPU a la mitad</a:t>
-            </a:r>
-          </a:p>
-          <a:p>
-            <a:pPr algn="l" marL="0" indent="-228600">
-              <a:buNone/>
-            </a:pPr>
-            <a:r>
-              <a:rPr sz="1900" b="0">
-                <a:solidFill>
-                  <a:srgbClr val="333844"/>
-                </a:solidFill>
-                <a:latin typeface="Calibri"/>
-              </a:rPr>
-              <a:t>▸  Exploración rápida: A (concat truncado) es el más rápido y sin muestreo — bueno para iterar</a:t>
-            </a:r>
-          </a:p>
-          <a:p>
-            <a:pPr algn="l" marL="0" indent="-228600">
-              <a:buNone/>
-            </a:pPr>
-            <a:r>
-              <a:rPr sz="1900" b="0">
-                <a:solidFill>
-                  <a:srgbClr val="333844"/>
-                </a:solidFill>
-                <a:latin typeface="Calibri"/>
-              </a:rPr>
-              <a:t>▸  Corpus muy corto por usuario (tweets, mensajes de chat): A es mejor porque hay poco que muestrear</a:t>
-            </a:r>
-          </a:p>
-          <a:p>
-            <a:pPr algn="l" marL="0" indent="-228600">
-              <a:buNone/>
-            </a:pPr>
-            <a:r>
-              <a:rPr sz="1900" b="0">
-                <a:solidFill>
-                  <a:srgbClr val="333844"/>
-                </a:solidFill>
-                <a:latin typeface="Calibri"/>
-              </a:rPr>
-              <a:t>▸  Regla: siempre revisar la distribución de posts/usuario ANTES de elegir estrategia (notebook 00)</a:t>
+            <a:r>
+              <a:t>Usuarios con pocos posts: si el 90% tiene menos de 50 posts → C, D y E dan el mismo resultado</a:t>
+            </a:r>
+          </a:p>
+          <a:p>
+            <a:r>
+              <a:t>Dataset muy grande (&gt;50K usuarios): C puede ser suficiente para reducir coste de GPU a la mitad</a:t>
+            </a:r>
+          </a:p>
+          <a:p>
+            <a:r>
+              <a:t>Exploración rápida: A (concat truncado) es el más rápido y sin muestreo — bueno para iterar</a:t>
+            </a:r>
+          </a:p>
+          <a:p>
+            <a:r>
+              <a:t>Corpus muy corto por usuario (tweets, mensajes de chat): A es mejor porque hay poco que muestrear</a:t>
+            </a:r>
+          </a:p>
+          <a:p>
+            <a:r>
+              <a:t>Regla: siempre revisar la distribución de posts/usuario ANTES de elegir estrategia (notebook 00)</a:t>
             </a:r>
           </a:p>
         </p:txBody>

--- a/bloque2_ia/csbc26_b2_ia.pptx
+++ b/bloque2_ia/csbc26_b2_ia.pptx
@@ -6039,921 +6039,484 @@
           <a:p/>
         </p:txBody>
       </p:sp>
-      <p:sp>
-        <p:nvSpPr>
-          <p:cNvPr id="4" name="Rectangle 3"/>
-          <p:cNvSpPr/>
+      <p:graphicFrame>
+        <p:nvGraphicFramePr>
+          <p:cNvPr id="4" name="Table 3"/>
+          <p:cNvGraphicFramePr>
+            <a:graphicFrameLocks noGrp="1"/>
+          </p:cNvGraphicFramePr>
           <p:nvPr/>
-        </p:nvSpPr>
-        <p:spPr>
-          <a:xfrm>
-            <a:off x="1051560" y="2651760"/>
-            <a:ext cx="10058400" cy="365760"/>
-          </a:xfrm>
-          <a:prstGeom prst="rect">
-            <a:avLst/>
-          </a:prstGeom>
-          <a:solidFill>
-            <a:srgbClr val="CD2D37"/>
-          </a:solidFill>
-          <a:ln>
-            <a:noFill/>
-          </a:ln>
-        </p:spPr>
-        <p:style>
-          <a:lnRef idx="1">
-            <a:schemeClr val="accent1"/>
-          </a:lnRef>
-          <a:fillRef idx="3">
-            <a:schemeClr val="accent1"/>
-          </a:fillRef>
-          <a:effectRef idx="2">
-            <a:schemeClr val="accent1"/>
-          </a:effectRef>
-          <a:fontRef idx="minor">
-            <a:schemeClr val="lt1"/>
-          </a:fontRef>
-        </p:style>
-        <p:txBody>
-          <a:bodyPr rtlCol="0" anchor="ctr"/>
-          <a:lstStyle/>
-          <a:p>
-            <a:pPr algn="ctr"/>
-          </a:p>
-        </p:txBody>
-      </p:sp>
-      <p:sp>
-        <p:nvSpPr>
-          <p:cNvPr id="5" name="TextBox 4"/>
-          <p:cNvSpPr txBox="1"/>
-          <p:nvPr/>
-        </p:nvSpPr>
-        <p:spPr>
-          <a:xfrm>
-            <a:off x="1097280" y="2706760"/>
-            <a:ext cx="2423160" cy="365760"/>
-          </a:xfrm>
-          <a:prstGeom prst="rect">
-            <a:avLst/>
-          </a:prstGeom>
-          <a:noFill/>
-        </p:spPr>
-        <p:txBody>
-          <a:bodyPr wrap="square">
-            <a:spAutoFit/>
-          </a:bodyPr>
-          <a:lstStyle/>
-          <a:p>
-            <a:pPr algn="l"/>
-            <a:r>
-              <a:rPr sz="1200" b="1">
-                <a:solidFill>
-                  <a:srgbClr val="FFFFFF"/>
-                </a:solidFill>
-                <a:latin typeface="Arial"/>
-              </a:rPr>
-              <a:t>Técnica</a:t>
-            </a:r>
-          </a:p>
-        </p:txBody>
-      </p:sp>
-      <p:sp>
-        <p:nvSpPr>
-          <p:cNvPr id="6" name="TextBox 5"/>
-          <p:cNvSpPr txBox="1"/>
-          <p:nvPr/>
-        </p:nvSpPr>
-        <p:spPr>
-          <a:xfrm>
-            <a:off x="3611880" y="2706760"/>
-            <a:ext cx="2423160" cy="365760"/>
-          </a:xfrm>
-          <a:prstGeom prst="rect">
-            <a:avLst/>
-          </a:prstGeom>
-          <a:noFill/>
-        </p:spPr>
-        <p:txBody>
-          <a:bodyPr wrap="square">
-            <a:spAutoFit/>
-          </a:bodyPr>
-          <a:lstStyle/>
-          <a:p>
-            <a:pPr algn="l"/>
-            <a:r>
-              <a:rPr sz="1200" b="1">
-                <a:solidFill>
-                  <a:srgbClr val="FFFFFF"/>
-                </a:solidFill>
-                <a:latin typeface="Arial"/>
-              </a:rPr>
-              <a:t>Original</a:t>
-            </a:r>
-          </a:p>
-        </p:txBody>
-      </p:sp>
-      <p:sp>
-        <p:nvSpPr>
-          <p:cNvPr id="7" name="TextBox 6"/>
-          <p:cNvSpPr txBox="1"/>
-          <p:nvPr/>
-        </p:nvSpPr>
-        <p:spPr>
-          <a:xfrm>
-            <a:off x="6126480" y="2706760"/>
-            <a:ext cx="2423160" cy="365760"/>
-          </a:xfrm>
-          <a:prstGeom prst="rect">
-            <a:avLst/>
-          </a:prstGeom>
-          <a:noFill/>
-        </p:spPr>
-        <p:txBody>
-          <a:bodyPr wrap="square">
-            <a:spAutoFit/>
-          </a:bodyPr>
-          <a:lstStyle/>
-          <a:p>
-            <a:pPr algn="l"/>
-            <a:r>
-              <a:rPr sz="1200" b="1">
-                <a:solidFill>
-                  <a:srgbClr val="FFFFFF"/>
-                </a:solidFill>
-                <a:latin typeface="Arial"/>
-              </a:rPr>
-              <a:t>Traducción</a:t>
-            </a:r>
-          </a:p>
-        </p:txBody>
-      </p:sp>
-      <p:sp>
-        <p:nvSpPr>
-          <p:cNvPr id="8" name="TextBox 7"/>
-          <p:cNvSpPr txBox="1"/>
-          <p:nvPr/>
-        </p:nvSpPr>
-        <p:spPr>
-          <a:xfrm>
-            <a:off x="8641080" y="2706760"/>
-            <a:ext cx="2423160" cy="365760"/>
-          </a:xfrm>
-          <a:prstGeom prst="rect">
-            <a:avLst/>
-          </a:prstGeom>
-          <a:noFill/>
-        </p:spPr>
-        <p:txBody>
-          <a:bodyPr wrap="square">
-            <a:spAutoFit/>
-          </a:bodyPr>
-          <a:lstStyle/>
-          <a:p>
-            <a:pPr algn="l"/>
-            <a:r>
-              <a:rPr sz="1200" b="1">
-                <a:solidFill>
-                  <a:srgbClr val="FFFFFF"/>
-                </a:solidFill>
-                <a:latin typeface="Arial"/>
-              </a:rPr>
-              <a:t>Por qué</a:t>
-            </a:r>
-          </a:p>
-        </p:txBody>
-      </p:sp>
-      <p:sp>
-        <p:nvSpPr>
-          <p:cNvPr id="9" name="Rectangle 8"/>
-          <p:cNvSpPr/>
-          <p:nvPr/>
-        </p:nvSpPr>
-        <p:spPr>
-          <a:xfrm>
-            <a:off x="1051560" y="3017520"/>
-            <a:ext cx="10058400" cy="615315"/>
-          </a:xfrm>
-          <a:prstGeom prst="rect">
-            <a:avLst/>
-          </a:prstGeom>
-          <a:solidFill>
-            <a:srgbClr val="F1F2F6"/>
-          </a:solidFill>
-          <a:ln>
-            <a:noFill/>
-          </a:ln>
-        </p:spPr>
-        <p:style>
-          <a:lnRef idx="1">
-            <a:schemeClr val="accent1"/>
-          </a:lnRef>
-          <a:fillRef idx="3">
-            <a:schemeClr val="accent1"/>
-          </a:fillRef>
-          <a:effectRef idx="2">
-            <a:schemeClr val="accent1"/>
-          </a:effectRef>
-          <a:fontRef idx="minor">
-            <a:schemeClr val="lt1"/>
-          </a:fontRef>
-        </p:style>
-        <p:txBody>
-          <a:bodyPr rtlCol="0" anchor="ctr"/>
-          <a:lstStyle/>
-          <a:p>
-            <a:pPr algn="ctr"/>
-          </a:p>
-        </p:txBody>
-      </p:sp>
-      <p:sp>
-        <p:nvSpPr>
-          <p:cNvPr id="10" name="TextBox 9"/>
-          <p:cNvSpPr txBox="1"/>
-          <p:nvPr/>
-        </p:nvSpPr>
-        <p:spPr>
-          <a:xfrm>
-            <a:off x="1097280" y="3057520"/>
-            <a:ext cx="2423160" cy="615315"/>
-          </a:xfrm>
-          <a:prstGeom prst="rect">
-            <a:avLst/>
-          </a:prstGeom>
-          <a:noFill/>
-        </p:spPr>
-        <p:txBody>
-          <a:bodyPr wrap="square">
-            <a:spAutoFit/>
-          </a:bodyPr>
-          <a:lstStyle/>
-          <a:p>
-            <a:pPr algn="l"/>
-            <a:r>
-              <a:rPr sz="1100" b="0">
-                <a:solidFill>
-                  <a:srgbClr val="465461"/>
-                </a:solidFill>
-                <a:latin typeface="Arial"/>
-              </a:rPr>
-              <a:t>Embeddings</a:t>
-            </a:r>
-          </a:p>
-        </p:txBody>
-      </p:sp>
-      <p:sp>
-        <p:nvSpPr>
-          <p:cNvPr id="11" name="TextBox 10"/>
-          <p:cNvSpPr txBox="1"/>
-          <p:nvPr/>
-        </p:nvSpPr>
-        <p:spPr>
-          <a:xfrm>
-            <a:off x="3611880" y="3057520"/>
-            <a:ext cx="2423160" cy="615315"/>
-          </a:xfrm>
-          <a:prstGeom prst="rect">
-            <a:avLst/>
-          </a:prstGeom>
-          <a:noFill/>
-        </p:spPr>
-        <p:txBody>
-          <a:bodyPr wrap="square">
-            <a:spAutoFit/>
-          </a:bodyPr>
-          <a:lstStyle/>
-          <a:p>
-            <a:pPr algn="l"/>
-            <a:r>
-              <a:rPr sz="1100" b="0">
-                <a:solidFill>
-                  <a:srgbClr val="465461"/>
-                </a:solidFill>
-                <a:latin typeface="Arial"/>
-              </a:rPr>
-              <a:t>✓ SIEMPRE</a:t>
-            </a:r>
-          </a:p>
-        </p:txBody>
-      </p:sp>
-      <p:sp>
-        <p:nvSpPr>
-          <p:cNvPr id="12" name="TextBox 11"/>
-          <p:cNvSpPr txBox="1"/>
-          <p:nvPr/>
-        </p:nvSpPr>
-        <p:spPr>
-          <a:xfrm>
-            <a:off x="6126480" y="3057520"/>
-            <a:ext cx="2423160" cy="615315"/>
-          </a:xfrm>
-          <a:prstGeom prst="rect">
-            <a:avLst/>
-          </a:prstGeom>
-          <a:noFill/>
-        </p:spPr>
-        <p:txBody>
-          <a:bodyPr wrap="square">
-            <a:spAutoFit/>
-          </a:bodyPr>
-          <a:lstStyle/>
-          <a:p>
-            <a:pPr algn="l"/>
-            <a:r>
-              <a:rPr sz="1100" b="0">
-                <a:solidFill>
-                  <a:srgbClr val="465461"/>
-                </a:solidFill>
-                <a:latin typeface="Arial"/>
-              </a:rPr>
-              <a:t>✗ nunca</a:t>
-            </a:r>
-          </a:p>
-        </p:txBody>
-      </p:sp>
-      <p:sp>
-        <p:nvSpPr>
-          <p:cNvPr id="13" name="TextBox 12"/>
-          <p:cNvSpPr txBox="1"/>
-          <p:nvPr/>
-        </p:nvSpPr>
-        <p:spPr>
-          <a:xfrm>
-            <a:off x="8641080" y="3057520"/>
-            <a:ext cx="2423160" cy="615315"/>
-          </a:xfrm>
-          <a:prstGeom prst="rect">
-            <a:avLst/>
-          </a:prstGeom>
-          <a:noFill/>
-        </p:spPr>
-        <p:txBody>
-          <a:bodyPr wrap="square">
-            <a:spAutoFit/>
-          </a:bodyPr>
-          <a:lstStyle/>
-          <a:p>
-            <a:pPr algn="l"/>
-            <a:r>
-              <a:rPr sz="1100" b="0">
-                <a:solidFill>
-                  <a:srgbClr val="465461"/>
-                </a:solidFill>
-                <a:latin typeface="Arial"/>
-              </a:rPr>
-              <a:t>Traducir destruye la huella estilométrica del autor</a:t>
-            </a:r>
-          </a:p>
-        </p:txBody>
-      </p:sp>
-      <p:sp>
-        <p:nvSpPr>
-          <p:cNvPr id="14" name="Rectangle 13"/>
-          <p:cNvSpPr/>
-          <p:nvPr/>
-        </p:nvSpPr>
-        <p:spPr>
-          <a:xfrm>
-            <a:off x="1051560" y="3632835"/>
-            <a:ext cx="10058400" cy="440689"/>
-          </a:xfrm>
-          <a:prstGeom prst="rect">
-            <a:avLst/>
-          </a:prstGeom>
-          <a:solidFill>
-            <a:srgbClr val="FFFFFF"/>
-          </a:solidFill>
-          <a:ln>
-            <a:noFill/>
-          </a:ln>
-        </p:spPr>
-        <p:style>
-          <a:lnRef idx="1">
-            <a:schemeClr val="accent1"/>
-          </a:lnRef>
-          <a:fillRef idx="3">
-            <a:schemeClr val="accent1"/>
-          </a:fillRef>
-          <a:effectRef idx="2">
-            <a:schemeClr val="accent1"/>
-          </a:effectRef>
-          <a:fontRef idx="minor">
-            <a:schemeClr val="lt1"/>
-          </a:fontRef>
-        </p:style>
-        <p:txBody>
-          <a:bodyPr rtlCol="0" anchor="ctr"/>
-          <a:lstStyle/>
-          <a:p>
-            <a:pPr algn="ctr"/>
-          </a:p>
-        </p:txBody>
-      </p:sp>
-      <p:sp>
-        <p:nvSpPr>
-          <p:cNvPr id="15" name="TextBox 14"/>
-          <p:cNvSpPr txBox="1"/>
-          <p:nvPr/>
-        </p:nvSpPr>
-        <p:spPr>
-          <a:xfrm>
-            <a:off x="1097280" y="3672835"/>
-            <a:ext cx="2423160" cy="440689"/>
-          </a:xfrm>
-          <a:prstGeom prst="rect">
-            <a:avLst/>
-          </a:prstGeom>
-          <a:noFill/>
-        </p:spPr>
-        <p:txBody>
-          <a:bodyPr wrap="square">
-            <a:spAutoFit/>
-          </a:bodyPr>
-          <a:lstStyle/>
-          <a:p>
-            <a:pPr algn="l"/>
-            <a:r>
-              <a:rPr sz="1100" b="0">
-                <a:solidFill>
-                  <a:srgbClr val="465461"/>
-                </a:solidFill>
-                <a:latin typeface="Arial"/>
-              </a:rPr>
-              <a:t>Estilometría</a:t>
-            </a:r>
-          </a:p>
-        </p:txBody>
-      </p:sp>
-      <p:sp>
-        <p:nvSpPr>
-          <p:cNvPr id="16" name="TextBox 15"/>
-          <p:cNvSpPr txBox="1"/>
-          <p:nvPr/>
-        </p:nvSpPr>
-        <p:spPr>
-          <a:xfrm>
-            <a:off x="3611880" y="3672835"/>
-            <a:ext cx="2423160" cy="440689"/>
-          </a:xfrm>
-          <a:prstGeom prst="rect">
-            <a:avLst/>
-          </a:prstGeom>
-          <a:noFill/>
-        </p:spPr>
-        <p:txBody>
-          <a:bodyPr wrap="square">
-            <a:spAutoFit/>
-          </a:bodyPr>
-          <a:lstStyle/>
-          <a:p>
-            <a:pPr algn="l"/>
-            <a:r>
-              <a:rPr sz="1100" b="0">
-                <a:solidFill>
-                  <a:srgbClr val="465461"/>
-                </a:solidFill>
-                <a:latin typeface="Arial"/>
-              </a:rPr>
-              <a:t>✓ SIEMPRE</a:t>
-            </a:r>
-          </a:p>
-        </p:txBody>
-      </p:sp>
-      <p:sp>
-        <p:nvSpPr>
-          <p:cNvPr id="17" name="TextBox 16"/>
-          <p:cNvSpPr txBox="1"/>
-          <p:nvPr/>
-        </p:nvSpPr>
-        <p:spPr>
-          <a:xfrm>
-            <a:off x="6126480" y="3672835"/>
-            <a:ext cx="2423160" cy="440689"/>
-          </a:xfrm>
-          <a:prstGeom prst="rect">
-            <a:avLst/>
-          </a:prstGeom>
-          <a:noFill/>
-        </p:spPr>
-        <p:txBody>
-          <a:bodyPr wrap="square">
-            <a:spAutoFit/>
-          </a:bodyPr>
-          <a:lstStyle/>
-          <a:p>
-            <a:pPr algn="l"/>
-            <a:r>
-              <a:rPr sz="1100" b="0">
-                <a:solidFill>
-                  <a:srgbClr val="465461"/>
-                </a:solidFill>
-                <a:latin typeface="Arial"/>
-              </a:rPr>
-              <a:t>✗ nunca</a:t>
-            </a:r>
-          </a:p>
-        </p:txBody>
-      </p:sp>
-      <p:sp>
-        <p:nvSpPr>
-          <p:cNvPr id="18" name="TextBox 17"/>
-          <p:cNvSpPr txBox="1"/>
-          <p:nvPr/>
-        </p:nvSpPr>
-        <p:spPr>
-          <a:xfrm>
-            <a:off x="8641080" y="3672835"/>
-            <a:ext cx="2423160" cy="440689"/>
-          </a:xfrm>
-          <a:prstGeom prst="rect">
-            <a:avLst/>
-          </a:prstGeom>
-          <a:noFill/>
-        </p:spPr>
-        <p:txBody>
-          <a:bodyPr wrap="square">
-            <a:spAutoFit/>
-          </a:bodyPr>
-          <a:lstStyle/>
-          <a:p>
-            <a:pPr algn="l"/>
-            <a:r>
-              <a:rPr sz="1100" b="0">
-                <a:solidFill>
-                  <a:srgbClr val="465461"/>
-                </a:solidFill>
-                <a:latin typeface="Arial"/>
-              </a:rPr>
-              <a:t>La señal ES el estilo — no sobrevive la traducción</a:t>
-            </a:r>
-          </a:p>
-        </p:txBody>
-      </p:sp>
-      <p:sp>
-        <p:nvSpPr>
-          <p:cNvPr id="19" name="Rectangle 18"/>
-          <p:cNvSpPr/>
-          <p:nvPr/>
-        </p:nvSpPr>
-        <p:spPr>
-          <a:xfrm>
-            <a:off x="1051560" y="4073525"/>
-            <a:ext cx="10058400" cy="440689"/>
-          </a:xfrm>
-          <a:prstGeom prst="rect">
-            <a:avLst/>
-          </a:prstGeom>
-          <a:solidFill>
-            <a:srgbClr val="F1F2F6"/>
-          </a:solidFill>
-          <a:ln>
-            <a:noFill/>
-          </a:ln>
-        </p:spPr>
-        <p:style>
-          <a:lnRef idx="1">
-            <a:schemeClr val="accent1"/>
-          </a:lnRef>
-          <a:fillRef idx="3">
-            <a:schemeClr val="accent1"/>
-          </a:fillRef>
-          <a:effectRef idx="2">
-            <a:schemeClr val="accent1"/>
-          </a:effectRef>
-          <a:fontRef idx="minor">
-            <a:schemeClr val="lt1"/>
-          </a:fontRef>
-        </p:style>
-        <p:txBody>
-          <a:bodyPr rtlCol="0" anchor="ctr"/>
-          <a:lstStyle/>
-          <a:p>
-            <a:pPr algn="ctr"/>
-          </a:p>
-        </p:txBody>
-      </p:sp>
-      <p:sp>
-        <p:nvSpPr>
-          <p:cNvPr id="20" name="TextBox 19"/>
-          <p:cNvSpPr txBox="1"/>
-          <p:nvPr/>
-        </p:nvSpPr>
-        <p:spPr>
-          <a:xfrm>
-            <a:off x="1097280" y="4113525"/>
-            <a:ext cx="2423160" cy="440689"/>
-          </a:xfrm>
-          <a:prstGeom prst="rect">
-            <a:avLst/>
-          </a:prstGeom>
-          <a:noFill/>
-        </p:spPr>
-        <p:txBody>
-          <a:bodyPr wrap="square">
-            <a:spAutoFit/>
-          </a:bodyPr>
-          <a:lstStyle/>
-          <a:p>
-            <a:pPr algn="l"/>
-            <a:r>
-              <a:rPr sz="1100" b="0">
-                <a:solidFill>
-                  <a:srgbClr val="465461"/>
-                </a:solidFill>
-                <a:latin typeface="Arial"/>
-              </a:rPr>
-              <a:t>NER con LLM</a:t>
-            </a:r>
-          </a:p>
-        </p:txBody>
-      </p:sp>
-      <p:sp>
-        <p:nvSpPr>
-          <p:cNvPr id="21" name="TextBox 20"/>
-          <p:cNvSpPr txBox="1"/>
-          <p:nvPr/>
-        </p:nvSpPr>
-        <p:spPr>
-          <a:xfrm>
-            <a:off x="3611880" y="4113525"/>
-            <a:ext cx="2423160" cy="440689"/>
-          </a:xfrm>
-          <a:prstGeom prst="rect">
-            <a:avLst/>
-          </a:prstGeom>
-          <a:noFill/>
-        </p:spPr>
-        <p:txBody>
-          <a:bodyPr wrap="square">
-            <a:spAutoFit/>
-          </a:bodyPr>
-          <a:lstStyle/>
-          <a:p>
-            <a:pPr algn="l"/>
-            <a:r>
-              <a:rPr sz="1100" b="0">
-                <a:solidFill>
-                  <a:srgbClr val="465461"/>
-                </a:solidFill>
-                <a:latin typeface="Arial"/>
-              </a:rPr>
-              <a:t>Si el modelo lo soporta bien</a:t>
-            </a:r>
-          </a:p>
-        </p:txBody>
-      </p:sp>
-      <p:sp>
-        <p:nvSpPr>
-          <p:cNvPr id="22" name="TextBox 21"/>
-          <p:cNvSpPr txBox="1"/>
-          <p:nvPr/>
-        </p:nvSpPr>
-        <p:spPr>
-          <a:xfrm>
-            <a:off x="6126480" y="4113525"/>
-            <a:ext cx="2423160" cy="440689"/>
-          </a:xfrm>
-          <a:prstGeom prst="rect">
-            <a:avLst/>
-          </a:prstGeom>
-          <a:noFill/>
-        </p:spPr>
-        <p:txBody>
-          <a:bodyPr wrap="square">
-            <a:spAutoFit/>
-          </a:bodyPr>
-          <a:lstStyle/>
-          <a:p>
-            <a:pPr algn="l"/>
-            <a:r>
-              <a:rPr sz="1100" b="0">
-                <a:solidFill>
-                  <a:srgbClr val="465461"/>
-                </a:solidFill>
-                <a:latin typeface="Arial"/>
-              </a:rPr>
-              <a:t>✓ si el modelo base es inglés</a:t>
-            </a:r>
-          </a:p>
-        </p:txBody>
-      </p:sp>
-      <p:sp>
-        <p:nvSpPr>
-          <p:cNvPr id="23" name="TextBox 22"/>
-          <p:cNvSpPr txBox="1"/>
-          <p:nvPr/>
-        </p:nvSpPr>
-        <p:spPr>
-          <a:xfrm>
-            <a:off x="8641080" y="4113525"/>
-            <a:ext cx="2423160" cy="440689"/>
-          </a:xfrm>
-          <a:prstGeom prst="rect">
-            <a:avLst/>
-          </a:prstGeom>
-          <a:noFill/>
-        </p:spPr>
-        <p:txBody>
-          <a:bodyPr wrap="square">
-            <a:spAutoFit/>
-          </a:bodyPr>
-          <a:lstStyle/>
-          <a:p>
-            <a:pPr algn="l"/>
-            <a:r>
-              <a:rPr sz="1100" b="0">
-                <a:solidFill>
-                  <a:srgbClr val="465461"/>
-                </a:solidFill>
-                <a:latin typeface="Arial"/>
-              </a:rPr>
-              <a:t>Para NER importa la entidad, no el estilo</a:t>
-            </a:r>
-          </a:p>
-        </p:txBody>
-      </p:sp>
-      <p:sp>
-        <p:nvSpPr>
-          <p:cNvPr id="24" name="Rectangle 23"/>
-          <p:cNvSpPr/>
-          <p:nvPr/>
-        </p:nvSpPr>
-        <p:spPr>
-          <a:xfrm>
-            <a:off x="1051560" y="4514215"/>
-            <a:ext cx="10058400" cy="440689"/>
-          </a:xfrm>
-          <a:prstGeom prst="rect">
-            <a:avLst/>
-          </a:prstGeom>
-          <a:solidFill>
-            <a:srgbClr val="FFFFFF"/>
-          </a:solidFill>
-          <a:ln>
-            <a:noFill/>
-          </a:ln>
-        </p:spPr>
-        <p:style>
-          <a:lnRef idx="1">
-            <a:schemeClr val="accent1"/>
-          </a:lnRef>
-          <a:fillRef idx="3">
-            <a:schemeClr val="accent1"/>
-          </a:fillRef>
-          <a:effectRef idx="2">
-            <a:schemeClr val="accent1"/>
-          </a:effectRef>
-          <a:fontRef idx="minor">
-            <a:schemeClr val="lt1"/>
-          </a:fontRef>
-        </p:style>
-        <p:txBody>
-          <a:bodyPr rtlCol="0" anchor="ctr"/>
-          <a:lstStyle/>
-          <a:p>
-            <a:pPr algn="ctr"/>
-          </a:p>
-        </p:txBody>
-      </p:sp>
-      <p:sp>
-        <p:nvSpPr>
-          <p:cNvPr id="25" name="TextBox 24"/>
-          <p:cNvSpPr txBox="1"/>
-          <p:nvPr/>
-        </p:nvSpPr>
-        <p:spPr>
-          <a:xfrm>
-            <a:off x="1097280" y="4554215"/>
-            <a:ext cx="2423160" cy="440689"/>
-          </a:xfrm>
-          <a:prstGeom prst="rect">
-            <a:avLst/>
-          </a:prstGeom>
-          <a:noFill/>
-        </p:spPr>
-        <p:txBody>
-          <a:bodyPr wrap="square">
-            <a:spAutoFit/>
-          </a:bodyPr>
-          <a:lstStyle/>
-          <a:p>
-            <a:pPr algn="l"/>
-            <a:r>
-              <a:rPr sz="1100" b="0">
-                <a:solidFill>
-                  <a:srgbClr val="465461"/>
-                </a:solidFill>
-                <a:latin typeface="Arial"/>
-              </a:rPr>
-              <a:t>Topic modeling</a:t>
-            </a:r>
-          </a:p>
-        </p:txBody>
-      </p:sp>
-      <p:sp>
-        <p:nvSpPr>
-          <p:cNvPr id="26" name="TextBox 25"/>
-          <p:cNvSpPr txBox="1"/>
-          <p:nvPr/>
-        </p:nvSpPr>
-        <p:spPr>
-          <a:xfrm>
-            <a:off x="3611880" y="4554215"/>
-            <a:ext cx="2423160" cy="440689"/>
-          </a:xfrm>
-          <a:prstGeom prst="rect">
-            <a:avLst/>
-          </a:prstGeom>
-          <a:noFill/>
-        </p:spPr>
-        <p:txBody>
-          <a:bodyPr wrap="square">
-            <a:spAutoFit/>
-          </a:bodyPr>
-          <a:lstStyle/>
-          <a:p>
-            <a:pPr algn="l"/>
-            <a:r>
-              <a:rPr sz="1100" b="0">
-                <a:solidFill>
-                  <a:srgbClr val="465461"/>
-                </a:solidFill>
-                <a:latin typeface="Arial"/>
-              </a:rPr>
-              <a:t>Con modelo multilingüe</a:t>
-            </a:r>
-          </a:p>
-        </p:txBody>
-      </p:sp>
-      <p:sp>
-        <p:nvSpPr>
-          <p:cNvPr id="27" name="TextBox 26"/>
-          <p:cNvSpPr txBox="1"/>
-          <p:nvPr/>
-        </p:nvSpPr>
-        <p:spPr>
-          <a:xfrm>
-            <a:off x="6126480" y="4554215"/>
-            <a:ext cx="2423160" cy="440689"/>
-          </a:xfrm>
-          <a:prstGeom prst="rect">
-            <a:avLst/>
-          </a:prstGeom>
-          <a:noFill/>
-        </p:spPr>
-        <p:txBody>
-          <a:bodyPr wrap="square">
-            <a:spAutoFit/>
-          </a:bodyPr>
-          <a:lstStyle/>
-          <a:p>
-            <a:pPr algn="l"/>
-            <a:r>
-              <a:rPr sz="1100" b="0">
-                <a:solidFill>
-                  <a:srgbClr val="465461"/>
-                </a:solidFill>
-                <a:latin typeface="Arial"/>
-              </a:rPr>
-              <a:t>✓ si no hay modelo del idioma</a:t>
-            </a:r>
-          </a:p>
-        </p:txBody>
-      </p:sp>
-      <p:sp>
-        <p:nvSpPr>
-          <p:cNvPr id="28" name="TextBox 27"/>
-          <p:cNvSpPr txBox="1"/>
-          <p:nvPr/>
-        </p:nvSpPr>
-        <p:spPr>
-          <a:xfrm>
-            <a:off x="8641080" y="4554215"/>
-            <a:ext cx="2423160" cy="440689"/>
-          </a:xfrm>
-          <a:prstGeom prst="rect">
-            <a:avLst/>
-          </a:prstGeom>
-          <a:noFill/>
-        </p:spPr>
-        <p:txBody>
-          <a:bodyPr wrap="square">
-            <a:spAutoFit/>
-          </a:bodyPr>
-          <a:lstStyle/>
-          <a:p>
-            <a:pPr algn="l"/>
-            <a:r>
-              <a:rPr sz="1100" b="0">
-                <a:solidFill>
-                  <a:srgbClr val="465461"/>
-                </a:solidFill>
-                <a:latin typeface="Arial"/>
-              </a:rPr>
-              <a:t>Los topics son semánticos, no estilísticos</a:t>
-            </a:r>
-          </a:p>
-        </p:txBody>
-      </p:sp>
+        </p:nvGraphicFramePr>
+        <p:xfrm>
+          <a:off x="1051560" y="2651760"/>
+          <a:ext cx="10058400" cy="1828800"/>
+        </p:xfrm>
+        <a:graphic>
+          <a:graphicData uri="http://schemas.openxmlformats.org/drawingml/2006/table">
+            <a:tbl>
+              <a:tblPr>
+                <a:tableStyleId>{5C22544A-7EE6-4342-B048-85BDC9FD1C3A}</a:tableStyleId>
+              </a:tblPr>
+              <a:tblGrid>
+                <a:gridCol w="2514600"/>
+                <a:gridCol w="2514600"/>
+                <a:gridCol w="2514600"/>
+                <a:gridCol w="2514600"/>
+              </a:tblGrid>
+              <a:tr h="365760">
+                <a:tc>
+                  <a:txBody>
+                    <a:bodyPr/>
+                    <a:lstStyle/>
+                    <a:p>
+                      <a:r>
+                        <a:rPr sz="1200" b="1">
+                          <a:solidFill>
+                            <a:srgbClr val="FFFFFF"/>
+                          </a:solidFill>
+                          <a:latin typeface="Arial"/>
+                        </a:rPr>
+                        <a:t>Técnica</a:t>
+                      </a:r>
+                    </a:p>
+                  </a:txBody>
+                  <a:tcPr marL="45000" marR="45000" marT="25000" marB="25000" anchor="ctr">
+                    <a:solidFill>
+                      <a:srgbClr val="CD2D37"/>
+                    </a:solidFill>
+                  </a:tcPr>
+                </a:tc>
+                <a:tc>
+                  <a:txBody>
+                    <a:bodyPr/>
+                    <a:lstStyle/>
+                    <a:p>
+                      <a:r>
+                        <a:rPr sz="1200" b="1">
+                          <a:solidFill>
+                            <a:srgbClr val="FFFFFF"/>
+                          </a:solidFill>
+                          <a:latin typeface="Arial"/>
+                        </a:rPr>
+                        <a:t>Original</a:t>
+                      </a:r>
+                    </a:p>
+                  </a:txBody>
+                  <a:tcPr marL="45000" marR="45000" marT="25000" marB="25000" anchor="ctr">
+                    <a:solidFill>
+                      <a:srgbClr val="CD2D37"/>
+                    </a:solidFill>
+                  </a:tcPr>
+                </a:tc>
+                <a:tc>
+                  <a:txBody>
+                    <a:bodyPr/>
+                    <a:lstStyle/>
+                    <a:p>
+                      <a:r>
+                        <a:rPr sz="1200" b="1">
+                          <a:solidFill>
+                            <a:srgbClr val="FFFFFF"/>
+                          </a:solidFill>
+                          <a:latin typeface="Arial"/>
+                        </a:rPr>
+                        <a:t>Traducción</a:t>
+                      </a:r>
+                    </a:p>
+                  </a:txBody>
+                  <a:tcPr marL="45000" marR="45000" marT="25000" marB="25000" anchor="ctr">
+                    <a:solidFill>
+                      <a:srgbClr val="CD2D37"/>
+                    </a:solidFill>
+                  </a:tcPr>
+                </a:tc>
+                <a:tc>
+                  <a:txBody>
+                    <a:bodyPr/>
+                    <a:lstStyle/>
+                    <a:p>
+                      <a:r>
+                        <a:rPr sz="1200" b="1">
+                          <a:solidFill>
+                            <a:srgbClr val="FFFFFF"/>
+                          </a:solidFill>
+                          <a:latin typeface="Arial"/>
+                        </a:rPr>
+                        <a:t>Por qué</a:t>
+                      </a:r>
+                    </a:p>
+                  </a:txBody>
+                  <a:tcPr marL="45000" marR="45000" marT="25000" marB="25000" anchor="ctr">
+                    <a:solidFill>
+                      <a:srgbClr val="CD2D37"/>
+                    </a:solidFill>
+                  </a:tcPr>
+                </a:tc>
+              </a:tr>
+              <a:tr h="365760">
+                <a:tc>
+                  <a:txBody>
+                    <a:bodyPr/>
+                    <a:lstStyle/>
+                    <a:p>
+                      <a:r>
+                        <a:rPr sz="1100" b="0">
+                          <a:solidFill>
+                            <a:srgbClr val="465461"/>
+                          </a:solidFill>
+                          <a:latin typeface="Arial"/>
+                        </a:rPr>
+                        <a:t>Embeddings</a:t>
+                      </a:r>
+                    </a:p>
+                  </a:txBody>
+                  <a:tcPr marL="45000" marR="45000" marT="25000" marB="25000" anchor="ctr">
+                    <a:solidFill>
+                      <a:srgbClr val="F1F2F6"/>
+                    </a:solidFill>
+                  </a:tcPr>
+                </a:tc>
+                <a:tc>
+                  <a:txBody>
+                    <a:bodyPr/>
+                    <a:lstStyle/>
+                    <a:p>
+                      <a:r>
+                        <a:rPr sz="1100" b="0">
+                          <a:solidFill>
+                            <a:srgbClr val="465461"/>
+                          </a:solidFill>
+                          <a:latin typeface="Arial"/>
+                        </a:rPr>
+                        <a:t>✓ SIEMPRE</a:t>
+                      </a:r>
+                    </a:p>
+                  </a:txBody>
+                  <a:tcPr marL="45000" marR="45000" marT="25000" marB="25000" anchor="ctr">
+                    <a:solidFill>
+                      <a:srgbClr val="F1F2F6"/>
+                    </a:solidFill>
+                  </a:tcPr>
+                </a:tc>
+                <a:tc>
+                  <a:txBody>
+                    <a:bodyPr/>
+                    <a:lstStyle/>
+                    <a:p>
+                      <a:r>
+                        <a:rPr sz="1100" b="0">
+                          <a:solidFill>
+                            <a:srgbClr val="465461"/>
+                          </a:solidFill>
+                          <a:latin typeface="Arial"/>
+                        </a:rPr>
+                        <a:t>✗ nunca</a:t>
+                      </a:r>
+                    </a:p>
+                  </a:txBody>
+                  <a:tcPr marL="45000" marR="45000" marT="25000" marB="25000" anchor="ctr">
+                    <a:solidFill>
+                      <a:srgbClr val="F1F2F6"/>
+                    </a:solidFill>
+                  </a:tcPr>
+                </a:tc>
+                <a:tc>
+                  <a:txBody>
+                    <a:bodyPr/>
+                    <a:lstStyle/>
+                    <a:p>
+                      <a:r>
+                        <a:rPr sz="1100" b="0">
+                          <a:solidFill>
+                            <a:srgbClr val="465461"/>
+                          </a:solidFill>
+                          <a:latin typeface="Arial"/>
+                        </a:rPr>
+                        <a:t>Traducir destruye la huella estilométrica del autor</a:t>
+                      </a:r>
+                    </a:p>
+                  </a:txBody>
+                  <a:tcPr marL="45000" marR="45000" marT="25000" marB="25000" anchor="ctr">
+                    <a:solidFill>
+                      <a:srgbClr val="F1F2F6"/>
+                    </a:solidFill>
+                  </a:tcPr>
+                </a:tc>
+              </a:tr>
+              <a:tr h="365760">
+                <a:tc>
+                  <a:txBody>
+                    <a:bodyPr/>
+                    <a:lstStyle/>
+                    <a:p>
+                      <a:r>
+                        <a:rPr sz="1100" b="0">
+                          <a:solidFill>
+                            <a:srgbClr val="465461"/>
+                          </a:solidFill>
+                          <a:latin typeface="Arial"/>
+                        </a:rPr>
+                        <a:t>Estilometría</a:t>
+                      </a:r>
+                    </a:p>
+                  </a:txBody>
+                  <a:tcPr marL="45000" marR="45000" marT="25000" marB="25000" anchor="ctr">
+                    <a:solidFill>
+                      <a:srgbClr val="FFFFFF"/>
+                    </a:solidFill>
+                  </a:tcPr>
+                </a:tc>
+                <a:tc>
+                  <a:txBody>
+                    <a:bodyPr/>
+                    <a:lstStyle/>
+                    <a:p>
+                      <a:r>
+                        <a:rPr sz="1100" b="0">
+                          <a:solidFill>
+                            <a:srgbClr val="465461"/>
+                          </a:solidFill>
+                          <a:latin typeface="Arial"/>
+                        </a:rPr>
+                        <a:t>✓ SIEMPRE</a:t>
+                      </a:r>
+                    </a:p>
+                  </a:txBody>
+                  <a:tcPr marL="45000" marR="45000" marT="25000" marB="25000" anchor="ctr">
+                    <a:solidFill>
+                      <a:srgbClr val="FFFFFF"/>
+                    </a:solidFill>
+                  </a:tcPr>
+                </a:tc>
+                <a:tc>
+                  <a:txBody>
+                    <a:bodyPr/>
+                    <a:lstStyle/>
+                    <a:p>
+                      <a:r>
+                        <a:rPr sz="1100" b="0">
+                          <a:solidFill>
+                            <a:srgbClr val="465461"/>
+                          </a:solidFill>
+                          <a:latin typeface="Arial"/>
+                        </a:rPr>
+                        <a:t>✗ nunca</a:t>
+                      </a:r>
+                    </a:p>
+                  </a:txBody>
+                  <a:tcPr marL="45000" marR="45000" marT="25000" marB="25000" anchor="ctr">
+                    <a:solidFill>
+                      <a:srgbClr val="FFFFFF"/>
+                    </a:solidFill>
+                  </a:tcPr>
+                </a:tc>
+                <a:tc>
+                  <a:txBody>
+                    <a:bodyPr/>
+                    <a:lstStyle/>
+                    <a:p>
+                      <a:r>
+                        <a:rPr sz="1100" b="0">
+                          <a:solidFill>
+                            <a:srgbClr val="465461"/>
+                          </a:solidFill>
+                          <a:latin typeface="Arial"/>
+                        </a:rPr>
+                        <a:t>La señal ES el estilo — no sobrevive la traducción</a:t>
+                      </a:r>
+                    </a:p>
+                  </a:txBody>
+                  <a:tcPr marL="45000" marR="45000" marT="25000" marB="25000" anchor="ctr">
+                    <a:solidFill>
+                      <a:srgbClr val="FFFFFF"/>
+                    </a:solidFill>
+                  </a:tcPr>
+                </a:tc>
+              </a:tr>
+              <a:tr h="365760">
+                <a:tc>
+                  <a:txBody>
+                    <a:bodyPr/>
+                    <a:lstStyle/>
+                    <a:p>
+                      <a:r>
+                        <a:rPr sz="1100" b="0">
+                          <a:solidFill>
+                            <a:srgbClr val="465461"/>
+                          </a:solidFill>
+                          <a:latin typeface="Arial"/>
+                        </a:rPr>
+                        <a:t>NER con LLM</a:t>
+                      </a:r>
+                    </a:p>
+                  </a:txBody>
+                  <a:tcPr marL="45000" marR="45000" marT="25000" marB="25000" anchor="ctr">
+                    <a:solidFill>
+                      <a:srgbClr val="F1F2F6"/>
+                    </a:solidFill>
+                  </a:tcPr>
+                </a:tc>
+                <a:tc>
+                  <a:txBody>
+                    <a:bodyPr/>
+                    <a:lstStyle/>
+                    <a:p>
+                      <a:r>
+                        <a:rPr sz="1100" b="0">
+                          <a:solidFill>
+                            <a:srgbClr val="465461"/>
+                          </a:solidFill>
+                          <a:latin typeface="Arial"/>
+                        </a:rPr>
+                        <a:t>Si el modelo lo soporta bien</a:t>
+                      </a:r>
+                    </a:p>
+                  </a:txBody>
+                  <a:tcPr marL="45000" marR="45000" marT="25000" marB="25000" anchor="ctr">
+                    <a:solidFill>
+                      <a:srgbClr val="F1F2F6"/>
+                    </a:solidFill>
+                  </a:tcPr>
+                </a:tc>
+                <a:tc>
+                  <a:txBody>
+                    <a:bodyPr/>
+                    <a:lstStyle/>
+                    <a:p>
+                      <a:r>
+                        <a:rPr sz="1100" b="0">
+                          <a:solidFill>
+                            <a:srgbClr val="465461"/>
+                          </a:solidFill>
+                          <a:latin typeface="Arial"/>
+                        </a:rPr>
+                        <a:t>✓ si el modelo base es inglés</a:t>
+                      </a:r>
+                    </a:p>
+                  </a:txBody>
+                  <a:tcPr marL="45000" marR="45000" marT="25000" marB="25000" anchor="ctr">
+                    <a:solidFill>
+                      <a:srgbClr val="F1F2F6"/>
+                    </a:solidFill>
+                  </a:tcPr>
+                </a:tc>
+                <a:tc>
+                  <a:txBody>
+                    <a:bodyPr/>
+                    <a:lstStyle/>
+                    <a:p>
+                      <a:r>
+                        <a:rPr sz="1100" b="0">
+                          <a:solidFill>
+                            <a:srgbClr val="465461"/>
+                          </a:solidFill>
+                          <a:latin typeface="Arial"/>
+                        </a:rPr>
+                        <a:t>Para NER importa la entidad, no el estilo</a:t>
+                      </a:r>
+                    </a:p>
+                  </a:txBody>
+                  <a:tcPr marL="45000" marR="45000" marT="25000" marB="25000" anchor="ctr">
+                    <a:solidFill>
+                      <a:srgbClr val="F1F2F6"/>
+                    </a:solidFill>
+                  </a:tcPr>
+                </a:tc>
+              </a:tr>
+              <a:tr h="365760">
+                <a:tc>
+                  <a:txBody>
+                    <a:bodyPr/>
+                    <a:lstStyle/>
+                    <a:p>
+                      <a:r>
+                        <a:rPr sz="1100" b="0">
+                          <a:solidFill>
+                            <a:srgbClr val="465461"/>
+                          </a:solidFill>
+                          <a:latin typeface="Arial"/>
+                        </a:rPr>
+                        <a:t>Topic modeling</a:t>
+                      </a:r>
+                    </a:p>
+                  </a:txBody>
+                  <a:tcPr marL="45000" marR="45000" marT="25000" marB="25000" anchor="ctr">
+                    <a:solidFill>
+                      <a:srgbClr val="FFFFFF"/>
+                    </a:solidFill>
+                  </a:tcPr>
+                </a:tc>
+                <a:tc>
+                  <a:txBody>
+                    <a:bodyPr/>
+                    <a:lstStyle/>
+                    <a:p>
+                      <a:r>
+                        <a:rPr sz="1100" b="0">
+                          <a:solidFill>
+                            <a:srgbClr val="465461"/>
+                          </a:solidFill>
+                          <a:latin typeface="Arial"/>
+                        </a:rPr>
+                        <a:t>Con modelo multilingüe</a:t>
+                      </a:r>
+                    </a:p>
+                  </a:txBody>
+                  <a:tcPr marL="45000" marR="45000" marT="25000" marB="25000" anchor="ctr">
+                    <a:solidFill>
+                      <a:srgbClr val="FFFFFF"/>
+                    </a:solidFill>
+                  </a:tcPr>
+                </a:tc>
+                <a:tc>
+                  <a:txBody>
+                    <a:bodyPr/>
+                    <a:lstStyle/>
+                    <a:p>
+                      <a:r>
+                        <a:rPr sz="1100" b="0">
+                          <a:solidFill>
+                            <a:srgbClr val="465461"/>
+                          </a:solidFill>
+                          <a:latin typeface="Arial"/>
+                        </a:rPr>
+                        <a:t>✓ si no hay modelo del idioma</a:t>
+                      </a:r>
+                    </a:p>
+                  </a:txBody>
+                  <a:tcPr marL="45000" marR="45000" marT="25000" marB="25000" anchor="ctr">
+                    <a:solidFill>
+                      <a:srgbClr val="FFFFFF"/>
+                    </a:solidFill>
+                  </a:tcPr>
+                </a:tc>
+                <a:tc>
+                  <a:txBody>
+                    <a:bodyPr/>
+                    <a:lstStyle/>
+                    <a:p>
+                      <a:r>
+                        <a:rPr sz="1100" b="0">
+                          <a:solidFill>
+                            <a:srgbClr val="465461"/>
+                          </a:solidFill>
+                          <a:latin typeface="Arial"/>
+                        </a:rPr>
+                        <a:t>Los topics son semánticos, no estilísticos</a:t>
+                      </a:r>
+                    </a:p>
+                  </a:txBody>
+                  <a:tcPr marL="45000" marR="45000" marT="25000" marB="25000" anchor="ctr">
+                    <a:solidFill>
+                      <a:srgbClr val="FFFFFF"/>
+                    </a:solidFill>
+                  </a:tcPr>
+                </a:tc>
+              </a:tr>
+            </a:tbl>
+          </a:graphicData>
+        </a:graphic>
+      </p:graphicFrame>
     </p:spTree>
   </p:cSld>
   <p:clrMapOvr>
@@ -8034,49 +7597,707 @@
           <a:p/>
         </p:txBody>
       </p:sp>
-      <p:sp>
-        <p:nvSpPr>
-          <p:cNvPr id="4" name="Rectangle 3"/>
-          <p:cNvSpPr/>
+      <p:graphicFrame>
+        <p:nvGraphicFramePr>
+          <p:cNvPr id="4" name="Table 3"/>
+          <p:cNvGraphicFramePr>
+            <a:graphicFrameLocks noGrp="1"/>
+          </p:cNvGraphicFramePr>
           <p:nvPr/>
-        </p:nvSpPr>
-        <p:spPr>
-          <a:xfrm>
-            <a:off x="1051560" y="2651760"/>
-            <a:ext cx="10058400" cy="365760"/>
-          </a:xfrm>
-          <a:prstGeom prst="rect">
-            <a:avLst/>
-          </a:prstGeom>
-          <a:solidFill>
-            <a:srgbClr val="CD2D37"/>
-          </a:solidFill>
-          <a:ln>
-            <a:noFill/>
-          </a:ln>
-        </p:spPr>
-        <p:style>
-          <a:lnRef idx="1">
-            <a:schemeClr val="accent1"/>
-          </a:lnRef>
-          <a:fillRef idx="3">
-            <a:schemeClr val="accent1"/>
-          </a:fillRef>
-          <a:effectRef idx="2">
-            <a:schemeClr val="accent1"/>
-          </a:effectRef>
-          <a:fontRef idx="minor">
-            <a:schemeClr val="lt1"/>
-          </a:fontRef>
-        </p:style>
-        <p:txBody>
-          <a:bodyPr rtlCol="0" anchor="ctr"/>
-          <a:lstStyle/>
-          <a:p>
-            <a:pPr algn="ctr"/>
-          </a:p>
-        </p:txBody>
-      </p:sp>
+        </p:nvGraphicFramePr>
+        <p:xfrm>
+          <a:off x="1051560" y="2651760"/>
+          <a:ext cx="10058400" cy="2194560"/>
+        </p:xfrm>
+        <a:graphic>
+          <a:graphicData uri="http://schemas.openxmlformats.org/drawingml/2006/table">
+            <a:tbl>
+              <a:tblPr>
+                <a:tableStyleId>{5C22544A-7EE6-4342-B048-85BDC9FD1C3A}</a:tableStyleId>
+              </a:tblPr>
+              <a:tblGrid>
+                <a:gridCol w="2011680"/>
+                <a:gridCol w="2011680"/>
+                <a:gridCol w="2011680"/>
+                <a:gridCol w="2011680"/>
+                <a:gridCol w="2011680"/>
+              </a:tblGrid>
+              <a:tr h="365760">
+                <a:tc>
+                  <a:txBody>
+                    <a:bodyPr/>
+                    <a:lstStyle/>
+                    <a:p>
+                      <a:r>
+                        <a:rPr sz="1200" b="1">
+                          <a:solidFill>
+                            <a:srgbClr val="FFFFFF"/>
+                          </a:solidFill>
+                          <a:latin typeface="Arial"/>
+                        </a:rPr>
+                        <a:t>Estrategia</a:t>
+                      </a:r>
+                    </a:p>
+                  </a:txBody>
+                  <a:tcPr marL="45000" marR="45000" marT="25000" marB="25000" anchor="ctr">
+                    <a:solidFill>
+                      <a:srgbClr val="CD2D37"/>
+                    </a:solidFill>
+                  </a:tcPr>
+                </a:tc>
+                <a:tc>
+                  <a:txBody>
+                    <a:bodyPr/>
+                    <a:lstStyle/>
+                    <a:p>
+                      <a:r>
+                        <a:rPr sz="1200" b="1">
+                          <a:solidFill>
+                            <a:srgbClr val="FFFFFF"/>
+                          </a:solidFill>
+                          <a:latin typeface="Arial"/>
+                        </a:rPr>
+                        <a:t>Posts por usuario</a:t>
+                      </a:r>
+                    </a:p>
+                  </a:txBody>
+                  <a:tcPr marL="45000" marR="45000" marT="25000" marB="25000" anchor="ctr">
+                    <a:solidFill>
+                      <a:srgbClr val="CD2D37"/>
+                    </a:solidFill>
+                  </a:tcPr>
+                </a:tc>
+                <a:tc>
+                  <a:txBody>
+                    <a:bodyPr/>
+                    <a:lstStyle/>
+                    <a:p>
+                      <a:r>
+                        <a:rPr sz="1200" b="1">
+                          <a:solidFill>
+                            <a:srgbClr val="FFFFFF"/>
+                          </a:solidFill>
+                          <a:latin typeface="Arial"/>
+                        </a:rPr>
+                        <a:t>GPU (IronMarch)</a:t>
+                      </a:r>
+                    </a:p>
+                  </a:txBody>
+                  <a:tcPr marL="45000" marR="45000" marT="25000" marB="25000" anchor="ctr">
+                    <a:solidFill>
+                      <a:srgbClr val="CD2D37"/>
+                    </a:solidFill>
+                  </a:tcPr>
+                </a:tc>
+                <a:tc>
+                  <a:txBody>
+                    <a:bodyPr/>
+                    <a:lstStyle/>
+                    <a:p>
+                      <a:r>
+                        <a:rPr sz="1200" b="1">
+                          <a:solidFill>
+                            <a:srgbClr val="FFFFFF"/>
+                          </a:solidFill>
+                          <a:latin typeface="Arial"/>
+                        </a:rPr>
+                        <a:t>Spearman ρ vs. full</a:t>
+                      </a:r>
+                    </a:p>
+                  </a:txBody>
+                  <a:tcPr marL="45000" marR="45000" marT="25000" marB="25000" anchor="ctr">
+                    <a:solidFill>
+                      <a:srgbClr val="CD2D37"/>
+                    </a:solidFill>
+                  </a:tcPr>
+                </a:tc>
+                <a:tc>
+                  <a:txBody>
+                    <a:bodyPr/>
+                    <a:lstStyle/>
+                    <a:p>
+                      <a:r>
+                        <a:rPr sz="1200" b="1">
+                          <a:solidFill>
+                            <a:srgbClr val="FFFFFF"/>
+                          </a:solidFill>
+                          <a:latin typeface="Arial"/>
+                        </a:rPr>
+                        <a:t>Cuándo usarla</a:t>
+                      </a:r>
+                    </a:p>
+                  </a:txBody>
+                  <a:tcPr marL="45000" marR="45000" marT="25000" marB="25000" anchor="ctr">
+                    <a:solidFill>
+                      <a:srgbClr val="CD2D37"/>
+                    </a:solidFill>
+                  </a:tcPr>
+                </a:tc>
+              </a:tr>
+              <a:tr h="365760">
+                <a:tc>
+                  <a:txBody>
+                    <a:bodyPr/>
+                    <a:lstStyle/>
+                    <a:p>
+                      <a:r>
+                        <a:rPr sz="1100" b="0">
+                          <a:solidFill>
+                            <a:srgbClr val="465461"/>
+                          </a:solidFill>
+                          <a:latin typeface="Arial"/>
+                        </a:rPr>
+                        <a:t>A — concat todo</a:t>
+                      </a:r>
+                    </a:p>
+                  </a:txBody>
+                  <a:tcPr marL="45000" marR="45000" marT="25000" marB="25000" anchor="ctr">
+                    <a:solidFill>
+                      <a:srgbClr val="F1F2F6"/>
+                    </a:solidFill>
+                  </a:tcPr>
+                </a:tc>
+                <a:tc>
+                  <a:txBody>
+                    <a:bodyPr/>
+                    <a:lstStyle/>
+                    <a:p>
+                      <a:r>
+                        <a:rPr sz="1100" b="0">
+                          <a:solidFill>
+                            <a:srgbClr val="465461"/>
+                          </a:solidFill>
+                          <a:latin typeface="Arial"/>
+                        </a:rPr>
+                        <a:t>todos (máx. 50K chars)</a:t>
+                      </a:r>
+                    </a:p>
+                  </a:txBody>
+                  <a:tcPr marL="45000" marR="45000" marT="25000" marB="25000" anchor="ctr">
+                    <a:solidFill>
+                      <a:srgbClr val="F1F2F6"/>
+                    </a:solidFill>
+                  </a:tcPr>
+                </a:tc>
+                <a:tc>
+                  <a:txBody>
+                    <a:bodyPr/>
+                    <a:lstStyle/>
+                    <a:p>
+                      <a:r>
+                        <a:rPr sz="1100" b="0">
+                          <a:solidFill>
+                            <a:srgbClr val="465461"/>
+                          </a:solidFill>
+                          <a:latin typeface="Arial"/>
+                        </a:rPr>
+                        <a:t>~12 min</a:t>
+                      </a:r>
+                    </a:p>
+                  </a:txBody>
+                  <a:tcPr marL="45000" marR="45000" marT="25000" marB="25000" anchor="ctr">
+                    <a:solidFill>
+                      <a:srgbClr val="F1F2F6"/>
+                    </a:solidFill>
+                  </a:tcPr>
+                </a:tc>
+                <a:tc>
+                  <a:txBody>
+                    <a:bodyPr/>
+                    <a:lstStyle/>
+                    <a:p>
+                      <a:r>
+                        <a:rPr sz="1100" b="0">
+                          <a:solidFill>
+                            <a:srgbClr val="465461"/>
+                          </a:solidFill>
+                          <a:latin typeface="Arial"/>
+                        </a:rPr>
+                        <a:t>—</a:t>
+                      </a:r>
+                    </a:p>
+                  </a:txBody>
+                  <a:tcPr marL="45000" marR="45000" marT="25000" marB="25000" anchor="ctr">
+                    <a:solidFill>
+                      <a:srgbClr val="F1F2F6"/>
+                    </a:solidFill>
+                  </a:tcPr>
+                </a:tc>
+                <a:tc>
+                  <a:txBody>
+                    <a:bodyPr/>
+                    <a:lstStyle/>
+                    <a:p>
+                      <a:r>
+                        <a:rPr sz="1100" b="0">
+                          <a:solidFill>
+                            <a:srgbClr val="465461"/>
+                          </a:solidFill>
+                          <a:latin typeface="Arial"/>
+                        </a:rPr>
+                        <a:t>Dataset pequeño o usuarios con pocos posts</a:t>
+                      </a:r>
+                    </a:p>
+                  </a:txBody>
+                  <a:tcPr marL="45000" marR="45000" marT="25000" marB="25000" anchor="ctr">
+                    <a:solidFill>
+                      <a:srgbClr val="F1F2F6"/>
+                    </a:solidFill>
+                  </a:tcPr>
+                </a:tc>
+              </a:tr>
+              <a:tr h="365760">
+                <a:tc>
+                  <a:txBody>
+                    <a:bodyPr/>
+                    <a:lstStyle/>
+                    <a:p>
+                      <a:r>
+                        <a:rPr sz="1100" b="0">
+                          <a:solidFill>
+                            <a:srgbClr val="465461"/>
+                          </a:solidFill>
+                          <a:latin typeface="Arial"/>
+                        </a:rPr>
+                        <a:t>B — full centroid</a:t>
+                      </a:r>
+                    </a:p>
+                  </a:txBody>
+                  <a:tcPr marL="45000" marR="45000" marT="25000" marB="25000" anchor="ctr">
+                    <a:solidFill>
+                      <a:srgbClr val="FFFFFF"/>
+                    </a:solidFill>
+                  </a:tcPr>
+                </a:tc>
+                <a:tc>
+                  <a:txBody>
+                    <a:bodyPr/>
+                    <a:lstStyle/>
+                    <a:p>
+                      <a:r>
+                        <a:rPr sz="1100" b="0">
+                          <a:solidFill>
+                            <a:srgbClr val="465461"/>
+                          </a:solidFill>
+                          <a:latin typeface="Arial"/>
+                        </a:rPr>
+                        <a:t>todos</a:t>
+                      </a:r>
+                    </a:p>
+                  </a:txBody>
+                  <a:tcPr marL="45000" marR="45000" marT="25000" marB="25000" anchor="ctr">
+                    <a:solidFill>
+                      <a:srgbClr val="FFFFFF"/>
+                    </a:solidFill>
+                  </a:tcPr>
+                </a:tc>
+                <a:tc>
+                  <a:txBody>
+                    <a:bodyPr/>
+                    <a:lstStyle/>
+                    <a:p>
+                      <a:r>
+                        <a:rPr sz="1100" b="0">
+                          <a:solidFill>
+                            <a:srgbClr val="465461"/>
+                          </a:solidFill>
+                          <a:latin typeface="Arial"/>
+                        </a:rPr>
+                        <a:t>~9 h</a:t>
+                      </a:r>
+                    </a:p>
+                  </a:txBody>
+                  <a:tcPr marL="45000" marR="45000" marT="25000" marB="25000" anchor="ctr">
+                    <a:solidFill>
+                      <a:srgbClr val="FFFFFF"/>
+                    </a:solidFill>
+                  </a:tcPr>
+                </a:tc>
+                <a:tc>
+                  <a:txBody>
+                    <a:bodyPr/>
+                    <a:lstStyle/>
+                    <a:p>
+                      <a:r>
+                        <a:rPr sz="1100" b="0">
+                          <a:solidFill>
+                            <a:srgbClr val="465461"/>
+                          </a:solidFill>
+                          <a:latin typeface="Arial"/>
+                        </a:rPr>
+                        <a:t>1.000</a:t>
+                      </a:r>
+                    </a:p>
+                  </a:txBody>
+                  <a:tcPr marL="45000" marR="45000" marT="25000" marB="25000" anchor="ctr">
+                    <a:solidFill>
+                      <a:srgbClr val="FFFFFF"/>
+                    </a:solidFill>
+                  </a:tcPr>
+                </a:tc>
+                <a:tc>
+                  <a:txBody>
+                    <a:bodyPr/>
+                    <a:lstStyle/>
+                    <a:p>
+                      <a:r>
+                        <a:rPr sz="1100" b="0">
+                          <a:solidFill>
+                            <a:srgbClr val="465461"/>
+                          </a:solidFill>
+                          <a:latin typeface="Arial"/>
+                        </a:rPr>
+                        <a:t>Solo como referencia — inviable en producción</a:t>
+                      </a:r>
+                    </a:p>
+                  </a:txBody>
+                  <a:tcPr marL="45000" marR="45000" marT="25000" marB="25000" anchor="ctr">
+                    <a:solidFill>
+                      <a:srgbClr val="FFFFFF"/>
+                    </a:solidFill>
+                  </a:tcPr>
+                </a:tc>
+              </a:tr>
+              <a:tr h="365760">
+                <a:tc>
+                  <a:txBody>
+                    <a:bodyPr/>
+                    <a:lstStyle/>
+                    <a:p>
+                      <a:r>
+                        <a:rPr sz="1100" b="0">
+                          <a:solidFill>
+                            <a:srgbClr val="465461"/>
+                          </a:solidFill>
+                          <a:latin typeface="Arial"/>
+                        </a:rPr>
+                        <a:t>C — top-50</a:t>
+                      </a:r>
+                    </a:p>
+                  </a:txBody>
+                  <a:tcPr marL="45000" marR="45000" marT="25000" marB="25000" anchor="ctr">
+                    <a:solidFill>
+                      <a:srgbClr val="F1F2F6"/>
+                    </a:solidFill>
+                  </a:tcPr>
+                </a:tc>
+                <a:tc>
+                  <a:txBody>
+                    <a:bodyPr/>
+                    <a:lstStyle/>
+                    <a:p>
+                      <a:r>
+                        <a:rPr sz="1100" b="0">
+                          <a:solidFill>
+                            <a:srgbClr val="465461"/>
+                          </a:solidFill>
+                          <a:latin typeface="Arial"/>
+                        </a:rPr>
+                        <a:t>50 más largos</a:t>
+                      </a:r>
+                    </a:p>
+                  </a:txBody>
+                  <a:tcPr marL="45000" marR="45000" marT="25000" marB="25000" anchor="ctr">
+                    <a:solidFill>
+                      <a:srgbClr val="F1F2F6"/>
+                    </a:solidFill>
+                  </a:tcPr>
+                </a:tc>
+                <a:tc>
+                  <a:txBody>
+                    <a:bodyPr/>
+                    <a:lstStyle/>
+                    <a:p>
+                      <a:r>
+                        <a:rPr sz="1100" b="0">
+                          <a:solidFill>
+                            <a:srgbClr val="465461"/>
+                          </a:solidFill>
+                          <a:latin typeface="Arial"/>
+                        </a:rPr>
+                        <a:t>2h 35min</a:t>
+                      </a:r>
+                    </a:p>
+                  </a:txBody>
+                  <a:tcPr marL="45000" marR="45000" marT="25000" marB="25000" anchor="ctr">
+                    <a:solidFill>
+                      <a:srgbClr val="F1F2F6"/>
+                    </a:solidFill>
+                  </a:tcPr>
+                </a:tc>
+                <a:tc>
+                  <a:txBody>
+                    <a:bodyPr/>
+                    <a:lstStyle/>
+                    <a:p>
+                      <a:r>
+                        <a:rPr sz="1100" b="0">
+                          <a:solidFill>
+                            <a:srgbClr val="465461"/>
+                          </a:solidFill>
+                          <a:latin typeface="Arial"/>
+                        </a:rPr>
+                        <a:t>0.799</a:t>
+                      </a:r>
+                    </a:p>
+                  </a:txBody>
+                  <a:tcPr marL="45000" marR="45000" marT="25000" marB="25000" anchor="ctr">
+                    <a:solidFill>
+                      <a:srgbClr val="F1F2F6"/>
+                    </a:solidFill>
+                  </a:tcPr>
+                </a:tc>
+                <a:tc>
+                  <a:txBody>
+                    <a:bodyPr/>
+                    <a:lstStyle/>
+                    <a:p>
+                      <a:r>
+                        <a:rPr sz="1100" b="0">
+                          <a:solidFill>
+                            <a:srgbClr val="465461"/>
+                          </a:solidFill>
+                          <a:latin typeface="Arial"/>
+                        </a:rPr>
+                        <a:t>GPU limitada o usuarios con &lt;100 posts típicos</a:t>
+                      </a:r>
+                    </a:p>
+                  </a:txBody>
+                  <a:tcPr marL="45000" marR="45000" marT="25000" marB="25000" anchor="ctr">
+                    <a:solidFill>
+                      <a:srgbClr val="F1F2F6"/>
+                    </a:solidFill>
+                  </a:tcPr>
+                </a:tc>
+              </a:tr>
+              <a:tr h="365760">
+                <a:tc>
+                  <a:txBody>
+                    <a:bodyPr/>
+                    <a:lstStyle/>
+                    <a:p>
+                      <a:r>
+                        <a:rPr sz="1100" b="0">
+                          <a:solidFill>
+                            <a:srgbClr val="465461"/>
+                          </a:solidFill>
+                          <a:latin typeface="Arial"/>
+                        </a:rPr>
+                        <a:t>D — top-100</a:t>
+                      </a:r>
+                    </a:p>
+                  </a:txBody>
+                  <a:tcPr marL="45000" marR="45000" marT="25000" marB="25000" anchor="ctr">
+                    <a:solidFill>
+                      <a:srgbClr val="FFFFFF"/>
+                    </a:solidFill>
+                  </a:tcPr>
+                </a:tc>
+                <a:tc>
+                  <a:txBody>
+                    <a:bodyPr/>
+                    <a:lstStyle/>
+                    <a:p>
+                      <a:r>
+                        <a:rPr sz="1100" b="0">
+                          <a:solidFill>
+                            <a:srgbClr val="465461"/>
+                          </a:solidFill>
+                          <a:latin typeface="Arial"/>
+                        </a:rPr>
+                        <a:t>100 más largos</a:t>
+                      </a:r>
+                    </a:p>
+                  </a:txBody>
+                  <a:tcPr marL="45000" marR="45000" marT="25000" marB="25000" anchor="ctr">
+                    <a:solidFill>
+                      <a:srgbClr val="FFFFFF"/>
+                    </a:solidFill>
+                  </a:tcPr>
+                </a:tc>
+                <a:tc>
+                  <a:txBody>
+                    <a:bodyPr/>
+                    <a:lstStyle/>
+                    <a:p>
+                      <a:r>
+                        <a:rPr sz="1100" b="0">
+                          <a:solidFill>
+                            <a:srgbClr val="465461"/>
+                          </a:solidFill>
+                          <a:latin typeface="Arial"/>
+                        </a:rPr>
+                        <a:t>3h 33min</a:t>
+                      </a:r>
+                    </a:p>
+                  </a:txBody>
+                  <a:tcPr marL="45000" marR="45000" marT="25000" marB="25000" anchor="ctr">
+                    <a:solidFill>
+                      <a:srgbClr val="FFFFFF"/>
+                    </a:solidFill>
+                  </a:tcPr>
+                </a:tc>
+                <a:tc>
+                  <a:txBody>
+                    <a:bodyPr/>
+                    <a:lstStyle/>
+                    <a:p>
+                      <a:r>
+                        <a:rPr sz="1100" b="0">
+                          <a:solidFill>
+                            <a:srgbClr val="465461"/>
+                          </a:solidFill>
+                          <a:latin typeface="Arial"/>
+                        </a:rPr>
+                        <a:t>0.860</a:t>
+                      </a:r>
+                    </a:p>
+                  </a:txBody>
+                  <a:tcPr marL="45000" marR="45000" marT="25000" marB="25000" anchor="ctr">
+                    <a:solidFill>
+                      <a:srgbClr val="FFFFFF"/>
+                    </a:solidFill>
+                  </a:tcPr>
+                </a:tc>
+                <a:tc>
+                  <a:txBody>
+                    <a:bodyPr/>
+                    <a:lstStyle/>
+                    <a:p>
+                      <a:r>
+                        <a:rPr sz="1100" b="0">
+                          <a:solidFill>
+                            <a:srgbClr val="465461"/>
+                          </a:solidFill>
+                          <a:latin typeface="Arial"/>
+                        </a:rPr>
+                        <a:t>Caso general — mejor ratio fidelidad/coste</a:t>
+                      </a:r>
+                    </a:p>
+                  </a:txBody>
+                  <a:tcPr marL="45000" marR="45000" marT="25000" marB="25000" anchor="ctr">
+                    <a:solidFill>
+                      <a:srgbClr val="FFFFFF"/>
+                    </a:solidFill>
+                  </a:tcPr>
+                </a:tc>
+              </a:tr>
+              <a:tr h="365760">
+                <a:tc>
+                  <a:txBody>
+                    <a:bodyPr/>
+                    <a:lstStyle/>
+                    <a:p>
+                      <a:r>
+                        <a:rPr sz="1100" b="0">
+                          <a:solidFill>
+                            <a:srgbClr val="465461"/>
+                          </a:solidFill>
+                          <a:latin typeface="Arial"/>
+                        </a:rPr>
+                        <a:t>E — top-150</a:t>
+                      </a:r>
+                    </a:p>
+                  </a:txBody>
+                  <a:tcPr marL="45000" marR="45000" marT="25000" marB="25000" anchor="ctr">
+                    <a:solidFill>
+                      <a:srgbClr val="F1F2F6"/>
+                    </a:solidFill>
+                  </a:tcPr>
+                </a:tc>
+                <a:tc>
+                  <a:txBody>
+                    <a:bodyPr/>
+                    <a:lstStyle/>
+                    <a:p>
+                      <a:r>
+                        <a:rPr sz="1100" b="0">
+                          <a:solidFill>
+                            <a:srgbClr val="465461"/>
+                          </a:solidFill>
+                          <a:latin typeface="Arial"/>
+                        </a:rPr>
+                        <a:t>150 más largos</a:t>
+                      </a:r>
+                    </a:p>
+                  </a:txBody>
+                  <a:tcPr marL="45000" marR="45000" marT="25000" marB="25000" anchor="ctr">
+                    <a:solidFill>
+                      <a:srgbClr val="F1F2F6"/>
+                    </a:solidFill>
+                  </a:tcPr>
+                </a:tc>
+                <a:tc>
+                  <a:txBody>
+                    <a:bodyPr/>
+                    <a:lstStyle/>
+                    <a:p>
+                      <a:r>
+                        <a:rPr sz="1100" b="0">
+                          <a:solidFill>
+                            <a:srgbClr val="465461"/>
+                          </a:solidFill>
+                          <a:latin typeface="Arial"/>
+                        </a:rPr>
+                        <a:t>4h 12min</a:t>
+                      </a:r>
+                    </a:p>
+                  </a:txBody>
+                  <a:tcPr marL="45000" marR="45000" marT="25000" marB="25000" anchor="ctr">
+                    <a:solidFill>
+                      <a:srgbClr val="F1F2F6"/>
+                    </a:solidFill>
+                  </a:tcPr>
+                </a:tc>
+                <a:tc>
+                  <a:txBody>
+                    <a:bodyPr/>
+                    <a:lstStyle/>
+                    <a:p>
+                      <a:r>
+                        <a:rPr sz="1100" b="0">
+                          <a:solidFill>
+                            <a:srgbClr val="465461"/>
+                          </a:solidFill>
+                          <a:latin typeface="Arial"/>
+                        </a:rPr>
+                        <a:t>0.896</a:t>
+                      </a:r>
+                    </a:p>
+                  </a:txBody>
+                  <a:tcPr marL="45000" marR="45000" marT="25000" marB="25000" anchor="ctr">
+                    <a:solidFill>
+                      <a:srgbClr val="F1F2F6"/>
+                    </a:solidFill>
+                  </a:tcPr>
+                </a:tc>
+                <a:tc>
+                  <a:txBody>
+                    <a:bodyPr/>
+                    <a:lstStyle/>
+                    <a:p>
+                      <a:r>
+                        <a:rPr sz="1100" b="0">
+                          <a:solidFill>
+                            <a:srgbClr val="465461"/>
+                          </a:solidFill>
+                          <a:latin typeface="Arial"/>
+                        </a:rPr>
+                        <a:t>Máxima fidelidad con presupuesto de tiempo</a:t>
+                      </a:r>
+                    </a:p>
+                  </a:txBody>
+                  <a:tcPr marL="45000" marR="45000" marT="25000" marB="25000" anchor="ctr">
+                    <a:solidFill>
+                      <a:srgbClr val="F1F2F6"/>
+                    </a:solidFill>
+                  </a:tcPr>
+                </a:tc>
+              </a:tr>
+            </a:tbl>
+          </a:graphicData>
+        </a:graphic>
+      </p:graphicFrame>
       <p:sp>
         <p:nvSpPr>
           <p:cNvPr id="5" name="TextBox 4"/>
@@ -8085,1272 +8306,7 @@
         </p:nvSpPr>
         <p:spPr>
           <a:xfrm>
-            <a:off x="1097280" y="2706760"/>
-            <a:ext cx="1920240" cy="365760"/>
-          </a:xfrm>
-          <a:prstGeom prst="rect">
-            <a:avLst/>
-          </a:prstGeom>
-          <a:noFill/>
-        </p:spPr>
-        <p:txBody>
-          <a:bodyPr wrap="square">
-            <a:spAutoFit/>
-          </a:bodyPr>
-          <a:lstStyle/>
-          <a:p>
-            <a:pPr algn="l"/>
-            <a:r>
-              <a:rPr sz="1200" b="1">
-                <a:solidFill>
-                  <a:srgbClr val="FFFFFF"/>
-                </a:solidFill>
-                <a:latin typeface="Arial"/>
-              </a:rPr>
-              <a:t>Estrategia</a:t>
-            </a:r>
-          </a:p>
-        </p:txBody>
-      </p:sp>
-      <p:sp>
-        <p:nvSpPr>
-          <p:cNvPr id="6" name="TextBox 5"/>
-          <p:cNvSpPr txBox="1"/>
-          <p:nvPr/>
-        </p:nvSpPr>
-        <p:spPr>
-          <a:xfrm>
-            <a:off x="3108960" y="2706760"/>
-            <a:ext cx="1920240" cy="365760"/>
-          </a:xfrm>
-          <a:prstGeom prst="rect">
-            <a:avLst/>
-          </a:prstGeom>
-          <a:noFill/>
-        </p:spPr>
-        <p:txBody>
-          <a:bodyPr wrap="square">
-            <a:spAutoFit/>
-          </a:bodyPr>
-          <a:lstStyle/>
-          <a:p>
-            <a:pPr algn="l"/>
-            <a:r>
-              <a:rPr sz="1200" b="1">
-                <a:solidFill>
-                  <a:srgbClr val="FFFFFF"/>
-                </a:solidFill>
-                <a:latin typeface="Arial"/>
-              </a:rPr>
-              <a:t>Posts por usuario</a:t>
-            </a:r>
-          </a:p>
-        </p:txBody>
-      </p:sp>
-      <p:sp>
-        <p:nvSpPr>
-          <p:cNvPr id="7" name="TextBox 6"/>
-          <p:cNvSpPr txBox="1"/>
-          <p:nvPr/>
-        </p:nvSpPr>
-        <p:spPr>
-          <a:xfrm>
-            <a:off x="5120640" y="2706760"/>
-            <a:ext cx="1920240" cy="365760"/>
-          </a:xfrm>
-          <a:prstGeom prst="rect">
-            <a:avLst/>
-          </a:prstGeom>
-          <a:noFill/>
-        </p:spPr>
-        <p:txBody>
-          <a:bodyPr wrap="square">
-            <a:spAutoFit/>
-          </a:bodyPr>
-          <a:lstStyle/>
-          <a:p>
-            <a:pPr algn="l"/>
-            <a:r>
-              <a:rPr sz="1200" b="1">
-                <a:solidFill>
-                  <a:srgbClr val="FFFFFF"/>
-                </a:solidFill>
-                <a:latin typeface="Arial"/>
-              </a:rPr>
-              <a:t>GPU (IronMarch)</a:t>
-            </a:r>
-          </a:p>
-        </p:txBody>
-      </p:sp>
-      <p:sp>
-        <p:nvSpPr>
-          <p:cNvPr id="8" name="TextBox 7"/>
-          <p:cNvSpPr txBox="1"/>
-          <p:nvPr/>
-        </p:nvSpPr>
-        <p:spPr>
-          <a:xfrm>
-            <a:off x="7132320" y="2706760"/>
-            <a:ext cx="1920240" cy="365760"/>
-          </a:xfrm>
-          <a:prstGeom prst="rect">
-            <a:avLst/>
-          </a:prstGeom>
-          <a:noFill/>
-        </p:spPr>
-        <p:txBody>
-          <a:bodyPr wrap="square">
-            <a:spAutoFit/>
-          </a:bodyPr>
-          <a:lstStyle/>
-          <a:p>
-            <a:pPr algn="l"/>
-            <a:r>
-              <a:rPr sz="1200" b="1">
-                <a:solidFill>
-                  <a:srgbClr val="FFFFFF"/>
-                </a:solidFill>
-                <a:latin typeface="Arial"/>
-              </a:rPr>
-              <a:t>Spearman ρ vs. full</a:t>
-            </a:r>
-          </a:p>
-        </p:txBody>
-      </p:sp>
-      <p:sp>
-        <p:nvSpPr>
-          <p:cNvPr id="9" name="TextBox 8"/>
-          <p:cNvSpPr txBox="1"/>
-          <p:nvPr/>
-        </p:nvSpPr>
-        <p:spPr>
-          <a:xfrm>
-            <a:off x="9144000" y="2706760"/>
-            <a:ext cx="1920240" cy="365760"/>
-          </a:xfrm>
-          <a:prstGeom prst="rect">
-            <a:avLst/>
-          </a:prstGeom>
-          <a:noFill/>
-        </p:spPr>
-        <p:txBody>
-          <a:bodyPr wrap="square">
-            <a:spAutoFit/>
-          </a:bodyPr>
-          <a:lstStyle/>
-          <a:p>
-            <a:pPr algn="l"/>
-            <a:r>
-              <a:rPr sz="1200" b="1">
-                <a:solidFill>
-                  <a:srgbClr val="FFFFFF"/>
-                </a:solidFill>
-                <a:latin typeface="Arial"/>
-              </a:rPr>
-              <a:t>Cuándo usarla</a:t>
-            </a:r>
-          </a:p>
-        </p:txBody>
-      </p:sp>
-      <p:sp>
-        <p:nvSpPr>
-          <p:cNvPr id="10" name="Rectangle 9"/>
-          <p:cNvSpPr/>
-          <p:nvPr/>
-        </p:nvSpPr>
-        <p:spPr>
-          <a:xfrm>
-            <a:off x="1051560" y="3017520"/>
-            <a:ext cx="10058400" cy="615315"/>
-          </a:xfrm>
-          <a:prstGeom prst="rect">
-            <a:avLst/>
-          </a:prstGeom>
-          <a:solidFill>
-            <a:srgbClr val="F1F2F6"/>
-          </a:solidFill>
-          <a:ln>
-            <a:noFill/>
-          </a:ln>
-        </p:spPr>
-        <p:style>
-          <a:lnRef idx="1">
-            <a:schemeClr val="accent1"/>
-          </a:lnRef>
-          <a:fillRef idx="3">
-            <a:schemeClr val="accent1"/>
-          </a:fillRef>
-          <a:effectRef idx="2">
-            <a:schemeClr val="accent1"/>
-          </a:effectRef>
-          <a:fontRef idx="minor">
-            <a:schemeClr val="lt1"/>
-          </a:fontRef>
-        </p:style>
-        <p:txBody>
-          <a:bodyPr rtlCol="0" anchor="ctr"/>
-          <a:lstStyle/>
-          <a:p>
-            <a:pPr algn="ctr"/>
-          </a:p>
-        </p:txBody>
-      </p:sp>
-      <p:sp>
-        <p:nvSpPr>
-          <p:cNvPr id="11" name="TextBox 10"/>
-          <p:cNvSpPr txBox="1"/>
-          <p:nvPr/>
-        </p:nvSpPr>
-        <p:spPr>
-          <a:xfrm>
-            <a:off x="1097280" y="3057520"/>
-            <a:ext cx="1920240" cy="615315"/>
-          </a:xfrm>
-          <a:prstGeom prst="rect">
-            <a:avLst/>
-          </a:prstGeom>
-          <a:noFill/>
-        </p:spPr>
-        <p:txBody>
-          <a:bodyPr wrap="square">
-            <a:spAutoFit/>
-          </a:bodyPr>
-          <a:lstStyle/>
-          <a:p>
-            <a:pPr algn="l"/>
-            <a:r>
-              <a:rPr sz="1100" b="0">
-                <a:solidFill>
-                  <a:srgbClr val="465461"/>
-                </a:solidFill>
-                <a:latin typeface="Arial"/>
-              </a:rPr>
-              <a:t>A — concat todo</a:t>
-            </a:r>
-          </a:p>
-        </p:txBody>
-      </p:sp>
-      <p:sp>
-        <p:nvSpPr>
-          <p:cNvPr id="12" name="TextBox 11"/>
-          <p:cNvSpPr txBox="1"/>
-          <p:nvPr/>
-        </p:nvSpPr>
-        <p:spPr>
-          <a:xfrm>
-            <a:off x="3108960" y="3057520"/>
-            <a:ext cx="1920240" cy="615315"/>
-          </a:xfrm>
-          <a:prstGeom prst="rect">
-            <a:avLst/>
-          </a:prstGeom>
-          <a:noFill/>
-        </p:spPr>
-        <p:txBody>
-          <a:bodyPr wrap="square">
-            <a:spAutoFit/>
-          </a:bodyPr>
-          <a:lstStyle/>
-          <a:p>
-            <a:pPr algn="l"/>
-            <a:r>
-              <a:rPr sz="1100" b="0">
-                <a:solidFill>
-                  <a:srgbClr val="465461"/>
-                </a:solidFill>
-                <a:latin typeface="Arial"/>
-              </a:rPr>
-              <a:t>todos (máx. 50K chars)</a:t>
-            </a:r>
-          </a:p>
-        </p:txBody>
-      </p:sp>
-      <p:sp>
-        <p:nvSpPr>
-          <p:cNvPr id="13" name="TextBox 12"/>
-          <p:cNvSpPr txBox="1"/>
-          <p:nvPr/>
-        </p:nvSpPr>
-        <p:spPr>
-          <a:xfrm>
-            <a:off x="5120640" y="3057520"/>
-            <a:ext cx="1920240" cy="615315"/>
-          </a:xfrm>
-          <a:prstGeom prst="rect">
-            <a:avLst/>
-          </a:prstGeom>
-          <a:noFill/>
-        </p:spPr>
-        <p:txBody>
-          <a:bodyPr wrap="square">
-            <a:spAutoFit/>
-          </a:bodyPr>
-          <a:lstStyle/>
-          <a:p>
-            <a:pPr algn="l"/>
-            <a:r>
-              <a:rPr sz="1100" b="0">
-                <a:solidFill>
-                  <a:srgbClr val="465461"/>
-                </a:solidFill>
-                <a:latin typeface="Arial"/>
-              </a:rPr>
-              <a:t>~12 min</a:t>
-            </a:r>
-          </a:p>
-        </p:txBody>
-      </p:sp>
-      <p:sp>
-        <p:nvSpPr>
-          <p:cNvPr id="14" name="TextBox 13"/>
-          <p:cNvSpPr txBox="1"/>
-          <p:nvPr/>
-        </p:nvSpPr>
-        <p:spPr>
-          <a:xfrm>
-            <a:off x="7132320" y="3057520"/>
-            <a:ext cx="1920240" cy="615315"/>
-          </a:xfrm>
-          <a:prstGeom prst="rect">
-            <a:avLst/>
-          </a:prstGeom>
-          <a:noFill/>
-        </p:spPr>
-        <p:txBody>
-          <a:bodyPr wrap="square">
-            <a:spAutoFit/>
-          </a:bodyPr>
-          <a:lstStyle/>
-          <a:p>
-            <a:pPr algn="l"/>
-            <a:r>
-              <a:rPr sz="1100" b="0">
-                <a:solidFill>
-                  <a:srgbClr val="465461"/>
-                </a:solidFill>
-                <a:latin typeface="Arial"/>
-              </a:rPr>
-              <a:t>—</a:t>
-            </a:r>
-          </a:p>
-        </p:txBody>
-      </p:sp>
-      <p:sp>
-        <p:nvSpPr>
-          <p:cNvPr id="15" name="TextBox 14"/>
-          <p:cNvSpPr txBox="1"/>
-          <p:nvPr/>
-        </p:nvSpPr>
-        <p:spPr>
-          <a:xfrm>
-            <a:off x="9144000" y="3057520"/>
-            <a:ext cx="1920240" cy="615315"/>
-          </a:xfrm>
-          <a:prstGeom prst="rect">
-            <a:avLst/>
-          </a:prstGeom>
-          <a:noFill/>
-        </p:spPr>
-        <p:txBody>
-          <a:bodyPr wrap="square">
-            <a:spAutoFit/>
-          </a:bodyPr>
-          <a:lstStyle/>
-          <a:p>
-            <a:pPr algn="l"/>
-            <a:r>
-              <a:rPr sz="1100" b="0">
-                <a:solidFill>
-                  <a:srgbClr val="465461"/>
-                </a:solidFill>
-                <a:latin typeface="Arial"/>
-              </a:rPr>
-              <a:t>Dataset pequeño o usuarios con pocos posts</a:t>
-            </a:r>
-          </a:p>
-        </p:txBody>
-      </p:sp>
-      <p:sp>
-        <p:nvSpPr>
-          <p:cNvPr id="16" name="Rectangle 15"/>
-          <p:cNvSpPr/>
-          <p:nvPr/>
-        </p:nvSpPr>
-        <p:spPr>
-          <a:xfrm>
-            <a:off x="1051560" y="3632835"/>
-            <a:ext cx="10058400" cy="615315"/>
-          </a:xfrm>
-          <a:prstGeom prst="rect">
-            <a:avLst/>
-          </a:prstGeom>
-          <a:solidFill>
-            <a:srgbClr val="FFFFFF"/>
-          </a:solidFill>
-          <a:ln>
-            <a:noFill/>
-          </a:ln>
-        </p:spPr>
-        <p:style>
-          <a:lnRef idx="1">
-            <a:schemeClr val="accent1"/>
-          </a:lnRef>
-          <a:fillRef idx="3">
-            <a:schemeClr val="accent1"/>
-          </a:fillRef>
-          <a:effectRef idx="2">
-            <a:schemeClr val="accent1"/>
-          </a:effectRef>
-          <a:fontRef idx="minor">
-            <a:schemeClr val="lt1"/>
-          </a:fontRef>
-        </p:style>
-        <p:txBody>
-          <a:bodyPr rtlCol="0" anchor="ctr"/>
-          <a:lstStyle/>
-          <a:p>
-            <a:pPr algn="ctr"/>
-          </a:p>
-        </p:txBody>
-      </p:sp>
-      <p:sp>
-        <p:nvSpPr>
-          <p:cNvPr id="17" name="TextBox 16"/>
-          <p:cNvSpPr txBox="1"/>
-          <p:nvPr/>
-        </p:nvSpPr>
-        <p:spPr>
-          <a:xfrm>
-            <a:off x="1097280" y="3672835"/>
-            <a:ext cx="1920240" cy="615315"/>
-          </a:xfrm>
-          <a:prstGeom prst="rect">
-            <a:avLst/>
-          </a:prstGeom>
-          <a:noFill/>
-        </p:spPr>
-        <p:txBody>
-          <a:bodyPr wrap="square">
-            <a:spAutoFit/>
-          </a:bodyPr>
-          <a:lstStyle/>
-          <a:p>
-            <a:pPr algn="l"/>
-            <a:r>
-              <a:rPr sz="1100" b="0">
-                <a:solidFill>
-                  <a:srgbClr val="465461"/>
-                </a:solidFill>
-                <a:latin typeface="Arial"/>
-              </a:rPr>
-              <a:t>B — full centroid</a:t>
-            </a:r>
-          </a:p>
-        </p:txBody>
-      </p:sp>
-      <p:sp>
-        <p:nvSpPr>
-          <p:cNvPr id="18" name="TextBox 17"/>
-          <p:cNvSpPr txBox="1"/>
-          <p:nvPr/>
-        </p:nvSpPr>
-        <p:spPr>
-          <a:xfrm>
-            <a:off x="3108960" y="3672835"/>
-            <a:ext cx="1920240" cy="615315"/>
-          </a:xfrm>
-          <a:prstGeom prst="rect">
-            <a:avLst/>
-          </a:prstGeom>
-          <a:noFill/>
-        </p:spPr>
-        <p:txBody>
-          <a:bodyPr wrap="square">
-            <a:spAutoFit/>
-          </a:bodyPr>
-          <a:lstStyle/>
-          <a:p>
-            <a:pPr algn="l"/>
-            <a:r>
-              <a:rPr sz="1100" b="0">
-                <a:solidFill>
-                  <a:srgbClr val="465461"/>
-                </a:solidFill>
-                <a:latin typeface="Arial"/>
-              </a:rPr>
-              <a:t>todos</a:t>
-            </a:r>
-          </a:p>
-        </p:txBody>
-      </p:sp>
-      <p:sp>
-        <p:nvSpPr>
-          <p:cNvPr id="19" name="TextBox 18"/>
-          <p:cNvSpPr txBox="1"/>
-          <p:nvPr/>
-        </p:nvSpPr>
-        <p:spPr>
-          <a:xfrm>
-            <a:off x="5120640" y="3672835"/>
-            <a:ext cx="1920240" cy="615315"/>
-          </a:xfrm>
-          <a:prstGeom prst="rect">
-            <a:avLst/>
-          </a:prstGeom>
-          <a:noFill/>
-        </p:spPr>
-        <p:txBody>
-          <a:bodyPr wrap="square">
-            <a:spAutoFit/>
-          </a:bodyPr>
-          <a:lstStyle/>
-          <a:p>
-            <a:pPr algn="l"/>
-            <a:r>
-              <a:rPr sz="1100" b="0">
-                <a:solidFill>
-                  <a:srgbClr val="465461"/>
-                </a:solidFill>
-                <a:latin typeface="Arial"/>
-              </a:rPr>
-              <a:t>~9 h</a:t>
-            </a:r>
-          </a:p>
-        </p:txBody>
-      </p:sp>
-      <p:sp>
-        <p:nvSpPr>
-          <p:cNvPr id="20" name="TextBox 19"/>
-          <p:cNvSpPr txBox="1"/>
-          <p:nvPr/>
-        </p:nvSpPr>
-        <p:spPr>
-          <a:xfrm>
-            <a:off x="7132320" y="3672835"/>
-            <a:ext cx="1920240" cy="615315"/>
-          </a:xfrm>
-          <a:prstGeom prst="rect">
-            <a:avLst/>
-          </a:prstGeom>
-          <a:noFill/>
-        </p:spPr>
-        <p:txBody>
-          <a:bodyPr wrap="square">
-            <a:spAutoFit/>
-          </a:bodyPr>
-          <a:lstStyle/>
-          <a:p>
-            <a:pPr algn="l"/>
-            <a:r>
-              <a:rPr sz="1100" b="0">
-                <a:solidFill>
-                  <a:srgbClr val="465461"/>
-                </a:solidFill>
-                <a:latin typeface="Arial"/>
-              </a:rPr>
-              <a:t>1.000</a:t>
-            </a:r>
-          </a:p>
-        </p:txBody>
-      </p:sp>
-      <p:sp>
-        <p:nvSpPr>
-          <p:cNvPr id="21" name="TextBox 20"/>
-          <p:cNvSpPr txBox="1"/>
-          <p:nvPr/>
-        </p:nvSpPr>
-        <p:spPr>
-          <a:xfrm>
-            <a:off x="9144000" y="3672835"/>
-            <a:ext cx="1920240" cy="615315"/>
-          </a:xfrm>
-          <a:prstGeom prst="rect">
-            <a:avLst/>
-          </a:prstGeom>
-          <a:noFill/>
-        </p:spPr>
-        <p:txBody>
-          <a:bodyPr wrap="square">
-            <a:spAutoFit/>
-          </a:bodyPr>
-          <a:lstStyle/>
-          <a:p>
-            <a:pPr algn="l"/>
-            <a:r>
-              <a:rPr sz="1100" b="0">
-                <a:solidFill>
-                  <a:srgbClr val="465461"/>
-                </a:solidFill>
-                <a:latin typeface="Arial"/>
-              </a:rPr>
-              <a:t>Solo como referencia — inviable en producción</a:t>
-            </a:r>
-          </a:p>
-        </p:txBody>
-      </p:sp>
-      <p:sp>
-        <p:nvSpPr>
-          <p:cNvPr id="22" name="Rectangle 21"/>
-          <p:cNvSpPr/>
-          <p:nvPr/>
-        </p:nvSpPr>
-        <p:spPr>
-          <a:xfrm>
-            <a:off x="1051560" y="4248150"/>
-            <a:ext cx="10058400" cy="615315"/>
-          </a:xfrm>
-          <a:prstGeom prst="rect">
-            <a:avLst/>
-          </a:prstGeom>
-          <a:solidFill>
-            <a:srgbClr val="F1F2F6"/>
-          </a:solidFill>
-          <a:ln>
-            <a:noFill/>
-          </a:ln>
-        </p:spPr>
-        <p:style>
-          <a:lnRef idx="1">
-            <a:schemeClr val="accent1"/>
-          </a:lnRef>
-          <a:fillRef idx="3">
-            <a:schemeClr val="accent1"/>
-          </a:fillRef>
-          <a:effectRef idx="2">
-            <a:schemeClr val="accent1"/>
-          </a:effectRef>
-          <a:fontRef idx="minor">
-            <a:schemeClr val="lt1"/>
-          </a:fontRef>
-        </p:style>
-        <p:txBody>
-          <a:bodyPr rtlCol="0" anchor="ctr"/>
-          <a:lstStyle/>
-          <a:p>
-            <a:pPr algn="ctr"/>
-          </a:p>
-        </p:txBody>
-      </p:sp>
-      <p:sp>
-        <p:nvSpPr>
-          <p:cNvPr id="23" name="TextBox 22"/>
-          <p:cNvSpPr txBox="1"/>
-          <p:nvPr/>
-        </p:nvSpPr>
-        <p:spPr>
-          <a:xfrm>
-            <a:off x="1097280" y="4288150"/>
-            <a:ext cx="1920240" cy="615315"/>
-          </a:xfrm>
-          <a:prstGeom prst="rect">
-            <a:avLst/>
-          </a:prstGeom>
-          <a:noFill/>
-        </p:spPr>
-        <p:txBody>
-          <a:bodyPr wrap="square">
-            <a:spAutoFit/>
-          </a:bodyPr>
-          <a:lstStyle/>
-          <a:p>
-            <a:pPr algn="l"/>
-            <a:r>
-              <a:rPr sz="1100" b="0">
-                <a:solidFill>
-                  <a:srgbClr val="465461"/>
-                </a:solidFill>
-                <a:latin typeface="Arial"/>
-              </a:rPr>
-              <a:t>C — top-50</a:t>
-            </a:r>
-          </a:p>
-        </p:txBody>
-      </p:sp>
-      <p:sp>
-        <p:nvSpPr>
-          <p:cNvPr id="24" name="TextBox 23"/>
-          <p:cNvSpPr txBox="1"/>
-          <p:nvPr/>
-        </p:nvSpPr>
-        <p:spPr>
-          <a:xfrm>
-            <a:off x="3108960" y="4288150"/>
-            <a:ext cx="1920240" cy="615315"/>
-          </a:xfrm>
-          <a:prstGeom prst="rect">
-            <a:avLst/>
-          </a:prstGeom>
-          <a:noFill/>
-        </p:spPr>
-        <p:txBody>
-          <a:bodyPr wrap="square">
-            <a:spAutoFit/>
-          </a:bodyPr>
-          <a:lstStyle/>
-          <a:p>
-            <a:pPr algn="l"/>
-            <a:r>
-              <a:rPr sz="1100" b="0">
-                <a:solidFill>
-                  <a:srgbClr val="465461"/>
-                </a:solidFill>
-                <a:latin typeface="Arial"/>
-              </a:rPr>
-              <a:t>50 más largos</a:t>
-            </a:r>
-          </a:p>
-        </p:txBody>
-      </p:sp>
-      <p:sp>
-        <p:nvSpPr>
-          <p:cNvPr id="25" name="TextBox 24"/>
-          <p:cNvSpPr txBox="1"/>
-          <p:nvPr/>
-        </p:nvSpPr>
-        <p:spPr>
-          <a:xfrm>
-            <a:off x="5120640" y="4288150"/>
-            <a:ext cx="1920240" cy="615315"/>
-          </a:xfrm>
-          <a:prstGeom prst="rect">
-            <a:avLst/>
-          </a:prstGeom>
-          <a:noFill/>
-        </p:spPr>
-        <p:txBody>
-          <a:bodyPr wrap="square">
-            <a:spAutoFit/>
-          </a:bodyPr>
-          <a:lstStyle/>
-          <a:p>
-            <a:pPr algn="l"/>
-            <a:r>
-              <a:rPr sz="1100" b="0">
-                <a:solidFill>
-                  <a:srgbClr val="465461"/>
-                </a:solidFill>
-                <a:latin typeface="Arial"/>
-              </a:rPr>
-              <a:t>2h 35min</a:t>
-            </a:r>
-          </a:p>
-        </p:txBody>
-      </p:sp>
-      <p:sp>
-        <p:nvSpPr>
-          <p:cNvPr id="26" name="TextBox 25"/>
-          <p:cNvSpPr txBox="1"/>
-          <p:nvPr/>
-        </p:nvSpPr>
-        <p:spPr>
-          <a:xfrm>
-            <a:off x="7132320" y="4288150"/>
-            <a:ext cx="1920240" cy="615315"/>
-          </a:xfrm>
-          <a:prstGeom prst="rect">
-            <a:avLst/>
-          </a:prstGeom>
-          <a:noFill/>
-        </p:spPr>
-        <p:txBody>
-          <a:bodyPr wrap="square">
-            <a:spAutoFit/>
-          </a:bodyPr>
-          <a:lstStyle/>
-          <a:p>
-            <a:pPr algn="l"/>
-            <a:r>
-              <a:rPr sz="1100" b="0">
-                <a:solidFill>
-                  <a:srgbClr val="465461"/>
-                </a:solidFill>
-                <a:latin typeface="Arial"/>
-              </a:rPr>
-              <a:t>0.799</a:t>
-            </a:r>
-          </a:p>
-        </p:txBody>
-      </p:sp>
-      <p:sp>
-        <p:nvSpPr>
-          <p:cNvPr id="27" name="TextBox 26"/>
-          <p:cNvSpPr txBox="1"/>
-          <p:nvPr/>
-        </p:nvSpPr>
-        <p:spPr>
-          <a:xfrm>
-            <a:off x="9144000" y="4288150"/>
-            <a:ext cx="1920240" cy="615315"/>
-          </a:xfrm>
-          <a:prstGeom prst="rect">
-            <a:avLst/>
-          </a:prstGeom>
-          <a:noFill/>
-        </p:spPr>
-        <p:txBody>
-          <a:bodyPr wrap="square">
-            <a:spAutoFit/>
-          </a:bodyPr>
-          <a:lstStyle/>
-          <a:p>
-            <a:pPr algn="l"/>
-            <a:r>
-              <a:rPr sz="1100" b="0">
-                <a:solidFill>
-                  <a:srgbClr val="465461"/>
-                </a:solidFill>
-                <a:latin typeface="Arial"/>
-              </a:rPr>
-              <a:t>GPU limitada o usuarios con &lt;100 posts típicos</a:t>
-            </a:r>
-          </a:p>
-        </p:txBody>
-      </p:sp>
-      <p:sp>
-        <p:nvSpPr>
-          <p:cNvPr id="28" name="Rectangle 27"/>
-          <p:cNvSpPr/>
-          <p:nvPr/>
-        </p:nvSpPr>
-        <p:spPr>
-          <a:xfrm>
-            <a:off x="1051560" y="4863465"/>
-            <a:ext cx="10058400" cy="615315"/>
-          </a:xfrm>
-          <a:prstGeom prst="rect">
-            <a:avLst/>
-          </a:prstGeom>
-          <a:solidFill>
-            <a:srgbClr val="FFFFFF"/>
-          </a:solidFill>
-          <a:ln>
-            <a:noFill/>
-          </a:ln>
-        </p:spPr>
-        <p:style>
-          <a:lnRef idx="1">
-            <a:schemeClr val="accent1"/>
-          </a:lnRef>
-          <a:fillRef idx="3">
-            <a:schemeClr val="accent1"/>
-          </a:fillRef>
-          <a:effectRef idx="2">
-            <a:schemeClr val="accent1"/>
-          </a:effectRef>
-          <a:fontRef idx="minor">
-            <a:schemeClr val="lt1"/>
-          </a:fontRef>
-        </p:style>
-        <p:txBody>
-          <a:bodyPr rtlCol="0" anchor="ctr"/>
-          <a:lstStyle/>
-          <a:p>
-            <a:pPr algn="ctr"/>
-          </a:p>
-        </p:txBody>
-      </p:sp>
-      <p:sp>
-        <p:nvSpPr>
-          <p:cNvPr id="29" name="TextBox 28"/>
-          <p:cNvSpPr txBox="1"/>
-          <p:nvPr/>
-        </p:nvSpPr>
-        <p:spPr>
-          <a:xfrm>
-            <a:off x="1097280" y="4903465"/>
-            <a:ext cx="1920240" cy="615315"/>
-          </a:xfrm>
-          <a:prstGeom prst="rect">
-            <a:avLst/>
-          </a:prstGeom>
-          <a:noFill/>
-        </p:spPr>
-        <p:txBody>
-          <a:bodyPr wrap="square">
-            <a:spAutoFit/>
-          </a:bodyPr>
-          <a:lstStyle/>
-          <a:p>
-            <a:pPr algn="l"/>
-            <a:r>
-              <a:rPr sz="1100" b="0">
-                <a:solidFill>
-                  <a:srgbClr val="465461"/>
-                </a:solidFill>
-                <a:latin typeface="Arial"/>
-              </a:rPr>
-              <a:t>D — top-100</a:t>
-            </a:r>
-          </a:p>
-        </p:txBody>
-      </p:sp>
-      <p:sp>
-        <p:nvSpPr>
-          <p:cNvPr id="30" name="TextBox 29"/>
-          <p:cNvSpPr txBox="1"/>
-          <p:nvPr/>
-        </p:nvSpPr>
-        <p:spPr>
-          <a:xfrm>
-            <a:off x="3108960" y="4903465"/>
-            <a:ext cx="1920240" cy="615315"/>
-          </a:xfrm>
-          <a:prstGeom prst="rect">
-            <a:avLst/>
-          </a:prstGeom>
-          <a:noFill/>
-        </p:spPr>
-        <p:txBody>
-          <a:bodyPr wrap="square">
-            <a:spAutoFit/>
-          </a:bodyPr>
-          <a:lstStyle/>
-          <a:p>
-            <a:pPr algn="l"/>
-            <a:r>
-              <a:rPr sz="1100" b="0">
-                <a:solidFill>
-                  <a:srgbClr val="465461"/>
-                </a:solidFill>
-                <a:latin typeface="Arial"/>
-              </a:rPr>
-              <a:t>100 más largos</a:t>
-            </a:r>
-          </a:p>
-        </p:txBody>
-      </p:sp>
-      <p:sp>
-        <p:nvSpPr>
-          <p:cNvPr id="31" name="TextBox 30"/>
-          <p:cNvSpPr txBox="1"/>
-          <p:nvPr/>
-        </p:nvSpPr>
-        <p:spPr>
-          <a:xfrm>
-            <a:off x="5120640" y="4903465"/>
-            <a:ext cx="1920240" cy="615315"/>
-          </a:xfrm>
-          <a:prstGeom prst="rect">
-            <a:avLst/>
-          </a:prstGeom>
-          <a:noFill/>
-        </p:spPr>
-        <p:txBody>
-          <a:bodyPr wrap="square">
-            <a:spAutoFit/>
-          </a:bodyPr>
-          <a:lstStyle/>
-          <a:p>
-            <a:pPr algn="l"/>
-            <a:r>
-              <a:rPr sz="1100" b="0">
-                <a:solidFill>
-                  <a:srgbClr val="465461"/>
-                </a:solidFill>
-                <a:latin typeface="Arial"/>
-              </a:rPr>
-              <a:t>3h 33min</a:t>
-            </a:r>
-          </a:p>
-        </p:txBody>
-      </p:sp>
-      <p:sp>
-        <p:nvSpPr>
-          <p:cNvPr id="32" name="TextBox 31"/>
-          <p:cNvSpPr txBox="1"/>
-          <p:nvPr/>
-        </p:nvSpPr>
-        <p:spPr>
-          <a:xfrm>
-            <a:off x="7132320" y="4903465"/>
-            <a:ext cx="1920240" cy="615315"/>
-          </a:xfrm>
-          <a:prstGeom prst="rect">
-            <a:avLst/>
-          </a:prstGeom>
-          <a:noFill/>
-        </p:spPr>
-        <p:txBody>
-          <a:bodyPr wrap="square">
-            <a:spAutoFit/>
-          </a:bodyPr>
-          <a:lstStyle/>
-          <a:p>
-            <a:pPr algn="l"/>
-            <a:r>
-              <a:rPr sz="1100" b="0">
-                <a:solidFill>
-                  <a:srgbClr val="465461"/>
-                </a:solidFill>
-                <a:latin typeface="Arial"/>
-              </a:rPr>
-              <a:t>0.860</a:t>
-            </a:r>
-          </a:p>
-        </p:txBody>
-      </p:sp>
-      <p:sp>
-        <p:nvSpPr>
-          <p:cNvPr id="33" name="TextBox 32"/>
-          <p:cNvSpPr txBox="1"/>
-          <p:nvPr/>
-        </p:nvSpPr>
-        <p:spPr>
-          <a:xfrm>
-            <a:off x="9144000" y="4903465"/>
-            <a:ext cx="1920240" cy="615315"/>
-          </a:xfrm>
-          <a:prstGeom prst="rect">
-            <a:avLst/>
-          </a:prstGeom>
-          <a:noFill/>
-        </p:spPr>
-        <p:txBody>
-          <a:bodyPr wrap="square">
-            <a:spAutoFit/>
-          </a:bodyPr>
-          <a:lstStyle/>
-          <a:p>
-            <a:pPr algn="l"/>
-            <a:r>
-              <a:rPr sz="1100" b="0">
-                <a:solidFill>
-                  <a:srgbClr val="465461"/>
-                </a:solidFill>
-                <a:latin typeface="Arial"/>
-              </a:rPr>
-              <a:t>Caso general — mejor ratio fidelidad/coste</a:t>
-            </a:r>
-          </a:p>
-        </p:txBody>
-      </p:sp>
-      <p:sp>
-        <p:nvSpPr>
-          <p:cNvPr id="34" name="Rectangle 33"/>
-          <p:cNvSpPr/>
-          <p:nvPr/>
-        </p:nvSpPr>
-        <p:spPr>
-          <a:xfrm>
-            <a:off x="1051560" y="5478780"/>
-            <a:ext cx="10058400" cy="615315"/>
-          </a:xfrm>
-          <a:prstGeom prst="rect">
-            <a:avLst/>
-          </a:prstGeom>
-          <a:solidFill>
-            <a:srgbClr val="F1F2F6"/>
-          </a:solidFill>
-          <a:ln>
-            <a:noFill/>
-          </a:ln>
-        </p:spPr>
-        <p:style>
-          <a:lnRef idx="1">
-            <a:schemeClr val="accent1"/>
-          </a:lnRef>
-          <a:fillRef idx="3">
-            <a:schemeClr val="accent1"/>
-          </a:fillRef>
-          <a:effectRef idx="2">
-            <a:schemeClr val="accent1"/>
-          </a:effectRef>
-          <a:fontRef idx="minor">
-            <a:schemeClr val="lt1"/>
-          </a:fontRef>
-        </p:style>
-        <p:txBody>
-          <a:bodyPr rtlCol="0" anchor="ctr"/>
-          <a:lstStyle/>
-          <a:p>
-            <a:pPr algn="ctr"/>
-          </a:p>
-        </p:txBody>
-      </p:sp>
-      <p:sp>
-        <p:nvSpPr>
-          <p:cNvPr id="35" name="TextBox 34"/>
-          <p:cNvSpPr txBox="1"/>
-          <p:nvPr/>
-        </p:nvSpPr>
-        <p:spPr>
-          <a:xfrm>
-            <a:off x="1097280" y="5518780"/>
-            <a:ext cx="1920240" cy="615315"/>
-          </a:xfrm>
-          <a:prstGeom prst="rect">
-            <a:avLst/>
-          </a:prstGeom>
-          <a:noFill/>
-        </p:spPr>
-        <p:txBody>
-          <a:bodyPr wrap="square">
-            <a:spAutoFit/>
-          </a:bodyPr>
-          <a:lstStyle/>
-          <a:p>
-            <a:pPr algn="l"/>
-            <a:r>
-              <a:rPr sz="1100" b="0">
-                <a:solidFill>
-                  <a:srgbClr val="465461"/>
-                </a:solidFill>
-                <a:latin typeface="Arial"/>
-              </a:rPr>
-              <a:t>E — top-150</a:t>
-            </a:r>
-          </a:p>
-        </p:txBody>
-      </p:sp>
-      <p:sp>
-        <p:nvSpPr>
-          <p:cNvPr id="36" name="TextBox 35"/>
-          <p:cNvSpPr txBox="1"/>
-          <p:nvPr/>
-        </p:nvSpPr>
-        <p:spPr>
-          <a:xfrm>
-            <a:off x="3108960" y="5518780"/>
-            <a:ext cx="1920240" cy="615315"/>
-          </a:xfrm>
-          <a:prstGeom prst="rect">
-            <a:avLst/>
-          </a:prstGeom>
-          <a:noFill/>
-        </p:spPr>
-        <p:txBody>
-          <a:bodyPr wrap="square">
-            <a:spAutoFit/>
-          </a:bodyPr>
-          <a:lstStyle/>
-          <a:p>
-            <a:pPr algn="l"/>
-            <a:r>
-              <a:rPr sz="1100" b="0">
-                <a:solidFill>
-                  <a:srgbClr val="465461"/>
-                </a:solidFill>
-                <a:latin typeface="Arial"/>
-              </a:rPr>
-              <a:t>150 más largos</a:t>
-            </a:r>
-          </a:p>
-        </p:txBody>
-      </p:sp>
-      <p:sp>
-        <p:nvSpPr>
-          <p:cNvPr id="37" name="TextBox 36"/>
-          <p:cNvSpPr txBox="1"/>
-          <p:nvPr/>
-        </p:nvSpPr>
-        <p:spPr>
-          <a:xfrm>
-            <a:off x="5120640" y="5518780"/>
-            <a:ext cx="1920240" cy="615315"/>
-          </a:xfrm>
-          <a:prstGeom prst="rect">
-            <a:avLst/>
-          </a:prstGeom>
-          <a:noFill/>
-        </p:spPr>
-        <p:txBody>
-          <a:bodyPr wrap="square">
-            <a:spAutoFit/>
-          </a:bodyPr>
-          <a:lstStyle/>
-          <a:p>
-            <a:pPr algn="l"/>
-            <a:r>
-              <a:rPr sz="1100" b="0">
-                <a:solidFill>
-                  <a:srgbClr val="465461"/>
-                </a:solidFill>
-                <a:latin typeface="Arial"/>
-              </a:rPr>
-              <a:t>4h 12min</a:t>
-            </a:r>
-          </a:p>
-        </p:txBody>
-      </p:sp>
-      <p:sp>
-        <p:nvSpPr>
-          <p:cNvPr id="38" name="TextBox 37"/>
-          <p:cNvSpPr txBox="1"/>
-          <p:nvPr/>
-        </p:nvSpPr>
-        <p:spPr>
-          <a:xfrm>
-            <a:off x="7132320" y="5518780"/>
-            <a:ext cx="1920240" cy="615315"/>
-          </a:xfrm>
-          <a:prstGeom prst="rect">
-            <a:avLst/>
-          </a:prstGeom>
-          <a:noFill/>
-        </p:spPr>
-        <p:txBody>
-          <a:bodyPr wrap="square">
-            <a:spAutoFit/>
-          </a:bodyPr>
-          <a:lstStyle/>
-          <a:p>
-            <a:pPr algn="l"/>
-            <a:r>
-              <a:rPr sz="1100" b="0">
-                <a:solidFill>
-                  <a:srgbClr val="465461"/>
-                </a:solidFill>
-                <a:latin typeface="Arial"/>
-              </a:rPr>
-              <a:t>0.896</a:t>
-            </a:r>
-          </a:p>
-        </p:txBody>
-      </p:sp>
-      <p:sp>
-        <p:nvSpPr>
-          <p:cNvPr id="39" name="TextBox 38"/>
-          <p:cNvSpPr txBox="1"/>
-          <p:nvPr/>
-        </p:nvSpPr>
-        <p:spPr>
-          <a:xfrm>
-            <a:off x="9144000" y="5518780"/>
-            <a:ext cx="1920240" cy="615315"/>
-          </a:xfrm>
-          <a:prstGeom prst="rect">
-            <a:avLst/>
-          </a:prstGeom>
-          <a:noFill/>
-        </p:spPr>
-        <p:txBody>
-          <a:bodyPr wrap="square">
-            <a:spAutoFit/>
-          </a:bodyPr>
-          <a:lstStyle/>
-          <a:p>
-            <a:pPr algn="l"/>
-            <a:r>
-              <a:rPr sz="1100" b="0">
-                <a:solidFill>
-                  <a:srgbClr val="465461"/>
-                </a:solidFill>
-                <a:latin typeface="Arial"/>
-              </a:rPr>
-              <a:t>Máxima fidelidad con presupuesto de tiempo</a:t>
-            </a:r>
-          </a:p>
-        </p:txBody>
-      </p:sp>
-      <p:sp>
-        <p:nvSpPr>
-          <p:cNvPr id="40" name="TextBox 39"/>
-          <p:cNvSpPr txBox="1"/>
-          <p:nvPr/>
-        </p:nvSpPr>
-        <p:spPr>
-          <a:xfrm>
-            <a:off x="1051560" y="6231255"/>
+            <a:off x="1051560" y="5760720"/>
             <a:ext cx="10058400" cy="320040"/>
           </a:xfrm>
           <a:prstGeom prst="rect">
